--- a/CLASE-05/01-CLASE-05-CKA.pptx
+++ b/CLASE-05/01-CLASE-05-CKA.pptx
@@ -3206,80 +3206,30 @@
           </a:p>
         </p:txBody>
       </p:sp>
-      <p:sp>
-        <p:nvSpPr>
-          <p:cNvPr id="4" name="Freeform 3"/>
-          <p:cNvSpPr/>
-          <p:nvPr/>
-        </p:nvSpPr>
-        <p:spPr>
-          <a:xfrm>
-            <a:off x="9720832" y="400000"/>
-            <a:ext cx="2242335" cy="2186114"/>
-          </a:xfrm>
-          <a:custGeom>
-            <a:avLst/>
-            <a:gdLst/>
-            <a:ahLst/>
-            <a:cxnLst/>
-            <a:rect l="l" t="t" r="r" b="b"/>
-            <a:pathLst>
-              <a:path w="2242335" h="2186114">
-                <a:moveTo>
-                  <a:pt x="1121168" y="0"/>
-                </a:moveTo>
-                <a:lnTo>
-                  <a:pt x="2020274" y="432986"/>
-                </a:lnTo>
-                <a:lnTo>
-                  <a:pt x="2242335" y="1405899"/>
-                </a:lnTo>
-                <a:lnTo>
-                  <a:pt x="1620134" y="2186114"/>
-                </a:lnTo>
-                <a:lnTo>
-                  <a:pt x="622201" y="2186114"/>
-                </a:lnTo>
-                <a:lnTo>
-                  <a:pt x="0" y="1405899"/>
-                </a:lnTo>
-                <a:lnTo>
-                  <a:pt x="222061" y="432986"/>
-                </a:lnTo>
-                <a:close/>
-              </a:path>
-            </a:pathLst>
-          </a:custGeom>
-          <a:noFill/>
-          <a:ln w="28575">
-            <a:solidFill>
-              <a:srgbClr val="26354E"/>
-            </a:solidFill>
-          </a:ln>
-          <a:effectLst/>
-        </p:spPr>
-        <p:style>
-          <a:lnRef idx="1">
-            <a:schemeClr val="accent1"/>
-          </a:lnRef>
-          <a:fillRef idx="3">
-            <a:schemeClr val="accent1"/>
-          </a:fillRef>
-          <a:effectRef idx="2">
-            <a:schemeClr val="accent1"/>
-          </a:effectRef>
-          <a:fontRef idx="minor">
-            <a:schemeClr val="lt1"/>
-          </a:fontRef>
-        </p:style>
-        <p:txBody>
-          <a:bodyPr rtlCol="0" anchor="ctr"/>
-          <a:lstStyle/>
-          <a:p>
-            <a:pPr algn="ctr"/>
-          </a:p>
-        </p:txBody>
-      </p:sp>
+      <p:pic>
+        <p:nvPicPr>
+          <p:cNvPr id="4" name="Picture 3" descr="kubernetes.png"/>
+          <p:cNvPicPr>
+            <a:picLocks noChangeAspect="1"/>
+          </p:cNvPicPr>
+          <p:nvPr/>
+        </p:nvPicPr>
+        <p:blipFill>
+          <a:blip r:embed="rId2"/>
+          <a:stretch>
+            <a:fillRect/>
+          </a:stretch>
+        </p:blipFill>
+        <p:spPr>
+          <a:xfrm>
+            <a:off x="9642000" y="1000000"/>
+            <a:ext cx="1650000" cy="1650000"/>
+          </a:xfrm>
+          <a:prstGeom prst="rect">
+            <a:avLst/>
+          </a:prstGeom>
+        </p:spPr>
+      </p:pic>
       <p:sp>
         <p:nvSpPr>
           <p:cNvPr id="5" name="TextBox 4"/>
@@ -4251,7 +4201,7 @@
         <p:spPr>
           <a:xfrm>
             <a:off x="620000" y="560000"/>
-            <a:ext cx="10952000" cy="620000"/>
+            <a:ext cx="10052000" cy="620000"/>
           </a:xfrm>
           <a:prstGeom prst="rect">
             <a:avLst/>
@@ -4472,20 +4422,44 @@
           </a:p>
         </p:txBody>
       </p:sp>
-      <p:sp>
-        <p:nvSpPr>
-          <p:cNvPr id="8" name="Rounded Rectangle 7"/>
+      <p:pic>
+        <p:nvPicPr>
+          <p:cNvPr id="8" name="Picture 7" descr="svc.png"/>
+          <p:cNvPicPr>
+            <a:picLocks noChangeAspect="1"/>
+          </p:cNvPicPr>
+          <p:nvPr/>
+        </p:nvPicPr>
+        <p:blipFill>
+          <a:blip r:embed="rId2"/>
+          <a:stretch>
+            <a:fillRect/>
+          </a:stretch>
+        </p:blipFill>
+        <p:spPr>
+          <a:xfrm>
+            <a:off x="10932000" y="275000"/>
+            <a:ext cx="640000" cy="640000"/>
+          </a:xfrm>
+          <a:prstGeom prst="rect">
+            <a:avLst/>
+          </a:prstGeom>
+        </p:spPr>
+      </p:pic>
+      <p:sp>
+        <p:nvSpPr>
+          <p:cNvPr id="9" name="Rounded Rectangle 8"/>
           <p:cNvSpPr/>
           <p:nvPr/>
         </p:nvSpPr>
         <p:spPr>
           <a:xfrm>
-            <a:off x="620000" y="1790000"/>
-            <a:ext cx="2070400" cy="720000"/>
+            <a:off x="620000" y="1830000"/>
+            <a:ext cx="2022400" cy="760000"/>
           </a:xfrm>
           <a:prstGeom prst="roundRect">
             <a:avLst>
-              <a:gd name="adj" fmla="val 12000"/>
+              <a:gd name="adj" fmla="val 11000"/>
             </a:avLst>
           </a:prstGeom>
           <a:solidFill>
@@ -4524,60 +4498,14 @@
       </p:sp>
       <p:sp>
         <p:nvSpPr>
-          <p:cNvPr id="9" name="TextBox 8"/>
-          <p:cNvSpPr txBox="1"/>
-          <p:nvPr/>
-        </p:nvSpPr>
-        <p:spPr>
-          <a:xfrm>
-            <a:off x="690000" y="1790000"/>
-            <a:ext cx="1930400" cy="720000"/>
-          </a:xfrm>
-          <a:prstGeom prst="rect">
-            <a:avLst/>
-          </a:prstGeom>
-          <a:noFill/>
-        </p:spPr>
-        <p:txBody>
-          <a:bodyPr wrap="square" anchor="ctr" lIns="0" rIns="0" tIns="0" bIns="0">
-            <a:noAutofit/>
-          </a:bodyPr>
-          <a:lstStyle/>
-          <a:p>
-            <a:pPr algn="ctr" marL="0" indent="0">
-              <a:lnSpc>
-                <a:spcPct val="112000"/>
-              </a:lnSpc>
-              <a:spcBef>
-                <a:spcPts val="0"/>
-              </a:spcBef>
-              <a:spcAft>
-                <a:spcPts val="0"/>
-              </a:spcAft>
-              <a:buNone/>
-            </a:pPr>
-            <a:r>
-              <a:rPr sz="1100" b="1" i="0">
-                <a:solidFill>
-                  <a:srgbClr val="F3F6FC"/>
-                </a:solidFill>
-                <a:latin typeface="Segoe UI Semibold"/>
-              </a:rPr>
-              <a:t>CLIENTE</a:t>
-            </a:r>
-          </a:p>
-        </p:txBody>
-      </p:sp>
-      <p:sp>
-        <p:nvSpPr>
           <p:cNvPr id="10" name="TextBox 9"/>
           <p:cNvSpPr txBox="1"/>
           <p:nvPr/>
         </p:nvSpPr>
         <p:spPr>
           <a:xfrm>
-            <a:off x="2650400" y="1790000"/>
-            <a:ext cx="230000" cy="720000"/>
+            <a:off x="690000" y="1830000"/>
+            <a:ext cx="1882400" cy="760000"/>
           </a:xfrm>
           <a:prstGeom prst="rect">
             <a:avLst/>
@@ -4592,42 +4520,79 @@
           <a:p>
             <a:pPr algn="ctr" marL="0" indent="0">
               <a:lnSpc>
-                <a:spcPct val="100000"/>
-              </a:lnSpc>
-              <a:spcBef>
-                <a:spcPts val="0"/>
-              </a:spcBef>
-              <a:spcAft>
-                <a:spcPts val="0"/>
-              </a:spcAft>
-              <a:buNone/>
-            </a:pPr>
-            <a:r>
-              <a:rPr sz="1500" b="0" i="0">
-                <a:solidFill>
-                  <a:srgbClr val="74A6FF"/>
-                </a:solidFill>
-                <a:latin typeface="Segoe UI"/>
-              </a:rPr>
-              <a:t>→</a:t>
-            </a:r>
-          </a:p>
-        </p:txBody>
-      </p:sp>
-      <p:sp>
-        <p:nvSpPr>
-          <p:cNvPr id="11" name="Rounded Rectangle 10"/>
+                <a:spcPct val="112000"/>
+              </a:lnSpc>
+              <a:spcBef>
+                <a:spcPts val="0"/>
+              </a:spcBef>
+              <a:spcAft>
+                <a:spcPts val="0"/>
+              </a:spcAft>
+              <a:buNone/>
+            </a:pPr>
+            <a:r>
+              <a:rPr sz="1100" b="1" i="0">
+                <a:solidFill>
+                  <a:srgbClr val="F3F6FC"/>
+                </a:solidFill>
+                <a:latin typeface="Segoe UI Semibold"/>
+              </a:rPr>
+              <a:t>CLIENTE</a:t>
+            </a:r>
+          </a:p>
+        </p:txBody>
+      </p:sp>
+      <p:cxnSp>
+        <p:nvCxnSpPr>
+          <p:cNvPr id="11" name="Connector 10"/>
+          <p:cNvCxnSpPr/>
+          <p:nvPr/>
+        </p:nvCxnSpPr>
+        <p:spPr>
+          <a:xfrm>
+            <a:off x="2666400" y="2210000"/>
+            <a:ext cx="162000" cy="0"/>
+          </a:xfrm>
+          <a:prstGeom prst="line">
+            <a:avLst/>
+          </a:prstGeom>
+          <a:ln w="22225">
+            <a:solidFill>
+              <a:srgbClr val="74A6FF"/>
+            </a:solidFill>
+            <a:tailEnd type="triangle" w="med" len="med"/>
+          </a:ln>
+          <a:effectLst/>
+        </p:spPr>
+        <p:style>
+          <a:lnRef idx="2">
+            <a:schemeClr val="accent1"/>
+          </a:lnRef>
+          <a:fillRef idx="0">
+            <a:schemeClr val="accent1"/>
+          </a:fillRef>
+          <a:effectRef idx="1">
+            <a:schemeClr val="accent1"/>
+          </a:effectRef>
+          <a:fontRef idx="minor">
+            <a:schemeClr val="tx1"/>
+          </a:fontRef>
+        </p:style>
+      </p:cxnSp>
+      <p:sp>
+        <p:nvSpPr>
+          <p:cNvPr id="12" name="Rounded Rectangle 11"/>
           <p:cNvSpPr/>
           <p:nvPr/>
         </p:nvSpPr>
         <p:spPr>
           <a:xfrm>
-            <a:off x="2840400" y="1790000"/>
-            <a:ext cx="2070400" cy="720000"/>
+            <a:off x="2852400" y="1830000"/>
+            <a:ext cx="2022400" cy="760000"/>
           </a:xfrm>
           <a:prstGeom prst="roundRect">
             <a:avLst>
-              <a:gd name="adj" fmla="val 12000"/>
+              <a:gd name="adj" fmla="val 11000"/>
             </a:avLst>
           </a:prstGeom>
           <a:solidFill>
@@ -4666,60 +4631,14 @@
       </p:sp>
       <p:sp>
         <p:nvSpPr>
-          <p:cNvPr id="12" name="TextBox 11"/>
-          <p:cNvSpPr txBox="1"/>
-          <p:nvPr/>
-        </p:nvSpPr>
-        <p:spPr>
-          <a:xfrm>
-            <a:off x="2910400" y="1790000"/>
-            <a:ext cx="1930400" cy="720000"/>
-          </a:xfrm>
-          <a:prstGeom prst="rect">
-            <a:avLst/>
-          </a:prstGeom>
-          <a:noFill/>
-        </p:spPr>
-        <p:txBody>
-          <a:bodyPr wrap="square" anchor="ctr" lIns="0" rIns="0" tIns="0" bIns="0">
-            <a:noAutofit/>
-          </a:bodyPr>
-          <a:lstStyle/>
-          <a:p>
-            <a:pPr algn="ctr" marL="0" indent="0">
-              <a:lnSpc>
-                <a:spcPct val="112000"/>
-              </a:lnSpc>
-              <a:spcBef>
-                <a:spcPts val="0"/>
-              </a:spcBef>
-              <a:spcAft>
-                <a:spcPts val="0"/>
-              </a:spcAft>
-              <a:buNone/>
-            </a:pPr>
-            <a:r>
-              <a:rPr sz="1100" b="1" i="0">
-                <a:solidFill>
-                  <a:srgbClr val="F3F6FC"/>
-                </a:solidFill>
-                <a:latin typeface="Segoe UI Semibold"/>
-              </a:rPr>
-              <a:t>INGRESS CONTROLLER (proxy L7)</a:t>
-            </a:r>
-          </a:p>
-        </p:txBody>
-      </p:sp>
-      <p:sp>
-        <p:nvSpPr>
           <p:cNvPr id="13" name="TextBox 12"/>
           <p:cNvSpPr txBox="1"/>
           <p:nvPr/>
         </p:nvSpPr>
         <p:spPr>
           <a:xfrm>
-            <a:off x="4870800" y="1790000"/>
-            <a:ext cx="230000" cy="720000"/>
+            <a:off x="2922400" y="1830000"/>
+            <a:ext cx="1882400" cy="760000"/>
           </a:xfrm>
           <a:prstGeom prst="rect">
             <a:avLst/>
@@ -4734,42 +4653,79 @@
           <a:p>
             <a:pPr algn="ctr" marL="0" indent="0">
               <a:lnSpc>
-                <a:spcPct val="100000"/>
-              </a:lnSpc>
-              <a:spcBef>
-                <a:spcPts val="0"/>
-              </a:spcBef>
-              <a:spcAft>
-                <a:spcPts val="0"/>
-              </a:spcAft>
-              <a:buNone/>
-            </a:pPr>
-            <a:r>
-              <a:rPr sz="1500" b="0" i="0">
-                <a:solidFill>
-                  <a:srgbClr val="74A6FF"/>
-                </a:solidFill>
-                <a:latin typeface="Segoe UI"/>
-              </a:rPr>
-              <a:t>→</a:t>
-            </a:r>
-          </a:p>
-        </p:txBody>
-      </p:sp>
-      <p:sp>
-        <p:nvSpPr>
-          <p:cNvPr id="14" name="Rounded Rectangle 13"/>
+                <a:spcPct val="112000"/>
+              </a:lnSpc>
+              <a:spcBef>
+                <a:spcPts val="0"/>
+              </a:spcBef>
+              <a:spcAft>
+                <a:spcPts val="0"/>
+              </a:spcAft>
+              <a:buNone/>
+            </a:pPr>
+            <a:r>
+              <a:rPr sz="1100" b="1" i="0">
+                <a:solidFill>
+                  <a:srgbClr val="F3F6FC"/>
+                </a:solidFill>
+                <a:latin typeface="Segoe UI Semibold"/>
+              </a:rPr>
+              <a:t>INGRESS CONTROLLER (proxy L7)</a:t>
+            </a:r>
+          </a:p>
+        </p:txBody>
+      </p:sp>
+      <p:cxnSp>
+        <p:nvCxnSpPr>
+          <p:cNvPr id="14" name="Connector 13"/>
+          <p:cNvCxnSpPr/>
+          <p:nvPr/>
+        </p:nvCxnSpPr>
+        <p:spPr>
+          <a:xfrm>
+            <a:off x="4898800" y="2210000"/>
+            <a:ext cx="162000" cy="0"/>
+          </a:xfrm>
+          <a:prstGeom prst="line">
+            <a:avLst/>
+          </a:prstGeom>
+          <a:ln w="22225">
+            <a:solidFill>
+              <a:srgbClr val="74A6FF"/>
+            </a:solidFill>
+            <a:tailEnd type="triangle" w="med" len="med"/>
+          </a:ln>
+          <a:effectLst/>
+        </p:spPr>
+        <p:style>
+          <a:lnRef idx="2">
+            <a:schemeClr val="accent1"/>
+          </a:lnRef>
+          <a:fillRef idx="0">
+            <a:schemeClr val="accent1"/>
+          </a:fillRef>
+          <a:effectRef idx="1">
+            <a:schemeClr val="accent1"/>
+          </a:effectRef>
+          <a:fontRef idx="minor">
+            <a:schemeClr val="tx1"/>
+          </a:fontRef>
+        </p:style>
+      </p:cxnSp>
+      <p:sp>
+        <p:nvSpPr>
+          <p:cNvPr id="15" name="Rounded Rectangle 14"/>
           <p:cNvSpPr/>
           <p:nvPr/>
         </p:nvSpPr>
         <p:spPr>
           <a:xfrm>
-            <a:off x="5060800" y="1790000"/>
-            <a:ext cx="2070400" cy="720000"/>
+            <a:off x="5084800" y="1830000"/>
+            <a:ext cx="2022400" cy="760000"/>
           </a:xfrm>
           <a:prstGeom prst="roundRect">
             <a:avLst>
-              <a:gd name="adj" fmla="val 12000"/>
+              <a:gd name="adj" fmla="val 11000"/>
             </a:avLst>
           </a:prstGeom>
           <a:solidFill>
@@ -4808,60 +4764,14 @@
       </p:sp>
       <p:sp>
         <p:nvSpPr>
-          <p:cNvPr id="15" name="TextBox 14"/>
-          <p:cNvSpPr txBox="1"/>
-          <p:nvPr/>
-        </p:nvSpPr>
-        <p:spPr>
-          <a:xfrm>
-            <a:off x="5130800" y="1790000"/>
-            <a:ext cx="1930400" cy="720000"/>
-          </a:xfrm>
-          <a:prstGeom prst="rect">
-            <a:avLst/>
-          </a:prstGeom>
-          <a:noFill/>
-        </p:spPr>
-        <p:txBody>
-          <a:bodyPr wrap="square" anchor="ctr" lIns="0" rIns="0" tIns="0" bIns="0">
-            <a:noAutofit/>
-          </a:bodyPr>
-          <a:lstStyle/>
-          <a:p>
-            <a:pPr algn="ctr" marL="0" indent="0">
-              <a:lnSpc>
-                <a:spcPct val="112000"/>
-              </a:lnSpc>
-              <a:spcBef>
-                <a:spcPts val="0"/>
-              </a:spcBef>
-              <a:spcAft>
-                <a:spcPts val="0"/>
-              </a:spcAft>
-              <a:buNone/>
-            </a:pPr>
-            <a:r>
-              <a:rPr sz="1100" b="1" i="0">
-                <a:solidFill>
-                  <a:srgbClr val="F3F6FC"/>
-                </a:solidFill>
-                <a:latin typeface="Segoe UI Semibold"/>
-              </a:rPr>
-              <a:t>SERVICE</a:t>
-            </a:r>
-          </a:p>
-        </p:txBody>
-      </p:sp>
-      <p:sp>
-        <p:nvSpPr>
           <p:cNvPr id="16" name="TextBox 15"/>
           <p:cNvSpPr txBox="1"/>
           <p:nvPr/>
         </p:nvSpPr>
         <p:spPr>
           <a:xfrm>
-            <a:off x="7091200" y="1790000"/>
-            <a:ext cx="230000" cy="720000"/>
+            <a:off x="5154800" y="1830000"/>
+            <a:ext cx="1882400" cy="760000"/>
           </a:xfrm>
           <a:prstGeom prst="rect">
             <a:avLst/>
@@ -4876,42 +4786,79 @@
           <a:p>
             <a:pPr algn="ctr" marL="0" indent="0">
               <a:lnSpc>
-                <a:spcPct val="100000"/>
-              </a:lnSpc>
-              <a:spcBef>
-                <a:spcPts val="0"/>
-              </a:spcBef>
-              <a:spcAft>
-                <a:spcPts val="0"/>
-              </a:spcAft>
-              <a:buNone/>
-            </a:pPr>
-            <a:r>
-              <a:rPr sz="1500" b="0" i="0">
-                <a:solidFill>
-                  <a:srgbClr val="74A6FF"/>
-                </a:solidFill>
-                <a:latin typeface="Segoe UI"/>
-              </a:rPr>
-              <a:t>→</a:t>
-            </a:r>
-          </a:p>
-        </p:txBody>
-      </p:sp>
-      <p:sp>
-        <p:nvSpPr>
-          <p:cNvPr id="17" name="Rounded Rectangle 16"/>
+                <a:spcPct val="112000"/>
+              </a:lnSpc>
+              <a:spcBef>
+                <a:spcPts val="0"/>
+              </a:spcBef>
+              <a:spcAft>
+                <a:spcPts val="0"/>
+              </a:spcAft>
+              <a:buNone/>
+            </a:pPr>
+            <a:r>
+              <a:rPr sz="1100" b="1" i="0">
+                <a:solidFill>
+                  <a:srgbClr val="F3F6FC"/>
+                </a:solidFill>
+                <a:latin typeface="Segoe UI Semibold"/>
+              </a:rPr>
+              <a:t>SERVICE</a:t>
+            </a:r>
+          </a:p>
+        </p:txBody>
+      </p:sp>
+      <p:cxnSp>
+        <p:nvCxnSpPr>
+          <p:cNvPr id="17" name="Connector 16"/>
+          <p:cNvCxnSpPr/>
+          <p:nvPr/>
+        </p:nvCxnSpPr>
+        <p:spPr>
+          <a:xfrm>
+            <a:off x="7131200" y="2210000"/>
+            <a:ext cx="162000" cy="0"/>
+          </a:xfrm>
+          <a:prstGeom prst="line">
+            <a:avLst/>
+          </a:prstGeom>
+          <a:ln w="22225">
+            <a:solidFill>
+              <a:srgbClr val="74A6FF"/>
+            </a:solidFill>
+            <a:tailEnd type="triangle" w="med" len="med"/>
+          </a:ln>
+          <a:effectLst/>
+        </p:spPr>
+        <p:style>
+          <a:lnRef idx="2">
+            <a:schemeClr val="accent1"/>
+          </a:lnRef>
+          <a:fillRef idx="0">
+            <a:schemeClr val="accent1"/>
+          </a:fillRef>
+          <a:effectRef idx="1">
+            <a:schemeClr val="accent1"/>
+          </a:effectRef>
+          <a:fontRef idx="minor">
+            <a:schemeClr val="tx1"/>
+          </a:fontRef>
+        </p:style>
+      </p:cxnSp>
+      <p:sp>
+        <p:nvSpPr>
+          <p:cNvPr id="18" name="Rounded Rectangle 17"/>
           <p:cNvSpPr/>
           <p:nvPr/>
         </p:nvSpPr>
         <p:spPr>
           <a:xfrm>
-            <a:off x="7281200" y="1790000"/>
-            <a:ext cx="2070400" cy="720000"/>
+            <a:off x="7317200" y="1830000"/>
+            <a:ext cx="2022400" cy="760000"/>
           </a:xfrm>
           <a:prstGeom prst="roundRect">
             <a:avLst>
-              <a:gd name="adj" fmla="val 12000"/>
+              <a:gd name="adj" fmla="val 11000"/>
             </a:avLst>
           </a:prstGeom>
           <a:solidFill>
@@ -4950,60 +4897,14 @@
       </p:sp>
       <p:sp>
         <p:nvSpPr>
-          <p:cNvPr id="18" name="TextBox 17"/>
-          <p:cNvSpPr txBox="1"/>
-          <p:nvPr/>
-        </p:nvSpPr>
-        <p:spPr>
-          <a:xfrm>
-            <a:off x="7351200" y="1790000"/>
-            <a:ext cx="1930400" cy="720000"/>
-          </a:xfrm>
-          <a:prstGeom prst="rect">
-            <a:avLst/>
-          </a:prstGeom>
-          <a:noFill/>
-        </p:spPr>
-        <p:txBody>
-          <a:bodyPr wrap="square" anchor="ctr" lIns="0" rIns="0" tIns="0" bIns="0">
-            <a:noAutofit/>
-          </a:bodyPr>
-          <a:lstStyle/>
-          <a:p>
-            <a:pPr algn="ctr" marL="0" indent="0">
-              <a:lnSpc>
-                <a:spcPct val="112000"/>
-              </a:lnSpc>
-              <a:spcBef>
-                <a:spcPts val="0"/>
-              </a:spcBef>
-              <a:spcAft>
-                <a:spcPts val="0"/>
-              </a:spcAft>
-              <a:buNone/>
-            </a:pPr>
-            <a:r>
-              <a:rPr sz="1100" b="1" i="0">
-                <a:solidFill>
-                  <a:srgbClr val="F3F6FC"/>
-                </a:solidFill>
-                <a:latin typeface="Segoe UI Semibold"/>
-              </a:rPr>
-              <a:t>ENDPOINTSLICE</a:t>
-            </a:r>
-          </a:p>
-        </p:txBody>
-      </p:sp>
-      <p:sp>
-        <p:nvSpPr>
           <p:cNvPr id="19" name="TextBox 18"/>
           <p:cNvSpPr txBox="1"/>
           <p:nvPr/>
         </p:nvSpPr>
         <p:spPr>
           <a:xfrm>
-            <a:off x="9311600" y="1790000"/>
-            <a:ext cx="230000" cy="720000"/>
+            <a:off x="7387200" y="1830000"/>
+            <a:ext cx="1882400" cy="760000"/>
           </a:xfrm>
           <a:prstGeom prst="rect">
             <a:avLst/>
@@ -5018,42 +4919,79 @@
           <a:p>
             <a:pPr algn="ctr" marL="0" indent="0">
               <a:lnSpc>
-                <a:spcPct val="100000"/>
-              </a:lnSpc>
-              <a:spcBef>
-                <a:spcPts val="0"/>
-              </a:spcBef>
-              <a:spcAft>
-                <a:spcPts val="0"/>
-              </a:spcAft>
-              <a:buNone/>
-            </a:pPr>
-            <a:r>
-              <a:rPr sz="1500" b="0" i="0">
-                <a:solidFill>
-                  <a:srgbClr val="74A6FF"/>
-                </a:solidFill>
-                <a:latin typeface="Segoe UI"/>
-              </a:rPr>
-              <a:t>→</a:t>
-            </a:r>
-          </a:p>
-        </p:txBody>
-      </p:sp>
-      <p:sp>
-        <p:nvSpPr>
-          <p:cNvPr id="20" name="Rounded Rectangle 19"/>
+                <a:spcPct val="112000"/>
+              </a:lnSpc>
+              <a:spcBef>
+                <a:spcPts val="0"/>
+              </a:spcBef>
+              <a:spcAft>
+                <a:spcPts val="0"/>
+              </a:spcAft>
+              <a:buNone/>
+            </a:pPr>
+            <a:r>
+              <a:rPr sz="1100" b="1" i="0">
+                <a:solidFill>
+                  <a:srgbClr val="F3F6FC"/>
+                </a:solidFill>
+                <a:latin typeface="Segoe UI Semibold"/>
+              </a:rPr>
+              <a:t>ENDPOINTSLICE</a:t>
+            </a:r>
+          </a:p>
+        </p:txBody>
+      </p:sp>
+      <p:cxnSp>
+        <p:nvCxnSpPr>
+          <p:cNvPr id="20" name="Connector 19"/>
+          <p:cNvCxnSpPr/>
+          <p:nvPr/>
+        </p:nvCxnSpPr>
+        <p:spPr>
+          <a:xfrm>
+            <a:off x="9363600" y="2210000"/>
+            <a:ext cx="162000" cy="0"/>
+          </a:xfrm>
+          <a:prstGeom prst="line">
+            <a:avLst/>
+          </a:prstGeom>
+          <a:ln w="22225">
+            <a:solidFill>
+              <a:srgbClr val="74A6FF"/>
+            </a:solidFill>
+            <a:tailEnd type="triangle" w="med" len="med"/>
+          </a:ln>
+          <a:effectLst/>
+        </p:spPr>
+        <p:style>
+          <a:lnRef idx="2">
+            <a:schemeClr val="accent1"/>
+          </a:lnRef>
+          <a:fillRef idx="0">
+            <a:schemeClr val="accent1"/>
+          </a:fillRef>
+          <a:effectRef idx="1">
+            <a:schemeClr val="accent1"/>
+          </a:effectRef>
+          <a:fontRef idx="minor">
+            <a:schemeClr val="tx1"/>
+          </a:fontRef>
+        </p:style>
+      </p:cxnSp>
+      <p:sp>
+        <p:nvSpPr>
+          <p:cNvPr id="21" name="Rounded Rectangle 20"/>
           <p:cNvSpPr/>
           <p:nvPr/>
         </p:nvSpPr>
         <p:spPr>
           <a:xfrm>
-            <a:off x="9501600" y="1790000"/>
-            <a:ext cx="2070400" cy="720000"/>
+            <a:off x="9549600" y="1830000"/>
+            <a:ext cx="2022400" cy="760000"/>
           </a:xfrm>
           <a:prstGeom prst="roundRect">
             <a:avLst>
-              <a:gd name="adj" fmla="val 12000"/>
+              <a:gd name="adj" fmla="val 11000"/>
             </a:avLst>
           </a:prstGeom>
           <a:solidFill>
@@ -5092,14 +5030,14 @@
       </p:sp>
       <p:sp>
         <p:nvSpPr>
-          <p:cNvPr id="21" name="TextBox 20"/>
+          <p:cNvPr id="22" name="TextBox 21"/>
           <p:cNvSpPr txBox="1"/>
           <p:nvPr/>
         </p:nvSpPr>
         <p:spPr>
           <a:xfrm>
-            <a:off x="9571600" y="1790000"/>
-            <a:ext cx="1930400" cy="720000"/>
+            <a:off x="9619600" y="1830000"/>
+            <a:ext cx="1882400" cy="760000"/>
           </a:xfrm>
           <a:prstGeom prst="rect">
             <a:avLst/>
@@ -5138,13 +5076,13 @@
       </p:sp>
       <p:sp>
         <p:nvSpPr>
-          <p:cNvPr id="22" name="Rounded Rectangle 21"/>
+          <p:cNvPr id="23" name="Rounded Rectangle 22"/>
           <p:cNvSpPr/>
           <p:nvPr/>
         </p:nvSpPr>
         <p:spPr>
           <a:xfrm>
-            <a:off x="620000" y="2830000"/>
+            <a:off x="620000" y="2950000"/>
             <a:ext cx="10952000" cy="2070000"/>
           </a:xfrm>
           <a:prstGeom prst="roundRect">
@@ -5188,13 +5126,13 @@
       </p:sp>
       <p:sp>
         <p:nvSpPr>
-          <p:cNvPr id="23" name="Rectangle 22"/>
+          <p:cNvPr id="24" name="Rectangle 23"/>
           <p:cNvSpPr/>
           <p:nvPr/>
         </p:nvSpPr>
         <p:spPr>
           <a:xfrm>
-            <a:off x="650000" y="2854000"/>
+            <a:off x="650000" y="2974000"/>
             <a:ext cx="40000" cy="2022000"/>
           </a:xfrm>
           <a:prstGeom prst="rect">
@@ -5234,13 +5172,13 @@
       </p:sp>
       <p:sp>
         <p:nvSpPr>
-          <p:cNvPr id="24" name="TextBox 23"/>
+          <p:cNvPr id="25" name="TextBox 24"/>
           <p:cNvSpPr txBox="1"/>
           <p:nvPr/>
         </p:nvSpPr>
         <p:spPr>
           <a:xfrm>
-            <a:off x="880000" y="3070000"/>
+            <a:off x="880000" y="3190000"/>
             <a:ext cx="10432000" cy="1670000"/>
           </a:xfrm>
           <a:prstGeom prst="rect">
@@ -5479,7 +5417,7 @@
         <p:spPr>
           <a:xfrm>
             <a:off x="620000" y="560000"/>
-            <a:ext cx="10952000" cy="620000"/>
+            <a:ext cx="10052000" cy="620000"/>
           </a:xfrm>
           <a:prstGeom prst="rect">
             <a:avLst/>
@@ -5700,9 +5638,33 @@
           </a:p>
         </p:txBody>
       </p:sp>
-      <p:sp>
-        <p:nvSpPr>
-          <p:cNvPr id="8" name="TextBox 7"/>
+      <p:pic>
+        <p:nvPicPr>
+          <p:cNvPr id="8" name="Picture 7" descr="ing.png"/>
+          <p:cNvPicPr>
+            <a:picLocks noChangeAspect="1"/>
+          </p:cNvPicPr>
+          <p:nvPr/>
+        </p:nvPicPr>
+        <p:blipFill>
+          <a:blip r:embed="rId2"/>
+          <a:stretch>
+            <a:fillRect/>
+          </a:stretch>
+        </p:blipFill>
+        <p:spPr>
+          <a:xfrm>
+            <a:off x="10932000" y="275000"/>
+            <a:ext cx="640000" cy="640000"/>
+          </a:xfrm>
+          <a:prstGeom prst="rect">
+            <a:avLst/>
+          </a:prstGeom>
+        </p:spPr>
+      </p:pic>
+      <p:sp>
+        <p:nvSpPr>
+          <p:cNvPr id="9" name="TextBox 8"/>
           <p:cNvSpPr txBox="1"/>
           <p:nvPr/>
         </p:nvSpPr>
@@ -5748,7 +5710,7 @@
       </p:sp>
       <p:sp>
         <p:nvSpPr>
-          <p:cNvPr id="9" name="Rounded Rectangle 8"/>
+          <p:cNvPr id="10" name="Rounded Rectangle 9"/>
           <p:cNvSpPr/>
           <p:nvPr/>
         </p:nvSpPr>
@@ -5798,7 +5760,7 @@
       </p:sp>
       <p:sp>
         <p:nvSpPr>
-          <p:cNvPr id="10" name="Rectangle 9"/>
+          <p:cNvPr id="11" name="Rectangle 10"/>
           <p:cNvSpPr/>
           <p:nvPr/>
         </p:nvSpPr>
@@ -5844,7 +5806,7 @@
       </p:sp>
       <p:sp>
         <p:nvSpPr>
-          <p:cNvPr id="11" name="TextBox 10"/>
+          <p:cNvPr id="12" name="TextBox 11"/>
           <p:cNvSpPr txBox="1"/>
           <p:nvPr/>
         </p:nvSpPr>
@@ -5987,7 +5949,7 @@
       </p:sp>
       <p:sp>
         <p:nvSpPr>
-          <p:cNvPr id="12" name="Rounded Rectangle 11"/>
+          <p:cNvPr id="13" name="Rounded Rectangle 12"/>
           <p:cNvSpPr/>
           <p:nvPr/>
         </p:nvSpPr>
@@ -6037,7 +5999,7 @@
       </p:sp>
       <p:sp>
         <p:nvSpPr>
-          <p:cNvPr id="13" name="Rectangle 12"/>
+          <p:cNvPr id="14" name="Rectangle 13"/>
           <p:cNvSpPr/>
           <p:nvPr/>
         </p:nvSpPr>
@@ -6083,7 +6045,7 @@
       </p:sp>
       <p:sp>
         <p:nvSpPr>
-          <p:cNvPr id="14" name="TextBox 13"/>
+          <p:cNvPr id="15" name="TextBox 14"/>
           <p:cNvSpPr txBox="1"/>
           <p:nvPr/>
         </p:nvSpPr>
@@ -6208,7 +6170,7 @@
         <p:spPr>
           <a:xfrm>
             <a:off x="620000" y="560000"/>
-            <a:ext cx="10952000" cy="620000"/>
+            <a:ext cx="10052000" cy="620000"/>
           </a:xfrm>
           <a:prstGeom prst="rect">
             <a:avLst/>
@@ -6429,9 +6391,33 @@
           </a:p>
         </p:txBody>
       </p:sp>
-      <p:sp>
-        <p:nvSpPr>
-          <p:cNvPr id="8" name="Rounded Rectangle 7"/>
+      <p:pic>
+        <p:nvPicPr>
+          <p:cNvPr id="8" name="Picture 7" descr="ing.png"/>
+          <p:cNvPicPr>
+            <a:picLocks noChangeAspect="1"/>
+          </p:cNvPicPr>
+          <p:nvPr/>
+        </p:nvPicPr>
+        <p:blipFill>
+          <a:blip r:embed="rId2"/>
+          <a:stretch>
+            <a:fillRect/>
+          </a:stretch>
+        </p:blipFill>
+        <p:spPr>
+          <a:xfrm>
+            <a:off x="10932000" y="275000"/>
+            <a:ext cx="640000" cy="640000"/>
+          </a:xfrm>
+          <a:prstGeom prst="rect">
+            <a:avLst/>
+          </a:prstGeom>
+        </p:spPr>
+      </p:pic>
+      <p:sp>
+        <p:nvSpPr>
+          <p:cNvPr id="9" name="Rounded Rectangle 8"/>
           <p:cNvSpPr/>
           <p:nvPr/>
         </p:nvSpPr>
@@ -6481,7 +6467,7 @@
       </p:sp>
       <p:sp>
         <p:nvSpPr>
-          <p:cNvPr id="9" name="Rectangle 8"/>
+          <p:cNvPr id="10" name="Rectangle 9"/>
           <p:cNvSpPr/>
           <p:nvPr/>
         </p:nvSpPr>
@@ -6527,7 +6513,7 @@
       </p:sp>
       <p:sp>
         <p:nvSpPr>
-          <p:cNvPr id="10" name="TextBox 9"/>
+          <p:cNvPr id="11" name="TextBox 10"/>
           <p:cNvSpPr txBox="1"/>
           <p:nvPr/>
         </p:nvSpPr>
@@ -6596,7 +6582,7 @@
       </p:sp>
       <p:sp>
         <p:nvSpPr>
-          <p:cNvPr id="11" name="TextBox 10"/>
+          <p:cNvPr id="12" name="TextBox 11"/>
           <p:cNvSpPr txBox="1"/>
           <p:nvPr/>
         </p:nvSpPr>
@@ -6716,7 +6702,7 @@
       </p:sp>
       <p:sp>
         <p:nvSpPr>
-          <p:cNvPr id="12" name="Rounded Rectangle 11"/>
+          <p:cNvPr id="13" name="Rounded Rectangle 12"/>
           <p:cNvSpPr/>
           <p:nvPr/>
         </p:nvSpPr>
@@ -6766,7 +6752,7 @@
       </p:sp>
       <p:sp>
         <p:nvSpPr>
-          <p:cNvPr id="13" name="Rectangle 12"/>
+          <p:cNvPr id="14" name="Rectangle 13"/>
           <p:cNvSpPr/>
           <p:nvPr/>
         </p:nvSpPr>
@@ -6812,7 +6798,7 @@
       </p:sp>
       <p:sp>
         <p:nvSpPr>
-          <p:cNvPr id="14" name="TextBox 13"/>
+          <p:cNvPr id="15" name="TextBox 14"/>
           <p:cNvSpPr txBox="1"/>
           <p:nvPr/>
         </p:nvSpPr>
@@ -6881,7 +6867,7 @@
       </p:sp>
       <p:sp>
         <p:nvSpPr>
-          <p:cNvPr id="15" name="TextBox 14"/>
+          <p:cNvPr id="16" name="TextBox 15"/>
           <p:cNvSpPr txBox="1"/>
           <p:nvPr/>
         </p:nvSpPr>
@@ -7001,7 +6987,7 @@
       </p:sp>
       <p:sp>
         <p:nvSpPr>
-          <p:cNvPr id="16" name="Rounded Rectangle 15"/>
+          <p:cNvPr id="17" name="Rounded Rectangle 16"/>
           <p:cNvSpPr/>
           <p:nvPr/>
         </p:nvSpPr>
@@ -7051,7 +7037,7 @@
       </p:sp>
       <p:sp>
         <p:nvSpPr>
-          <p:cNvPr id="17" name="Rectangle 16"/>
+          <p:cNvPr id="18" name="Rectangle 17"/>
           <p:cNvSpPr/>
           <p:nvPr/>
         </p:nvSpPr>
@@ -7097,7 +7083,7 @@
       </p:sp>
       <p:sp>
         <p:nvSpPr>
-          <p:cNvPr id="18" name="TextBox 17"/>
+          <p:cNvPr id="19" name="TextBox 18"/>
           <p:cNvSpPr txBox="1"/>
           <p:nvPr/>
         </p:nvSpPr>
@@ -7222,7 +7208,7 @@
         <p:spPr>
           <a:xfrm>
             <a:off x="620000" y="560000"/>
-            <a:ext cx="10952000" cy="620000"/>
+            <a:ext cx="10052000" cy="620000"/>
           </a:xfrm>
           <a:prstGeom prst="rect">
             <a:avLst/>
@@ -7443,9 +7429,33 @@
           </a:p>
         </p:txBody>
       </p:sp>
-      <p:sp>
-        <p:nvSpPr>
-          <p:cNvPr id="8" name="Rounded Rectangle 7"/>
+      <p:pic>
+        <p:nvPicPr>
+          <p:cNvPr id="8" name="Picture 7" descr="ing.png"/>
+          <p:cNvPicPr>
+            <a:picLocks noChangeAspect="1"/>
+          </p:cNvPicPr>
+          <p:nvPr/>
+        </p:nvPicPr>
+        <p:blipFill>
+          <a:blip r:embed="rId2"/>
+          <a:stretch>
+            <a:fillRect/>
+          </a:stretch>
+        </p:blipFill>
+        <p:spPr>
+          <a:xfrm>
+            <a:off x="10932000" y="275000"/>
+            <a:ext cx="640000" cy="640000"/>
+          </a:xfrm>
+          <a:prstGeom prst="rect">
+            <a:avLst/>
+          </a:prstGeom>
+        </p:spPr>
+      </p:pic>
+      <p:sp>
+        <p:nvSpPr>
+          <p:cNvPr id="9" name="Rounded Rectangle 8"/>
           <p:cNvSpPr/>
           <p:nvPr/>
         </p:nvSpPr>
@@ -7495,7 +7505,7 @@
       </p:sp>
       <p:sp>
         <p:nvSpPr>
-          <p:cNvPr id="9" name="Rectangle 8"/>
+          <p:cNvPr id="10" name="Rectangle 9"/>
           <p:cNvSpPr/>
           <p:nvPr/>
         </p:nvSpPr>
@@ -7541,7 +7551,7 @@
       </p:sp>
       <p:sp>
         <p:nvSpPr>
-          <p:cNvPr id="10" name="TextBox 9"/>
+          <p:cNvPr id="11" name="TextBox 10"/>
           <p:cNvSpPr txBox="1"/>
           <p:nvPr/>
         </p:nvSpPr>
@@ -7587,7 +7597,7 @@
       </p:sp>
       <p:sp>
         <p:nvSpPr>
-          <p:cNvPr id="11" name="TextBox 10"/>
+          <p:cNvPr id="12" name="TextBox 11"/>
           <p:cNvSpPr txBox="1"/>
           <p:nvPr/>
         </p:nvSpPr>
@@ -7908,7 +7918,7 @@
       </p:sp>
       <p:sp>
         <p:nvSpPr>
-          <p:cNvPr id="12" name="Rounded Rectangle 11"/>
+          <p:cNvPr id="13" name="Rounded Rectangle 12"/>
           <p:cNvSpPr/>
           <p:nvPr/>
         </p:nvSpPr>
@@ -7958,7 +7968,7 @@
       </p:sp>
       <p:sp>
         <p:nvSpPr>
-          <p:cNvPr id="13" name="Rectangle 12"/>
+          <p:cNvPr id="14" name="Rectangle 13"/>
           <p:cNvSpPr/>
           <p:nvPr/>
         </p:nvSpPr>
@@ -8004,7 +8014,7 @@
       </p:sp>
       <p:sp>
         <p:nvSpPr>
-          <p:cNvPr id="14" name="TextBox 13"/>
+          <p:cNvPr id="15" name="TextBox 14"/>
           <p:cNvSpPr txBox="1"/>
           <p:nvPr/>
         </p:nvSpPr>
@@ -8050,7 +8060,7 @@
       </p:sp>
       <p:sp>
         <p:nvSpPr>
-          <p:cNvPr id="15" name="TextBox 14"/>
+          <p:cNvPr id="16" name="TextBox 15"/>
           <p:cNvSpPr txBox="1"/>
           <p:nvPr/>
         </p:nvSpPr>
@@ -8903,7 +8913,149 @@
       </p:sp>
       <p:sp>
         <p:nvSpPr>
-          <p:cNvPr id="16" name="Rounded Rectangle 15"/>
+          <p:cNvPr id="16" name="Freeform 15"/>
+          <p:cNvSpPr/>
+          <p:nvPr/>
+        </p:nvSpPr>
+        <p:spPr>
+          <a:xfrm>
+            <a:off x="9590000" y="1418800"/>
+            <a:ext cx="784000" cy="842800"/>
+          </a:xfrm>
+          <a:custGeom>
+            <a:avLst/>
+            <a:gdLst/>
+            <a:ahLst/>
+            <a:cxnLst/>
+            <a:rect l="l" t="t" r="r" b="b"/>
+            <a:pathLst>
+              <a:path w="784000" h="842800">
+                <a:moveTo>
+                  <a:pt x="235200" y="0"/>
+                </a:moveTo>
+                <a:lnTo>
+                  <a:pt x="235200" y="333200"/>
+                </a:lnTo>
+                <a:lnTo>
+                  <a:pt x="0" y="842800"/>
+                </a:lnTo>
+                <a:lnTo>
+                  <a:pt x="784000" y="842800"/>
+                </a:lnTo>
+                <a:lnTo>
+                  <a:pt x="548800" y="333200"/>
+                </a:lnTo>
+                <a:lnTo>
+                  <a:pt x="548800" y="0"/>
+                </a:lnTo>
+              </a:path>
+            </a:pathLst>
+          </a:custGeom>
+          <a:noFill/>
+          <a:ln w="33020">
+            <a:solidFill>
+              <a:srgbClr val="74A6FF"/>
+            </a:solidFill>
+          </a:ln>
+          <a:effectLst/>
+        </p:spPr>
+        <p:style>
+          <a:lnRef idx="1">
+            <a:schemeClr val="accent1"/>
+          </a:lnRef>
+          <a:fillRef idx="3">
+            <a:schemeClr val="accent1"/>
+          </a:fillRef>
+          <a:effectRef idx="2">
+            <a:schemeClr val="accent1"/>
+          </a:effectRef>
+          <a:fontRef idx="minor">
+            <a:schemeClr val="lt1"/>
+          </a:fontRef>
+        </p:style>
+        <p:txBody>
+          <a:bodyPr rtlCol="0" anchor="ctr"/>
+          <a:lstStyle/>
+          <a:p>
+            <a:pPr algn="ctr"/>
+          </a:p>
+        </p:txBody>
+      </p:sp>
+      <p:cxnSp>
+        <p:nvCxnSpPr>
+          <p:cNvPr id="17" name="Connector 16"/>
+          <p:cNvCxnSpPr/>
+          <p:nvPr/>
+        </p:nvCxnSpPr>
+        <p:spPr>
+          <a:xfrm>
+            <a:off x="9766400" y="1418800"/>
+            <a:ext cx="431200" cy="0"/>
+          </a:xfrm>
+          <a:prstGeom prst="line">
+            <a:avLst/>
+          </a:prstGeom>
+          <a:ln w="33020">
+            <a:solidFill>
+              <a:srgbClr val="74A6FF"/>
+            </a:solidFill>
+          </a:ln>
+          <a:effectLst/>
+        </p:spPr>
+        <p:style>
+          <a:lnRef idx="2">
+            <a:schemeClr val="accent1"/>
+          </a:lnRef>
+          <a:fillRef idx="0">
+            <a:schemeClr val="accent1"/>
+          </a:fillRef>
+          <a:effectRef idx="1">
+            <a:schemeClr val="accent1"/>
+          </a:effectRef>
+          <a:fontRef idx="minor">
+            <a:schemeClr val="tx1"/>
+          </a:fontRef>
+        </p:style>
+      </p:cxnSp>
+      <p:cxnSp>
+        <p:nvCxnSpPr>
+          <p:cNvPr id="18" name="Connector 17"/>
+          <p:cNvCxnSpPr/>
+          <p:nvPr/>
+        </p:nvCxnSpPr>
+        <p:spPr>
+          <a:xfrm>
+            <a:off x="9727200" y="2006800"/>
+            <a:ext cx="509600" cy="0"/>
+          </a:xfrm>
+          <a:prstGeom prst="line">
+            <a:avLst/>
+          </a:prstGeom>
+          <a:ln w="33020">
+            <a:solidFill>
+              <a:srgbClr val="74A6FF"/>
+            </a:solidFill>
+          </a:ln>
+          <a:effectLst/>
+        </p:spPr>
+        <p:style>
+          <a:lnRef idx="2">
+            <a:schemeClr val="accent1"/>
+          </a:lnRef>
+          <a:fillRef idx="0">
+            <a:schemeClr val="accent1"/>
+          </a:fillRef>
+          <a:effectRef idx="1">
+            <a:schemeClr val="accent1"/>
+          </a:effectRef>
+          <a:fontRef idx="minor">
+            <a:schemeClr val="tx1"/>
+          </a:fontRef>
+        </p:style>
+      </p:cxnSp>
+      <p:sp>
+        <p:nvSpPr>
+          <p:cNvPr id="19" name="Rounded Rectangle 18"/>
           <p:cNvSpPr/>
           <p:nvPr/>
         </p:nvSpPr>
@@ -8953,7 +9105,7 @@
       </p:sp>
       <p:sp>
         <p:nvSpPr>
-          <p:cNvPr id="17" name="Rectangle 16"/>
+          <p:cNvPr id="20" name="Rectangle 19"/>
           <p:cNvSpPr/>
           <p:nvPr/>
         </p:nvSpPr>
@@ -8999,7 +9151,7 @@
       </p:sp>
       <p:sp>
         <p:nvSpPr>
-          <p:cNvPr id="18" name="TextBox 17"/>
+          <p:cNvPr id="21" name="TextBox 20"/>
           <p:cNvSpPr txBox="1"/>
           <p:nvPr/>
         </p:nvSpPr>
@@ -9068,7 +9220,7 @@
       </p:sp>
       <p:sp>
         <p:nvSpPr>
-          <p:cNvPr id="19" name="Rectangle 18"/>
+          <p:cNvPr id="22" name="Rectangle 21"/>
           <p:cNvSpPr/>
           <p:nvPr/>
         </p:nvSpPr>
@@ -9114,7 +9266,7 @@
       </p:sp>
       <p:sp>
         <p:nvSpPr>
-          <p:cNvPr id="20" name="TextBox 19"/>
+          <p:cNvPr id="23" name="TextBox 22"/>
           <p:cNvSpPr txBox="1"/>
           <p:nvPr/>
         </p:nvSpPr>
@@ -9183,7 +9335,7 @@
       </p:sp>
       <p:sp>
         <p:nvSpPr>
-          <p:cNvPr id="21" name="Rectangle 20"/>
+          <p:cNvPr id="24" name="Rectangle 23"/>
           <p:cNvSpPr/>
           <p:nvPr/>
         </p:nvSpPr>
@@ -9229,7 +9381,7 @@
       </p:sp>
       <p:sp>
         <p:nvSpPr>
-          <p:cNvPr id="22" name="TextBox 21"/>
+          <p:cNvPr id="25" name="TextBox 24"/>
           <p:cNvSpPr txBox="1"/>
           <p:nvPr/>
         </p:nvSpPr>
@@ -9298,7 +9450,7 @@
       </p:sp>
       <p:sp>
         <p:nvSpPr>
-          <p:cNvPr id="23" name="Rectangle 22"/>
+          <p:cNvPr id="26" name="Rectangle 25"/>
           <p:cNvSpPr/>
           <p:nvPr/>
         </p:nvSpPr>
@@ -9344,7 +9496,7 @@
       </p:sp>
       <p:sp>
         <p:nvSpPr>
-          <p:cNvPr id="24" name="TextBox 23"/>
+          <p:cNvPr id="27" name="TextBox 26"/>
           <p:cNvSpPr txBox="1"/>
           <p:nvPr/>
         </p:nvSpPr>
@@ -9390,7 +9542,7 @@
       </p:sp>
       <p:sp>
         <p:nvSpPr>
-          <p:cNvPr id="25" name="TextBox 24"/>
+          <p:cNvPr id="28" name="TextBox 27"/>
           <p:cNvSpPr txBox="1"/>
           <p:nvPr/>
         </p:nvSpPr>
@@ -9504,80 +9656,30 @@
           </a:p>
         </p:txBody>
       </p:sp>
-      <p:sp>
-        <p:nvSpPr>
-          <p:cNvPr id="3" name="Freeform 2"/>
-          <p:cNvSpPr/>
-          <p:nvPr/>
-        </p:nvSpPr>
-        <p:spPr>
-          <a:xfrm>
-            <a:off x="9479608" y="4208000"/>
-            <a:ext cx="2924783" cy="2851453"/>
-          </a:xfrm>
-          <a:custGeom>
-            <a:avLst/>
-            <a:gdLst/>
-            <a:ahLst/>
-            <a:cxnLst/>
-            <a:rect l="l" t="t" r="r" b="b"/>
-            <a:pathLst>
-              <a:path w="2924783" h="2851453">
-                <a:moveTo>
-                  <a:pt x="1462392" y="0"/>
-                </a:moveTo>
-                <a:lnTo>
-                  <a:pt x="2635139" y="564765"/>
-                </a:lnTo>
-                <a:lnTo>
-                  <a:pt x="2924783" y="1833781"/>
-                </a:lnTo>
-                <a:lnTo>
-                  <a:pt x="2113217" y="2851453"/>
-                </a:lnTo>
-                <a:lnTo>
-                  <a:pt x="811566" y="2851453"/>
-                </a:lnTo>
-                <a:lnTo>
-                  <a:pt x="0" y="1833781"/>
-                </a:lnTo>
-                <a:lnTo>
-                  <a:pt x="289644" y="564765"/>
-                </a:lnTo>
-                <a:close/>
-              </a:path>
-            </a:pathLst>
-          </a:custGeom>
-          <a:noFill/>
-          <a:ln w="31750">
-            <a:solidFill>
-              <a:srgbClr val="26354E"/>
-            </a:solidFill>
-          </a:ln>
-          <a:effectLst/>
-        </p:spPr>
-        <p:style>
-          <a:lnRef idx="1">
-            <a:schemeClr val="accent1"/>
-          </a:lnRef>
-          <a:fillRef idx="3">
-            <a:schemeClr val="accent1"/>
-          </a:fillRef>
-          <a:effectRef idx="2">
-            <a:schemeClr val="accent1"/>
-          </a:effectRef>
-          <a:fontRef idx="minor">
-            <a:schemeClr val="lt1"/>
-          </a:fontRef>
-        </p:style>
-        <p:txBody>
-          <a:bodyPr rtlCol="0" anchor="ctr"/>
-          <a:lstStyle/>
-          <a:p>
-            <a:pPr algn="ctr"/>
-          </a:p>
-        </p:txBody>
-      </p:sp>
+      <p:pic>
+        <p:nvPicPr>
+          <p:cNvPr id="3" name="Picture 2" descr="netpol.png"/>
+          <p:cNvPicPr>
+            <a:picLocks noChangeAspect="1"/>
+          </p:cNvPicPr>
+          <p:nvPr/>
+        </p:nvPicPr>
+        <p:blipFill>
+          <a:blip r:embed="rId2"/>
+          <a:stretch>
+            <a:fillRect/>
+          </a:stretch>
+        </p:blipFill>
+        <p:spPr>
+          <a:xfrm>
+            <a:off x="8842000" y="2150000"/>
+            <a:ext cx="1800000" cy="1800000"/>
+          </a:xfrm>
+          <a:prstGeom prst="rect">
+            <a:avLst/>
+          </a:prstGeom>
+        </p:spPr>
+      </p:pic>
       <p:sp>
         <p:nvSpPr>
           <p:cNvPr id="4" name="TextBox 3"/>
@@ -10027,7 +10129,7 @@
         <p:spPr>
           <a:xfrm>
             <a:off x="620000" y="560000"/>
-            <a:ext cx="10952000" cy="620000"/>
+            <a:ext cx="10052000" cy="620000"/>
           </a:xfrm>
           <a:prstGeom prst="rect">
             <a:avLst/>
@@ -10248,9 +10350,33 @@
           </a:p>
         </p:txBody>
       </p:sp>
-      <p:sp>
-        <p:nvSpPr>
-          <p:cNvPr id="8" name="Oval 7"/>
+      <p:pic>
+        <p:nvPicPr>
+          <p:cNvPr id="8" name="Picture 7" descr="kubernetes.png"/>
+          <p:cNvPicPr>
+            <a:picLocks noChangeAspect="1"/>
+          </p:cNvPicPr>
+          <p:nvPr/>
+        </p:nvPicPr>
+        <p:blipFill>
+          <a:blip r:embed="rId2"/>
+          <a:stretch>
+            <a:fillRect/>
+          </a:stretch>
+        </p:blipFill>
+        <p:spPr>
+          <a:xfrm>
+            <a:off x="10932000" y="275000"/>
+            <a:ext cx="640000" cy="640000"/>
+          </a:xfrm>
+          <a:prstGeom prst="rect">
+            <a:avLst/>
+          </a:prstGeom>
+        </p:spPr>
+      </p:pic>
+      <p:sp>
+        <p:nvSpPr>
+          <p:cNvPr id="9" name="Oval 8"/>
           <p:cNvSpPr/>
           <p:nvPr/>
         </p:nvSpPr>
@@ -10294,7 +10420,7 @@
       </p:sp>
       <p:sp>
         <p:nvSpPr>
-          <p:cNvPr id="9" name="TextBox 8"/>
+          <p:cNvPr id="10" name="TextBox 9"/>
           <p:cNvSpPr txBox="1"/>
           <p:nvPr/>
         </p:nvSpPr>
@@ -10340,7 +10466,7 @@
       </p:sp>
       <p:sp>
         <p:nvSpPr>
-          <p:cNvPr id="10" name="Oval 9"/>
+          <p:cNvPr id="11" name="Oval 10"/>
           <p:cNvSpPr/>
           <p:nvPr/>
         </p:nvSpPr>
@@ -10384,7 +10510,7 @@
       </p:sp>
       <p:sp>
         <p:nvSpPr>
-          <p:cNvPr id="11" name="TextBox 10"/>
+          <p:cNvPr id="12" name="TextBox 11"/>
           <p:cNvSpPr txBox="1"/>
           <p:nvPr/>
         </p:nvSpPr>
@@ -10430,7 +10556,7 @@
       </p:sp>
       <p:sp>
         <p:nvSpPr>
-          <p:cNvPr id="12" name="Oval 11"/>
+          <p:cNvPr id="13" name="Oval 12"/>
           <p:cNvSpPr/>
           <p:nvPr/>
         </p:nvSpPr>
@@ -10474,7 +10600,7 @@
       </p:sp>
       <p:sp>
         <p:nvSpPr>
-          <p:cNvPr id="13" name="TextBox 12"/>
+          <p:cNvPr id="14" name="TextBox 13"/>
           <p:cNvSpPr txBox="1"/>
           <p:nvPr/>
         </p:nvSpPr>
@@ -10520,7 +10646,7 @@
       </p:sp>
       <p:sp>
         <p:nvSpPr>
-          <p:cNvPr id="14" name="Oval 13"/>
+          <p:cNvPr id="15" name="Oval 14"/>
           <p:cNvSpPr/>
           <p:nvPr/>
         </p:nvSpPr>
@@ -10564,7 +10690,7 @@
       </p:sp>
       <p:sp>
         <p:nvSpPr>
-          <p:cNvPr id="15" name="TextBox 14"/>
+          <p:cNvPr id="16" name="TextBox 15"/>
           <p:cNvSpPr txBox="1"/>
           <p:nvPr/>
         </p:nvSpPr>
@@ -10610,7 +10736,7 @@
       </p:sp>
       <p:sp>
         <p:nvSpPr>
-          <p:cNvPr id="16" name="Rounded Rectangle 15"/>
+          <p:cNvPr id="17" name="Rounded Rectangle 16"/>
           <p:cNvSpPr/>
           <p:nvPr/>
         </p:nvSpPr>
@@ -10660,7 +10786,7 @@
       </p:sp>
       <p:sp>
         <p:nvSpPr>
-          <p:cNvPr id="17" name="Rectangle 16"/>
+          <p:cNvPr id="18" name="Rectangle 17"/>
           <p:cNvSpPr/>
           <p:nvPr/>
         </p:nvSpPr>
@@ -10706,7 +10832,7 @@
       </p:sp>
       <p:sp>
         <p:nvSpPr>
-          <p:cNvPr id="18" name="TextBox 17"/>
+          <p:cNvPr id="19" name="TextBox 18"/>
           <p:cNvSpPr txBox="1"/>
           <p:nvPr/>
         </p:nvSpPr>
@@ -10752,7 +10878,7 @@
       </p:sp>
       <p:sp>
         <p:nvSpPr>
-          <p:cNvPr id="19" name="Rectangle 18"/>
+          <p:cNvPr id="20" name="Rectangle 19"/>
           <p:cNvSpPr/>
           <p:nvPr/>
         </p:nvSpPr>
@@ -10798,7 +10924,7 @@
       </p:sp>
       <p:sp>
         <p:nvSpPr>
-          <p:cNvPr id="20" name="TextBox 19"/>
+          <p:cNvPr id="21" name="TextBox 20"/>
           <p:cNvSpPr txBox="1"/>
           <p:nvPr/>
         </p:nvSpPr>
@@ -11149,7 +11275,7 @@
         <p:spPr>
           <a:xfrm>
             <a:off x="620000" y="560000"/>
-            <a:ext cx="10952000" cy="620000"/>
+            <a:ext cx="10052000" cy="620000"/>
           </a:xfrm>
           <a:prstGeom prst="rect">
             <a:avLst/>
@@ -11370,9 +11496,33 @@
           </a:p>
         </p:txBody>
       </p:sp>
-      <p:sp>
-        <p:nvSpPr>
-          <p:cNvPr id="8" name="TextBox 7"/>
+      <p:pic>
+        <p:nvPicPr>
+          <p:cNvPr id="8" name="Picture 7" descr="netpol.png"/>
+          <p:cNvPicPr>
+            <a:picLocks noChangeAspect="1"/>
+          </p:cNvPicPr>
+          <p:nvPr/>
+        </p:nvPicPr>
+        <p:blipFill>
+          <a:blip r:embed="rId2"/>
+          <a:stretch>
+            <a:fillRect/>
+          </a:stretch>
+        </p:blipFill>
+        <p:spPr>
+          <a:xfrm>
+            <a:off x="10932000" y="275000"/>
+            <a:ext cx="640000" cy="640000"/>
+          </a:xfrm>
+          <a:prstGeom prst="rect">
+            <a:avLst/>
+          </a:prstGeom>
+        </p:spPr>
+      </p:pic>
+      <p:sp>
+        <p:nvSpPr>
+          <p:cNvPr id="9" name="TextBox 8"/>
           <p:cNvSpPr txBox="1"/>
           <p:nvPr/>
         </p:nvSpPr>
@@ -11418,7 +11568,7 @@
       </p:sp>
       <p:sp>
         <p:nvSpPr>
-          <p:cNvPr id="9" name="Rounded Rectangle 8"/>
+          <p:cNvPr id="10" name="Rounded Rectangle 9"/>
           <p:cNvSpPr/>
           <p:nvPr/>
         </p:nvSpPr>
@@ -11468,7 +11618,7 @@
       </p:sp>
       <p:sp>
         <p:nvSpPr>
-          <p:cNvPr id="10" name="Rectangle 9"/>
+          <p:cNvPr id="11" name="Rectangle 10"/>
           <p:cNvSpPr/>
           <p:nvPr/>
         </p:nvSpPr>
@@ -11514,7 +11664,7 @@
       </p:sp>
       <p:sp>
         <p:nvSpPr>
-          <p:cNvPr id="11" name="TextBox 10"/>
+          <p:cNvPr id="12" name="TextBox 11"/>
           <p:cNvSpPr txBox="1"/>
           <p:nvPr/>
         </p:nvSpPr>
@@ -11677,7 +11827,7 @@
       </p:sp>
       <p:sp>
         <p:nvSpPr>
-          <p:cNvPr id="12" name="Rounded Rectangle 11"/>
+          <p:cNvPr id="13" name="Rounded Rectangle 12"/>
           <p:cNvSpPr/>
           <p:nvPr/>
         </p:nvSpPr>
@@ -11727,7 +11877,7 @@
       </p:sp>
       <p:sp>
         <p:nvSpPr>
-          <p:cNvPr id="13" name="Rectangle 12"/>
+          <p:cNvPr id="14" name="Rectangle 13"/>
           <p:cNvSpPr/>
           <p:nvPr/>
         </p:nvSpPr>
@@ -11773,7 +11923,7 @@
       </p:sp>
       <p:sp>
         <p:nvSpPr>
-          <p:cNvPr id="14" name="TextBox 13"/>
+          <p:cNvPr id="15" name="TextBox 14"/>
           <p:cNvSpPr txBox="1"/>
           <p:nvPr/>
         </p:nvSpPr>
@@ -11898,7 +12048,7 @@
         <p:spPr>
           <a:xfrm>
             <a:off x="620000" y="560000"/>
-            <a:ext cx="10952000" cy="620000"/>
+            <a:ext cx="10052000" cy="620000"/>
           </a:xfrm>
           <a:prstGeom prst="rect">
             <a:avLst/>
@@ -12121,7 +12271,151 @@
       </p:sp>
       <p:sp>
         <p:nvSpPr>
-          <p:cNvPr id="8" name="Rounded Rectangle 7"/>
+          <p:cNvPr id="8" name="Freeform 7"/>
+          <p:cNvSpPr/>
+          <p:nvPr/>
+        </p:nvSpPr>
+        <p:spPr>
+          <a:xfrm>
+            <a:off x="10970400" y="326200"/>
+            <a:ext cx="563200" cy="512000"/>
+          </a:xfrm>
+          <a:custGeom>
+            <a:avLst/>
+            <a:gdLst/>
+            <a:ahLst/>
+            <a:cxnLst/>
+            <a:rect l="l" t="t" r="r" b="b"/>
+            <a:pathLst>
+              <a:path w="563200" h="512000">
+                <a:moveTo>
+                  <a:pt x="281600" y="0"/>
+                </a:moveTo>
+                <a:lnTo>
+                  <a:pt x="563200" y="512000"/>
+                </a:lnTo>
+                <a:lnTo>
+                  <a:pt x="0" y="512000"/>
+                </a:lnTo>
+                <a:close/>
+              </a:path>
+            </a:pathLst>
+          </a:custGeom>
+          <a:noFill/>
+          <a:ln w="38100">
+            <a:solidFill>
+              <a:srgbClr val="74A6FF"/>
+            </a:solidFill>
+          </a:ln>
+          <a:effectLst/>
+        </p:spPr>
+        <p:style>
+          <a:lnRef idx="1">
+            <a:schemeClr val="accent1"/>
+          </a:lnRef>
+          <a:fillRef idx="3">
+            <a:schemeClr val="accent1"/>
+          </a:fillRef>
+          <a:effectRef idx="2">
+            <a:schemeClr val="accent1"/>
+          </a:effectRef>
+          <a:fontRef idx="minor">
+            <a:schemeClr val="lt1"/>
+          </a:fontRef>
+        </p:style>
+        <p:txBody>
+          <a:bodyPr rtlCol="0" anchor="ctr"/>
+          <a:lstStyle/>
+          <a:p>
+            <a:pPr algn="ctr"/>
+          </a:p>
+        </p:txBody>
+      </p:sp>
+      <p:cxnSp>
+        <p:nvCxnSpPr>
+          <p:cNvPr id="9" name="Connector 8"/>
+          <p:cNvCxnSpPr/>
+          <p:nvPr/>
+        </p:nvCxnSpPr>
+        <p:spPr>
+          <a:xfrm>
+            <a:off x="11252000" y="518200"/>
+            <a:ext cx="0" cy="153600"/>
+          </a:xfrm>
+          <a:prstGeom prst="line">
+            <a:avLst/>
+          </a:prstGeom>
+          <a:ln w="49530">
+            <a:solidFill>
+              <a:srgbClr val="74A6FF"/>
+            </a:solidFill>
+          </a:ln>
+          <a:effectLst/>
+        </p:spPr>
+        <p:style>
+          <a:lnRef idx="2">
+            <a:schemeClr val="accent1"/>
+          </a:lnRef>
+          <a:fillRef idx="0">
+            <a:schemeClr val="accent1"/>
+          </a:fillRef>
+          <a:effectRef idx="1">
+            <a:schemeClr val="accent1"/>
+          </a:effectRef>
+          <a:fontRef idx="minor">
+            <a:schemeClr val="tx1"/>
+          </a:fontRef>
+        </p:style>
+      </p:cxnSp>
+      <p:sp>
+        <p:nvSpPr>
+          <p:cNvPr id="10" name="Oval 9"/>
+          <p:cNvSpPr/>
+          <p:nvPr/>
+        </p:nvSpPr>
+        <p:spPr>
+          <a:xfrm>
+            <a:off x="11220000" y="716600"/>
+            <a:ext cx="64000" cy="64000"/>
+          </a:xfrm>
+          <a:prstGeom prst="ellipse">
+            <a:avLst/>
+          </a:prstGeom>
+          <a:solidFill>
+            <a:srgbClr val="74A6FF"/>
+          </a:solidFill>
+          <a:ln w="6350">
+            <a:solidFill>
+              <a:srgbClr val="74A6FF"/>
+            </a:solidFill>
+          </a:ln>
+          <a:effectLst/>
+        </p:spPr>
+        <p:style>
+          <a:lnRef idx="1">
+            <a:schemeClr val="accent1"/>
+          </a:lnRef>
+          <a:fillRef idx="3">
+            <a:schemeClr val="accent1"/>
+          </a:fillRef>
+          <a:effectRef idx="2">
+            <a:schemeClr val="accent1"/>
+          </a:effectRef>
+          <a:fontRef idx="minor">
+            <a:schemeClr val="lt1"/>
+          </a:fontRef>
+        </p:style>
+        <p:txBody>
+          <a:bodyPr rtlCol="0" anchor="ctr"/>
+          <a:lstStyle/>
+          <a:p>
+            <a:pPr algn="ctr"/>
+          </a:p>
+        </p:txBody>
+      </p:sp>
+      <p:sp>
+        <p:nvSpPr>
+          <p:cNvPr id="11" name="Rounded Rectangle 10"/>
           <p:cNvSpPr/>
           <p:nvPr/>
         </p:nvSpPr>
@@ -12171,7 +12465,7 @@
       </p:sp>
       <p:sp>
         <p:nvSpPr>
-          <p:cNvPr id="9" name="Rectangle 8"/>
+          <p:cNvPr id="12" name="Rectangle 11"/>
           <p:cNvSpPr/>
           <p:nvPr/>
         </p:nvSpPr>
@@ -12217,7 +12511,7 @@
       </p:sp>
       <p:sp>
         <p:nvSpPr>
-          <p:cNvPr id="10" name="TextBox 9"/>
+          <p:cNvPr id="13" name="TextBox 12"/>
           <p:cNvSpPr txBox="1"/>
           <p:nvPr/>
         </p:nvSpPr>
@@ -12286,7 +12580,7 @@
       </p:sp>
       <p:sp>
         <p:nvSpPr>
-          <p:cNvPr id="11" name="TextBox 10"/>
+          <p:cNvPr id="14" name="TextBox 13"/>
           <p:cNvSpPr txBox="1"/>
           <p:nvPr/>
         </p:nvSpPr>
@@ -12403,7 +12697,7 @@
       </p:sp>
       <p:sp>
         <p:nvSpPr>
-          <p:cNvPr id="12" name="Rounded Rectangle 11"/>
+          <p:cNvPr id="15" name="Rounded Rectangle 14"/>
           <p:cNvSpPr/>
           <p:nvPr/>
         </p:nvSpPr>
@@ -12453,7 +12747,7 @@
       </p:sp>
       <p:sp>
         <p:nvSpPr>
-          <p:cNvPr id="13" name="Rectangle 12"/>
+          <p:cNvPr id="16" name="Rectangle 15"/>
           <p:cNvSpPr/>
           <p:nvPr/>
         </p:nvSpPr>
@@ -12499,7 +12793,7 @@
       </p:sp>
       <p:sp>
         <p:nvSpPr>
-          <p:cNvPr id="14" name="TextBox 13"/>
+          <p:cNvPr id="17" name="TextBox 16"/>
           <p:cNvSpPr txBox="1"/>
           <p:nvPr/>
         </p:nvSpPr>
@@ -12568,7 +12862,7 @@
       </p:sp>
       <p:sp>
         <p:nvSpPr>
-          <p:cNvPr id="15" name="TextBox 14"/>
+          <p:cNvPr id="18" name="TextBox 17"/>
           <p:cNvSpPr txBox="1"/>
           <p:nvPr/>
         </p:nvSpPr>
@@ -12685,7 +12979,7 @@
       </p:sp>
       <p:sp>
         <p:nvSpPr>
-          <p:cNvPr id="16" name="Rounded Rectangle 15"/>
+          <p:cNvPr id="19" name="Rounded Rectangle 18"/>
           <p:cNvSpPr/>
           <p:nvPr/>
         </p:nvSpPr>
@@ -12735,7 +13029,7 @@
       </p:sp>
       <p:sp>
         <p:nvSpPr>
-          <p:cNvPr id="17" name="Rectangle 16"/>
+          <p:cNvPr id="20" name="Rectangle 19"/>
           <p:cNvSpPr/>
           <p:nvPr/>
         </p:nvSpPr>
@@ -12781,7 +13075,7 @@
       </p:sp>
       <p:sp>
         <p:nvSpPr>
-          <p:cNvPr id="18" name="TextBox 17"/>
+          <p:cNvPr id="21" name="TextBox 20"/>
           <p:cNvSpPr txBox="1"/>
           <p:nvPr/>
         </p:nvSpPr>
@@ -13617,7 +13911,149 @@
       </p:sp>
       <p:sp>
         <p:nvSpPr>
-          <p:cNvPr id="16" name="Rounded Rectangle 15"/>
+          <p:cNvPr id="16" name="Freeform 15"/>
+          <p:cNvSpPr/>
+          <p:nvPr/>
+        </p:nvSpPr>
+        <p:spPr>
+          <a:xfrm>
+            <a:off x="9590000" y="1418800"/>
+            <a:ext cx="784000" cy="842800"/>
+          </a:xfrm>
+          <a:custGeom>
+            <a:avLst/>
+            <a:gdLst/>
+            <a:ahLst/>
+            <a:cxnLst/>
+            <a:rect l="l" t="t" r="r" b="b"/>
+            <a:pathLst>
+              <a:path w="784000" h="842800">
+                <a:moveTo>
+                  <a:pt x="235200" y="0"/>
+                </a:moveTo>
+                <a:lnTo>
+                  <a:pt x="235200" y="333200"/>
+                </a:lnTo>
+                <a:lnTo>
+                  <a:pt x="0" y="842800"/>
+                </a:lnTo>
+                <a:lnTo>
+                  <a:pt x="784000" y="842800"/>
+                </a:lnTo>
+                <a:lnTo>
+                  <a:pt x="548800" y="333200"/>
+                </a:lnTo>
+                <a:lnTo>
+                  <a:pt x="548800" y="0"/>
+                </a:lnTo>
+              </a:path>
+            </a:pathLst>
+          </a:custGeom>
+          <a:noFill/>
+          <a:ln w="33020">
+            <a:solidFill>
+              <a:srgbClr val="74A6FF"/>
+            </a:solidFill>
+          </a:ln>
+          <a:effectLst/>
+        </p:spPr>
+        <p:style>
+          <a:lnRef idx="1">
+            <a:schemeClr val="accent1"/>
+          </a:lnRef>
+          <a:fillRef idx="3">
+            <a:schemeClr val="accent1"/>
+          </a:fillRef>
+          <a:effectRef idx="2">
+            <a:schemeClr val="accent1"/>
+          </a:effectRef>
+          <a:fontRef idx="minor">
+            <a:schemeClr val="lt1"/>
+          </a:fontRef>
+        </p:style>
+        <p:txBody>
+          <a:bodyPr rtlCol="0" anchor="ctr"/>
+          <a:lstStyle/>
+          <a:p>
+            <a:pPr algn="ctr"/>
+          </a:p>
+        </p:txBody>
+      </p:sp>
+      <p:cxnSp>
+        <p:nvCxnSpPr>
+          <p:cNvPr id="17" name="Connector 16"/>
+          <p:cNvCxnSpPr/>
+          <p:nvPr/>
+        </p:nvCxnSpPr>
+        <p:spPr>
+          <a:xfrm>
+            <a:off x="9766400" y="1418800"/>
+            <a:ext cx="431200" cy="0"/>
+          </a:xfrm>
+          <a:prstGeom prst="line">
+            <a:avLst/>
+          </a:prstGeom>
+          <a:ln w="33020">
+            <a:solidFill>
+              <a:srgbClr val="74A6FF"/>
+            </a:solidFill>
+          </a:ln>
+          <a:effectLst/>
+        </p:spPr>
+        <p:style>
+          <a:lnRef idx="2">
+            <a:schemeClr val="accent1"/>
+          </a:lnRef>
+          <a:fillRef idx="0">
+            <a:schemeClr val="accent1"/>
+          </a:fillRef>
+          <a:effectRef idx="1">
+            <a:schemeClr val="accent1"/>
+          </a:effectRef>
+          <a:fontRef idx="minor">
+            <a:schemeClr val="tx1"/>
+          </a:fontRef>
+        </p:style>
+      </p:cxnSp>
+      <p:cxnSp>
+        <p:nvCxnSpPr>
+          <p:cNvPr id="18" name="Connector 17"/>
+          <p:cNvCxnSpPr/>
+          <p:nvPr/>
+        </p:nvCxnSpPr>
+        <p:spPr>
+          <a:xfrm>
+            <a:off x="9727200" y="2006800"/>
+            <a:ext cx="509600" cy="0"/>
+          </a:xfrm>
+          <a:prstGeom prst="line">
+            <a:avLst/>
+          </a:prstGeom>
+          <a:ln w="33020">
+            <a:solidFill>
+              <a:srgbClr val="74A6FF"/>
+            </a:solidFill>
+          </a:ln>
+          <a:effectLst/>
+        </p:spPr>
+        <p:style>
+          <a:lnRef idx="2">
+            <a:schemeClr val="accent1"/>
+          </a:lnRef>
+          <a:fillRef idx="0">
+            <a:schemeClr val="accent1"/>
+          </a:fillRef>
+          <a:effectRef idx="1">
+            <a:schemeClr val="accent1"/>
+          </a:effectRef>
+          <a:fontRef idx="minor">
+            <a:schemeClr val="tx1"/>
+          </a:fontRef>
+        </p:style>
+      </p:cxnSp>
+      <p:sp>
+        <p:nvSpPr>
+          <p:cNvPr id="19" name="Rounded Rectangle 18"/>
           <p:cNvSpPr/>
           <p:nvPr/>
         </p:nvSpPr>
@@ -13667,7 +14103,7 @@
       </p:sp>
       <p:sp>
         <p:nvSpPr>
-          <p:cNvPr id="17" name="Rectangle 16"/>
+          <p:cNvPr id="20" name="Rectangle 19"/>
           <p:cNvSpPr/>
           <p:nvPr/>
         </p:nvSpPr>
@@ -13713,7 +14149,7 @@
       </p:sp>
       <p:sp>
         <p:nvSpPr>
-          <p:cNvPr id="18" name="TextBox 17"/>
+          <p:cNvPr id="21" name="TextBox 20"/>
           <p:cNvSpPr txBox="1"/>
           <p:nvPr/>
         </p:nvSpPr>
@@ -13782,7 +14218,7 @@
       </p:sp>
       <p:sp>
         <p:nvSpPr>
-          <p:cNvPr id="19" name="Rectangle 18"/>
+          <p:cNvPr id="22" name="Rectangle 21"/>
           <p:cNvSpPr/>
           <p:nvPr/>
         </p:nvSpPr>
@@ -13828,7 +14264,7 @@
       </p:sp>
       <p:sp>
         <p:nvSpPr>
-          <p:cNvPr id="20" name="TextBox 19"/>
+          <p:cNvPr id="23" name="TextBox 22"/>
           <p:cNvSpPr txBox="1"/>
           <p:nvPr/>
         </p:nvSpPr>
@@ -13897,7 +14333,7 @@
       </p:sp>
       <p:sp>
         <p:nvSpPr>
-          <p:cNvPr id="21" name="Rectangle 20"/>
+          <p:cNvPr id="24" name="Rectangle 23"/>
           <p:cNvSpPr/>
           <p:nvPr/>
         </p:nvSpPr>
@@ -13943,7 +14379,7 @@
       </p:sp>
       <p:sp>
         <p:nvSpPr>
-          <p:cNvPr id="22" name="TextBox 21"/>
+          <p:cNvPr id="25" name="TextBox 24"/>
           <p:cNvSpPr txBox="1"/>
           <p:nvPr/>
         </p:nvSpPr>
@@ -14012,7 +14448,7 @@
       </p:sp>
       <p:sp>
         <p:nvSpPr>
-          <p:cNvPr id="23" name="Rectangle 22"/>
+          <p:cNvPr id="26" name="Rectangle 25"/>
           <p:cNvSpPr/>
           <p:nvPr/>
         </p:nvSpPr>
@@ -14058,7 +14494,7 @@
       </p:sp>
       <p:sp>
         <p:nvSpPr>
-          <p:cNvPr id="24" name="TextBox 23"/>
+          <p:cNvPr id="27" name="TextBox 26"/>
           <p:cNvSpPr txBox="1"/>
           <p:nvPr/>
         </p:nvSpPr>
@@ -14104,7 +14540,7 @@
       </p:sp>
       <p:sp>
         <p:nvSpPr>
-          <p:cNvPr id="25" name="TextBox 24"/>
+          <p:cNvPr id="28" name="TextBox 27"/>
           <p:cNvSpPr txBox="1"/>
           <p:nvPr/>
         </p:nvSpPr>
@@ -14229,7 +14665,7 @@
         <p:spPr>
           <a:xfrm>
             <a:off x="620000" y="560000"/>
-            <a:ext cx="10952000" cy="620000"/>
+            <a:ext cx="10052000" cy="620000"/>
           </a:xfrm>
           <a:prstGeom prst="rect">
             <a:avLst/>
@@ -14458,6 +14894,140 @@
         </p:nvSpPr>
         <p:spPr>
           <a:xfrm>
+            <a:off x="10983200" y="326200"/>
+            <a:ext cx="537600" cy="537600"/>
+          </a:xfrm>
+          <a:prstGeom prst="ellipse">
+            <a:avLst/>
+          </a:prstGeom>
+          <a:noFill/>
+          <a:ln w="38100">
+            <a:solidFill>
+              <a:srgbClr val="74A6FF"/>
+            </a:solidFill>
+          </a:ln>
+          <a:effectLst/>
+        </p:spPr>
+        <p:style>
+          <a:lnRef idx="1">
+            <a:schemeClr val="accent1"/>
+          </a:lnRef>
+          <a:fillRef idx="3">
+            <a:schemeClr val="accent1"/>
+          </a:fillRef>
+          <a:effectRef idx="2">
+            <a:schemeClr val="accent1"/>
+          </a:effectRef>
+          <a:fontRef idx="minor">
+            <a:schemeClr val="lt1"/>
+          </a:fontRef>
+        </p:style>
+        <p:txBody>
+          <a:bodyPr rtlCol="0" anchor="ctr"/>
+          <a:lstStyle/>
+          <a:p>
+            <a:pPr algn="ctr"/>
+          </a:p>
+        </p:txBody>
+      </p:sp>
+      <p:sp>
+        <p:nvSpPr>
+          <p:cNvPr id="9" name="Oval 8"/>
+          <p:cNvSpPr/>
+          <p:nvPr/>
+        </p:nvSpPr>
+        <p:spPr>
+          <a:xfrm>
+            <a:off x="11098400" y="441400"/>
+            <a:ext cx="307200" cy="307200"/>
+          </a:xfrm>
+          <a:prstGeom prst="ellipse">
+            <a:avLst/>
+          </a:prstGeom>
+          <a:noFill/>
+          <a:ln w="38100">
+            <a:solidFill>
+              <a:srgbClr val="74A6FF"/>
+            </a:solidFill>
+          </a:ln>
+          <a:effectLst/>
+        </p:spPr>
+        <p:style>
+          <a:lnRef idx="1">
+            <a:schemeClr val="accent1"/>
+          </a:lnRef>
+          <a:fillRef idx="3">
+            <a:schemeClr val="accent1"/>
+          </a:fillRef>
+          <a:effectRef idx="2">
+            <a:schemeClr val="accent1"/>
+          </a:effectRef>
+          <a:fontRef idx="minor">
+            <a:schemeClr val="lt1"/>
+          </a:fontRef>
+        </p:style>
+        <p:txBody>
+          <a:bodyPr rtlCol="0" anchor="ctr"/>
+          <a:lstStyle/>
+          <a:p>
+            <a:pPr algn="ctr"/>
+          </a:p>
+        </p:txBody>
+      </p:sp>
+      <p:sp>
+        <p:nvSpPr>
+          <p:cNvPr id="10" name="Oval 9"/>
+          <p:cNvSpPr/>
+          <p:nvPr/>
+        </p:nvSpPr>
+        <p:spPr>
+          <a:xfrm>
+            <a:off x="11200800" y="543800"/>
+            <a:ext cx="102400" cy="102400"/>
+          </a:xfrm>
+          <a:prstGeom prst="ellipse">
+            <a:avLst/>
+          </a:prstGeom>
+          <a:solidFill>
+            <a:srgbClr val="74A6FF"/>
+          </a:solidFill>
+          <a:ln w="6350">
+            <a:solidFill>
+              <a:srgbClr val="74A6FF"/>
+            </a:solidFill>
+          </a:ln>
+          <a:effectLst/>
+        </p:spPr>
+        <p:style>
+          <a:lnRef idx="1">
+            <a:schemeClr val="accent1"/>
+          </a:lnRef>
+          <a:fillRef idx="3">
+            <a:schemeClr val="accent1"/>
+          </a:fillRef>
+          <a:effectRef idx="2">
+            <a:schemeClr val="accent1"/>
+          </a:effectRef>
+          <a:fontRef idx="minor">
+            <a:schemeClr val="lt1"/>
+          </a:fontRef>
+        </p:style>
+        <p:txBody>
+          <a:bodyPr rtlCol="0" anchor="ctr"/>
+          <a:lstStyle/>
+          <a:p>
+            <a:pPr algn="ctr"/>
+          </a:p>
+        </p:txBody>
+      </p:sp>
+      <p:sp>
+        <p:nvSpPr>
+          <p:cNvPr id="11" name="Oval 10"/>
+          <p:cNvSpPr/>
+          <p:nvPr/>
+        </p:nvSpPr>
+        <p:spPr>
+          <a:xfrm>
             <a:off x="620000" y="2060000"/>
             <a:ext cx="300000" cy="300000"/>
           </a:xfrm>
@@ -14518,7 +15088,7 @@
       </p:sp>
       <p:sp>
         <p:nvSpPr>
-          <p:cNvPr id="9" name="TextBox 8"/>
+          <p:cNvPr id="12" name="TextBox 11"/>
           <p:cNvSpPr txBox="1"/>
           <p:nvPr/>
         </p:nvSpPr>
@@ -14564,7 +15134,7 @@
       </p:sp>
       <p:sp>
         <p:nvSpPr>
-          <p:cNvPr id="10" name="Oval 9"/>
+          <p:cNvPr id="13" name="Oval 12"/>
           <p:cNvSpPr/>
           <p:nvPr/>
         </p:nvSpPr>
@@ -14630,7 +15200,7 @@
       </p:sp>
       <p:sp>
         <p:nvSpPr>
-          <p:cNvPr id="11" name="TextBox 10"/>
+          <p:cNvPr id="14" name="TextBox 13"/>
           <p:cNvSpPr txBox="1"/>
           <p:nvPr/>
         </p:nvSpPr>
@@ -14676,7 +15246,7 @@
       </p:sp>
       <p:sp>
         <p:nvSpPr>
-          <p:cNvPr id="12" name="Oval 11"/>
+          <p:cNvPr id="15" name="Oval 14"/>
           <p:cNvSpPr/>
           <p:nvPr/>
         </p:nvSpPr>
@@ -14742,7 +15312,7 @@
       </p:sp>
       <p:sp>
         <p:nvSpPr>
-          <p:cNvPr id="13" name="TextBox 12"/>
+          <p:cNvPr id="16" name="TextBox 15"/>
           <p:cNvSpPr txBox="1"/>
           <p:nvPr/>
         </p:nvSpPr>
@@ -14788,7 +15358,7 @@
       </p:sp>
       <p:sp>
         <p:nvSpPr>
-          <p:cNvPr id="14" name="Oval 13"/>
+          <p:cNvPr id="17" name="Oval 16"/>
           <p:cNvSpPr/>
           <p:nvPr/>
         </p:nvSpPr>
@@ -14854,7 +15424,7 @@
       </p:sp>
       <p:sp>
         <p:nvSpPr>
-          <p:cNvPr id="15" name="TextBox 14"/>
+          <p:cNvPr id="18" name="TextBox 17"/>
           <p:cNvSpPr txBox="1"/>
           <p:nvPr/>
         </p:nvSpPr>
@@ -14900,7 +15470,7 @@
       </p:sp>
       <p:sp>
         <p:nvSpPr>
-          <p:cNvPr id="16" name="Oval 15"/>
+          <p:cNvPr id="19" name="Oval 18"/>
           <p:cNvSpPr/>
           <p:nvPr/>
         </p:nvSpPr>
@@ -14966,7 +15536,7 @@
       </p:sp>
       <p:sp>
         <p:nvSpPr>
-          <p:cNvPr id="17" name="TextBox 16"/>
+          <p:cNvPr id="20" name="TextBox 19"/>
           <p:cNvSpPr txBox="1"/>
           <p:nvPr/>
         </p:nvSpPr>
@@ -15012,7 +15582,7 @@
       </p:sp>
       <p:sp>
         <p:nvSpPr>
-          <p:cNvPr id="18" name="Oval 17"/>
+          <p:cNvPr id="21" name="Oval 20"/>
           <p:cNvSpPr/>
           <p:nvPr/>
         </p:nvSpPr>
@@ -15078,7 +15648,7 @@
       </p:sp>
       <p:sp>
         <p:nvSpPr>
-          <p:cNvPr id="19" name="TextBox 18"/>
+          <p:cNvPr id="22" name="TextBox 21"/>
           <p:cNvSpPr txBox="1"/>
           <p:nvPr/>
         </p:nvSpPr>
@@ -15124,7 +15694,7 @@
       </p:sp>
       <p:sp>
         <p:nvSpPr>
-          <p:cNvPr id="20" name="Oval 19"/>
+          <p:cNvPr id="23" name="Oval 22"/>
           <p:cNvSpPr/>
           <p:nvPr/>
         </p:nvSpPr>
@@ -15190,7 +15760,7 @@
       </p:sp>
       <p:sp>
         <p:nvSpPr>
-          <p:cNvPr id="21" name="TextBox 20"/>
+          <p:cNvPr id="24" name="TextBox 23"/>
           <p:cNvSpPr txBox="1"/>
           <p:nvPr/>
         </p:nvSpPr>
@@ -15914,7 +16484,311 @@
       </p:sp>
       <p:sp>
         <p:nvSpPr>
-          <p:cNvPr id="14" name="Rounded Rectangle 13"/>
+          <p:cNvPr id="14" name="Oval 13"/>
+          <p:cNvSpPr/>
+          <p:nvPr/>
+        </p:nvSpPr>
+        <p:spPr>
+          <a:xfrm>
+            <a:off x="9825200" y="1497200"/>
+            <a:ext cx="313600" cy="313600"/>
+          </a:xfrm>
+          <a:prstGeom prst="ellipse">
+            <a:avLst/>
+          </a:prstGeom>
+          <a:noFill/>
+          <a:ln w="33020">
+            <a:solidFill>
+              <a:srgbClr val="FF7B72"/>
+            </a:solidFill>
+          </a:ln>
+          <a:effectLst/>
+        </p:spPr>
+        <p:style>
+          <a:lnRef idx="1">
+            <a:schemeClr val="accent1"/>
+          </a:lnRef>
+          <a:fillRef idx="3">
+            <a:schemeClr val="accent1"/>
+          </a:fillRef>
+          <a:effectRef idx="2">
+            <a:schemeClr val="accent1"/>
+          </a:effectRef>
+          <a:fontRef idx="minor">
+            <a:schemeClr val="lt1"/>
+          </a:fontRef>
+        </p:style>
+        <p:txBody>
+          <a:bodyPr rtlCol="0" anchor="ctr"/>
+          <a:lstStyle/>
+          <a:p>
+            <a:pPr algn="ctr"/>
+          </a:p>
+        </p:txBody>
+      </p:sp>
+      <p:sp>
+        <p:nvSpPr>
+          <p:cNvPr id="15" name="Oval 14"/>
+          <p:cNvSpPr/>
+          <p:nvPr/>
+        </p:nvSpPr>
+        <p:spPr>
+          <a:xfrm>
+            <a:off x="9766400" y="1752000"/>
+            <a:ext cx="431200" cy="490000"/>
+          </a:xfrm>
+          <a:prstGeom prst="ellipse">
+            <a:avLst/>
+          </a:prstGeom>
+          <a:noFill/>
+          <a:ln w="33020">
+            <a:solidFill>
+              <a:srgbClr val="FF7B72"/>
+            </a:solidFill>
+          </a:ln>
+          <a:effectLst/>
+        </p:spPr>
+        <p:style>
+          <a:lnRef idx="1">
+            <a:schemeClr val="accent1"/>
+          </a:lnRef>
+          <a:fillRef idx="3">
+            <a:schemeClr val="accent1"/>
+          </a:fillRef>
+          <a:effectRef idx="2">
+            <a:schemeClr val="accent1"/>
+          </a:effectRef>
+          <a:fontRef idx="minor">
+            <a:schemeClr val="lt1"/>
+          </a:fontRef>
+        </p:style>
+        <p:txBody>
+          <a:bodyPr rtlCol="0" anchor="ctr"/>
+          <a:lstStyle/>
+          <a:p>
+            <a:pPr algn="ctr"/>
+          </a:p>
+        </p:txBody>
+      </p:sp>
+      <p:cxnSp>
+        <p:nvCxnSpPr>
+          <p:cNvPr id="16" name="Connector 15"/>
+          <p:cNvCxnSpPr/>
+          <p:nvPr/>
+        </p:nvCxnSpPr>
+        <p:spPr>
+          <a:xfrm flipH="1" flipV="1">
+            <a:off x="9550800" y="1791200"/>
+            <a:ext cx="235200" cy="58800"/>
+          </a:xfrm>
+          <a:prstGeom prst="line">
+            <a:avLst/>
+          </a:prstGeom>
+          <a:ln w="33020">
+            <a:solidFill>
+              <a:srgbClr val="FF7B72"/>
+            </a:solidFill>
+          </a:ln>
+          <a:effectLst/>
+        </p:spPr>
+        <p:style>
+          <a:lnRef idx="2">
+            <a:schemeClr val="accent1"/>
+          </a:lnRef>
+          <a:fillRef idx="0">
+            <a:schemeClr val="accent1"/>
+          </a:fillRef>
+          <a:effectRef idx="1">
+            <a:schemeClr val="accent1"/>
+          </a:effectRef>
+          <a:fontRef idx="minor">
+            <a:schemeClr val="tx1"/>
+          </a:fontRef>
+        </p:style>
+      </p:cxnSp>
+      <p:cxnSp>
+        <p:nvCxnSpPr>
+          <p:cNvPr id="17" name="Connector 16"/>
+          <p:cNvCxnSpPr/>
+          <p:nvPr/>
+        </p:nvCxnSpPr>
+        <p:spPr>
+          <a:xfrm flipV="1">
+            <a:off x="10178000" y="1791200"/>
+            <a:ext cx="235200" cy="58800"/>
+          </a:xfrm>
+          <a:prstGeom prst="line">
+            <a:avLst/>
+          </a:prstGeom>
+          <a:ln w="33020">
+            <a:solidFill>
+              <a:srgbClr val="FF7B72"/>
+            </a:solidFill>
+          </a:ln>
+          <a:effectLst/>
+        </p:spPr>
+        <p:style>
+          <a:lnRef idx="2">
+            <a:schemeClr val="accent1"/>
+          </a:lnRef>
+          <a:fillRef idx="0">
+            <a:schemeClr val="accent1"/>
+          </a:fillRef>
+          <a:effectRef idx="1">
+            <a:schemeClr val="accent1"/>
+          </a:effectRef>
+          <a:fontRef idx="minor">
+            <a:schemeClr val="tx1"/>
+          </a:fontRef>
+        </p:style>
+      </p:cxnSp>
+      <p:cxnSp>
+        <p:nvCxnSpPr>
+          <p:cNvPr id="18" name="Connector 17"/>
+          <p:cNvCxnSpPr/>
+          <p:nvPr/>
+        </p:nvCxnSpPr>
+        <p:spPr>
+          <a:xfrm flipH="1" flipV="1">
+            <a:off x="9550800" y="1948000"/>
+            <a:ext cx="235200" cy="58800"/>
+          </a:xfrm>
+          <a:prstGeom prst="line">
+            <a:avLst/>
+          </a:prstGeom>
+          <a:ln w="33020">
+            <a:solidFill>
+              <a:srgbClr val="FF7B72"/>
+            </a:solidFill>
+          </a:ln>
+          <a:effectLst/>
+        </p:spPr>
+        <p:style>
+          <a:lnRef idx="2">
+            <a:schemeClr val="accent1"/>
+          </a:lnRef>
+          <a:fillRef idx="0">
+            <a:schemeClr val="accent1"/>
+          </a:fillRef>
+          <a:effectRef idx="1">
+            <a:schemeClr val="accent1"/>
+          </a:effectRef>
+          <a:fontRef idx="minor">
+            <a:schemeClr val="tx1"/>
+          </a:fontRef>
+        </p:style>
+      </p:cxnSp>
+      <p:cxnSp>
+        <p:nvCxnSpPr>
+          <p:cNvPr id="19" name="Connector 18"/>
+          <p:cNvCxnSpPr/>
+          <p:nvPr/>
+        </p:nvCxnSpPr>
+        <p:spPr>
+          <a:xfrm flipV="1">
+            <a:off x="10178000" y="1948000"/>
+            <a:ext cx="235200" cy="58800"/>
+          </a:xfrm>
+          <a:prstGeom prst="line">
+            <a:avLst/>
+          </a:prstGeom>
+          <a:ln w="33020">
+            <a:solidFill>
+              <a:srgbClr val="FF7B72"/>
+            </a:solidFill>
+          </a:ln>
+          <a:effectLst/>
+        </p:spPr>
+        <p:style>
+          <a:lnRef idx="2">
+            <a:schemeClr val="accent1"/>
+          </a:lnRef>
+          <a:fillRef idx="0">
+            <a:schemeClr val="accent1"/>
+          </a:fillRef>
+          <a:effectRef idx="1">
+            <a:schemeClr val="accent1"/>
+          </a:effectRef>
+          <a:fontRef idx="minor">
+            <a:schemeClr val="tx1"/>
+          </a:fontRef>
+        </p:style>
+      </p:cxnSp>
+      <p:cxnSp>
+        <p:nvCxnSpPr>
+          <p:cNvPr id="20" name="Connector 19"/>
+          <p:cNvCxnSpPr/>
+          <p:nvPr/>
+        </p:nvCxnSpPr>
+        <p:spPr>
+          <a:xfrm flipH="1" flipV="1">
+            <a:off x="9550800" y="2104800"/>
+            <a:ext cx="235200" cy="58800"/>
+          </a:xfrm>
+          <a:prstGeom prst="line">
+            <a:avLst/>
+          </a:prstGeom>
+          <a:ln w="33020">
+            <a:solidFill>
+              <a:srgbClr val="FF7B72"/>
+            </a:solidFill>
+          </a:ln>
+          <a:effectLst/>
+        </p:spPr>
+        <p:style>
+          <a:lnRef idx="2">
+            <a:schemeClr val="accent1"/>
+          </a:lnRef>
+          <a:fillRef idx="0">
+            <a:schemeClr val="accent1"/>
+          </a:fillRef>
+          <a:effectRef idx="1">
+            <a:schemeClr val="accent1"/>
+          </a:effectRef>
+          <a:fontRef idx="minor">
+            <a:schemeClr val="tx1"/>
+          </a:fontRef>
+        </p:style>
+      </p:cxnSp>
+      <p:cxnSp>
+        <p:nvCxnSpPr>
+          <p:cNvPr id="21" name="Connector 20"/>
+          <p:cNvCxnSpPr/>
+          <p:nvPr/>
+        </p:nvCxnSpPr>
+        <p:spPr>
+          <a:xfrm flipV="1">
+            <a:off x="10178000" y="2104800"/>
+            <a:ext cx="235200" cy="58800"/>
+          </a:xfrm>
+          <a:prstGeom prst="line">
+            <a:avLst/>
+          </a:prstGeom>
+          <a:ln w="33020">
+            <a:solidFill>
+              <a:srgbClr val="FF7B72"/>
+            </a:solidFill>
+          </a:ln>
+          <a:effectLst/>
+        </p:spPr>
+        <p:style>
+          <a:lnRef idx="2">
+            <a:schemeClr val="accent1"/>
+          </a:lnRef>
+          <a:fillRef idx="0">
+            <a:schemeClr val="accent1"/>
+          </a:fillRef>
+          <a:effectRef idx="1">
+            <a:schemeClr val="accent1"/>
+          </a:effectRef>
+          <a:fontRef idx="minor">
+            <a:schemeClr val="tx1"/>
+          </a:fontRef>
+        </p:style>
+      </p:cxnSp>
+      <p:sp>
+        <p:nvSpPr>
+          <p:cNvPr id="22" name="Rounded Rectangle 21"/>
           <p:cNvSpPr/>
           <p:nvPr/>
         </p:nvSpPr>
@@ -15964,7 +16838,7 @@
       </p:sp>
       <p:sp>
         <p:nvSpPr>
-          <p:cNvPr id="15" name="Rectangle 14"/>
+          <p:cNvPr id="23" name="Rectangle 22"/>
           <p:cNvSpPr/>
           <p:nvPr/>
         </p:nvSpPr>
@@ -16010,7 +16884,7 @@
       </p:sp>
       <p:sp>
         <p:nvSpPr>
-          <p:cNvPr id="16" name="TextBox 15"/>
+          <p:cNvPr id="24" name="TextBox 23"/>
           <p:cNvSpPr txBox="1"/>
           <p:nvPr/>
         </p:nvSpPr>
@@ -16079,7 +16953,7 @@
       </p:sp>
       <p:sp>
         <p:nvSpPr>
-          <p:cNvPr id="17" name="Rectangle 16"/>
+          <p:cNvPr id="25" name="Rectangle 24"/>
           <p:cNvSpPr/>
           <p:nvPr/>
         </p:nvSpPr>
@@ -16125,7 +16999,7 @@
       </p:sp>
       <p:sp>
         <p:nvSpPr>
-          <p:cNvPr id="18" name="TextBox 17"/>
+          <p:cNvPr id="26" name="TextBox 25"/>
           <p:cNvSpPr txBox="1"/>
           <p:nvPr/>
         </p:nvSpPr>
@@ -16194,7 +17068,7 @@
       </p:sp>
       <p:sp>
         <p:nvSpPr>
-          <p:cNvPr id="19" name="Rectangle 18"/>
+          <p:cNvPr id="27" name="Rectangle 26"/>
           <p:cNvSpPr/>
           <p:nvPr/>
         </p:nvSpPr>
@@ -16240,7 +17114,7 @@
       </p:sp>
       <p:sp>
         <p:nvSpPr>
-          <p:cNvPr id="20" name="TextBox 19"/>
+          <p:cNvPr id="28" name="TextBox 27"/>
           <p:cNvSpPr txBox="1"/>
           <p:nvPr/>
         </p:nvSpPr>
@@ -16309,7 +17183,7 @@
       </p:sp>
       <p:sp>
         <p:nvSpPr>
-          <p:cNvPr id="21" name="Rectangle 20"/>
+          <p:cNvPr id="29" name="Rectangle 28"/>
           <p:cNvSpPr/>
           <p:nvPr/>
         </p:nvSpPr>
@@ -16355,7 +17229,7 @@
       </p:sp>
       <p:sp>
         <p:nvSpPr>
-          <p:cNvPr id="22" name="TextBox 21"/>
+          <p:cNvPr id="30" name="TextBox 29"/>
           <p:cNvSpPr txBox="1"/>
           <p:nvPr/>
         </p:nvSpPr>
@@ -16401,7 +17275,7 @@
       </p:sp>
       <p:sp>
         <p:nvSpPr>
-          <p:cNvPr id="23" name="TextBox 22"/>
+          <p:cNvPr id="31" name="TextBox 30"/>
           <p:cNvSpPr txBox="1"/>
           <p:nvPr/>
         </p:nvSpPr>
@@ -16526,7 +17400,7 @@
         <p:spPr>
           <a:xfrm>
             <a:off x="620000" y="560000"/>
-            <a:ext cx="10952000" cy="620000"/>
+            <a:ext cx="10052000" cy="620000"/>
           </a:xfrm>
           <a:prstGeom prst="rect">
             <a:avLst/>
@@ -16747,9 +17621,33 @@
           </a:p>
         </p:txBody>
       </p:sp>
-      <p:sp>
-        <p:nvSpPr>
-          <p:cNvPr id="8" name="Rectangle 7"/>
+      <p:pic>
+        <p:nvPicPr>
+          <p:cNvPr id="8" name="Picture 7" descr="svc.png"/>
+          <p:cNvPicPr>
+            <a:picLocks noChangeAspect="1"/>
+          </p:cNvPicPr>
+          <p:nvPr/>
+        </p:nvPicPr>
+        <p:blipFill>
+          <a:blip r:embed="rId2"/>
+          <a:stretch>
+            <a:fillRect/>
+          </a:stretch>
+        </p:blipFill>
+        <p:spPr>
+          <a:xfrm>
+            <a:off x="10932000" y="275000"/>
+            <a:ext cx="640000" cy="640000"/>
+          </a:xfrm>
+          <a:prstGeom prst="rect">
+            <a:avLst/>
+          </a:prstGeom>
+        </p:spPr>
+      </p:pic>
+      <p:sp>
+        <p:nvSpPr>
+          <p:cNvPr id="9" name="Rectangle 8"/>
           <p:cNvSpPr/>
           <p:nvPr/>
         </p:nvSpPr>
@@ -16795,7 +17693,7 @@
       </p:sp>
       <p:sp>
         <p:nvSpPr>
-          <p:cNvPr id="9" name="Rectangle 8"/>
+          <p:cNvPr id="10" name="Rectangle 9"/>
           <p:cNvSpPr/>
           <p:nvPr/>
         </p:nvSpPr>
@@ -16841,7 +17739,7 @@
       </p:sp>
       <p:sp>
         <p:nvSpPr>
-          <p:cNvPr id="10" name="TextBox 9"/>
+          <p:cNvPr id="11" name="TextBox 10"/>
           <p:cNvSpPr txBox="1"/>
           <p:nvPr/>
         </p:nvSpPr>
@@ -16887,7 +17785,7 @@
       </p:sp>
       <p:sp>
         <p:nvSpPr>
-          <p:cNvPr id="11" name="TextBox 10"/>
+          <p:cNvPr id="12" name="TextBox 11"/>
           <p:cNvSpPr txBox="1"/>
           <p:nvPr/>
         </p:nvSpPr>
@@ -16933,7 +17831,7 @@
       </p:sp>
       <p:sp>
         <p:nvSpPr>
-          <p:cNvPr id="12" name="TextBox 11"/>
+          <p:cNvPr id="13" name="TextBox 12"/>
           <p:cNvSpPr txBox="1"/>
           <p:nvPr/>
         </p:nvSpPr>
@@ -16979,7 +17877,7 @@
       </p:sp>
       <p:sp>
         <p:nvSpPr>
-          <p:cNvPr id="13" name="Rectangle 12"/>
+          <p:cNvPr id="14" name="Rectangle 13"/>
           <p:cNvSpPr/>
           <p:nvPr/>
         </p:nvSpPr>
@@ -17025,7 +17923,7 @@
       </p:sp>
       <p:sp>
         <p:nvSpPr>
-          <p:cNvPr id="14" name="TextBox 13"/>
+          <p:cNvPr id="15" name="TextBox 14"/>
           <p:cNvSpPr txBox="1"/>
           <p:nvPr/>
         </p:nvSpPr>
@@ -17071,7 +17969,7 @@
       </p:sp>
       <p:sp>
         <p:nvSpPr>
-          <p:cNvPr id="15" name="TextBox 14"/>
+          <p:cNvPr id="16" name="TextBox 15"/>
           <p:cNvSpPr txBox="1"/>
           <p:nvPr/>
         </p:nvSpPr>
@@ -17117,7 +18015,7 @@
       </p:sp>
       <p:sp>
         <p:nvSpPr>
-          <p:cNvPr id="16" name="TextBox 15"/>
+          <p:cNvPr id="17" name="TextBox 16"/>
           <p:cNvSpPr txBox="1"/>
           <p:nvPr/>
         </p:nvSpPr>
@@ -17163,7 +18061,7 @@
       </p:sp>
       <p:sp>
         <p:nvSpPr>
-          <p:cNvPr id="17" name="Rectangle 16"/>
+          <p:cNvPr id="18" name="Rectangle 17"/>
           <p:cNvSpPr/>
           <p:nvPr/>
         </p:nvSpPr>
@@ -17209,7 +18107,7 @@
       </p:sp>
       <p:sp>
         <p:nvSpPr>
-          <p:cNvPr id="18" name="Rectangle 17"/>
+          <p:cNvPr id="19" name="Rectangle 18"/>
           <p:cNvSpPr/>
           <p:nvPr/>
         </p:nvSpPr>
@@ -17255,7 +18153,7 @@
       </p:sp>
       <p:sp>
         <p:nvSpPr>
-          <p:cNvPr id="19" name="TextBox 18"/>
+          <p:cNvPr id="20" name="TextBox 19"/>
           <p:cNvSpPr txBox="1"/>
           <p:nvPr/>
         </p:nvSpPr>
@@ -17301,7 +18199,7 @@
       </p:sp>
       <p:sp>
         <p:nvSpPr>
-          <p:cNvPr id="20" name="TextBox 19"/>
+          <p:cNvPr id="21" name="TextBox 20"/>
           <p:cNvSpPr txBox="1"/>
           <p:nvPr/>
         </p:nvSpPr>
@@ -17347,7 +18245,7 @@
       </p:sp>
       <p:sp>
         <p:nvSpPr>
-          <p:cNvPr id="21" name="TextBox 20"/>
+          <p:cNvPr id="22" name="TextBox 21"/>
           <p:cNvSpPr txBox="1"/>
           <p:nvPr/>
         </p:nvSpPr>
@@ -17393,7 +18291,7 @@
       </p:sp>
       <p:sp>
         <p:nvSpPr>
-          <p:cNvPr id="22" name="Rectangle 21"/>
+          <p:cNvPr id="23" name="Rectangle 22"/>
           <p:cNvSpPr/>
           <p:nvPr/>
         </p:nvSpPr>
@@ -17439,7 +18337,7 @@
       </p:sp>
       <p:sp>
         <p:nvSpPr>
-          <p:cNvPr id="23" name="TextBox 22"/>
+          <p:cNvPr id="24" name="TextBox 23"/>
           <p:cNvSpPr txBox="1"/>
           <p:nvPr/>
         </p:nvSpPr>
@@ -17485,7 +18383,7 @@
       </p:sp>
       <p:sp>
         <p:nvSpPr>
-          <p:cNvPr id="24" name="TextBox 23"/>
+          <p:cNvPr id="25" name="TextBox 24"/>
           <p:cNvSpPr txBox="1"/>
           <p:nvPr/>
         </p:nvSpPr>
@@ -17531,7 +18429,7 @@
       </p:sp>
       <p:sp>
         <p:nvSpPr>
-          <p:cNvPr id="25" name="TextBox 24"/>
+          <p:cNvPr id="26" name="TextBox 25"/>
           <p:cNvSpPr txBox="1"/>
           <p:nvPr/>
         </p:nvSpPr>
@@ -17577,7 +18475,7 @@
       </p:sp>
       <p:sp>
         <p:nvSpPr>
-          <p:cNvPr id="26" name="Rectangle 25"/>
+          <p:cNvPr id="27" name="Rectangle 26"/>
           <p:cNvSpPr/>
           <p:nvPr/>
         </p:nvSpPr>
@@ -17623,7 +18521,7 @@
       </p:sp>
       <p:sp>
         <p:nvSpPr>
-          <p:cNvPr id="27" name="Rectangle 26"/>
+          <p:cNvPr id="28" name="Rectangle 27"/>
           <p:cNvSpPr/>
           <p:nvPr/>
         </p:nvSpPr>
@@ -17669,7 +18567,7 @@
       </p:sp>
       <p:sp>
         <p:nvSpPr>
-          <p:cNvPr id="28" name="TextBox 27"/>
+          <p:cNvPr id="29" name="TextBox 28"/>
           <p:cNvSpPr txBox="1"/>
           <p:nvPr/>
         </p:nvSpPr>
@@ -17715,7 +18613,7 @@
       </p:sp>
       <p:sp>
         <p:nvSpPr>
-          <p:cNvPr id="29" name="TextBox 28"/>
+          <p:cNvPr id="30" name="TextBox 29"/>
           <p:cNvSpPr txBox="1"/>
           <p:nvPr/>
         </p:nvSpPr>
@@ -17761,7 +18659,7 @@
       </p:sp>
       <p:sp>
         <p:nvSpPr>
-          <p:cNvPr id="30" name="TextBox 29"/>
+          <p:cNvPr id="31" name="TextBox 30"/>
           <p:cNvSpPr txBox="1"/>
           <p:nvPr/>
         </p:nvSpPr>
@@ -17807,7 +18705,7 @@
       </p:sp>
       <p:sp>
         <p:nvSpPr>
-          <p:cNvPr id="31" name="Rectangle 30"/>
+          <p:cNvPr id="32" name="Rectangle 31"/>
           <p:cNvSpPr/>
           <p:nvPr/>
         </p:nvSpPr>
@@ -17853,7 +18751,7 @@
       </p:sp>
       <p:sp>
         <p:nvSpPr>
-          <p:cNvPr id="32" name="TextBox 31"/>
+          <p:cNvPr id="33" name="TextBox 32"/>
           <p:cNvSpPr txBox="1"/>
           <p:nvPr/>
         </p:nvSpPr>
@@ -17899,7 +18797,7 @@
       </p:sp>
       <p:sp>
         <p:nvSpPr>
-          <p:cNvPr id="33" name="TextBox 32"/>
+          <p:cNvPr id="34" name="TextBox 33"/>
           <p:cNvSpPr txBox="1"/>
           <p:nvPr/>
         </p:nvSpPr>
@@ -17945,7 +18843,7 @@
       </p:sp>
       <p:sp>
         <p:nvSpPr>
-          <p:cNvPr id="34" name="TextBox 33"/>
+          <p:cNvPr id="35" name="TextBox 34"/>
           <p:cNvSpPr txBox="1"/>
           <p:nvPr/>
         </p:nvSpPr>
@@ -18070,7 +18968,7 @@
         <p:spPr>
           <a:xfrm>
             <a:off x="620000" y="560000"/>
-            <a:ext cx="10952000" cy="620000"/>
+            <a:ext cx="10052000" cy="620000"/>
           </a:xfrm>
           <a:prstGeom prst="rect">
             <a:avLst/>
@@ -18299,6 +19197,124 @@
         </p:nvSpPr>
         <p:spPr>
           <a:xfrm>
+            <a:off x="10996000" y="339000"/>
+            <a:ext cx="512000" cy="512000"/>
+          </a:xfrm>
+          <a:prstGeom prst="roundRect">
+            <a:avLst>
+              <a:gd name="adj" fmla="val 20000"/>
+            </a:avLst>
+          </a:prstGeom>
+          <a:noFill/>
+          <a:ln w="38100">
+            <a:solidFill>
+              <a:srgbClr val="74A6FF"/>
+            </a:solidFill>
+          </a:ln>
+          <a:effectLst/>
+        </p:spPr>
+        <p:style>
+          <a:lnRef idx="1">
+            <a:schemeClr val="accent1"/>
+          </a:lnRef>
+          <a:fillRef idx="3">
+            <a:schemeClr val="accent1"/>
+          </a:fillRef>
+          <a:effectRef idx="2">
+            <a:schemeClr val="accent1"/>
+          </a:effectRef>
+          <a:fontRef idx="minor">
+            <a:schemeClr val="lt1"/>
+          </a:fontRef>
+        </p:style>
+        <p:txBody>
+          <a:bodyPr rtlCol="0" anchor="ctr"/>
+          <a:lstStyle/>
+          <a:p>
+            <a:pPr algn="ctr"/>
+          </a:p>
+        </p:txBody>
+      </p:sp>
+      <p:cxnSp>
+        <p:nvCxnSpPr>
+          <p:cNvPr id="9" name="Connector 8"/>
+          <p:cNvCxnSpPr/>
+          <p:nvPr/>
+        </p:nvCxnSpPr>
+        <p:spPr>
+          <a:xfrm>
+            <a:off x="11124000" y="607800"/>
+            <a:ext cx="89600" cy="102400"/>
+          </a:xfrm>
+          <a:prstGeom prst="line">
+            <a:avLst/>
+          </a:prstGeom>
+          <a:ln w="49530">
+            <a:solidFill>
+              <a:srgbClr val="74A6FF"/>
+            </a:solidFill>
+          </a:ln>
+          <a:effectLst/>
+        </p:spPr>
+        <p:style>
+          <a:lnRef idx="2">
+            <a:schemeClr val="accent1"/>
+          </a:lnRef>
+          <a:fillRef idx="0">
+            <a:schemeClr val="accent1"/>
+          </a:fillRef>
+          <a:effectRef idx="1">
+            <a:schemeClr val="accent1"/>
+          </a:effectRef>
+          <a:fontRef idx="minor">
+            <a:schemeClr val="tx1"/>
+          </a:fontRef>
+        </p:style>
+      </p:cxnSp>
+      <p:cxnSp>
+        <p:nvCxnSpPr>
+          <p:cNvPr id="10" name="Connector 9"/>
+          <p:cNvCxnSpPr/>
+          <p:nvPr/>
+        </p:nvCxnSpPr>
+        <p:spPr>
+          <a:xfrm flipV="1">
+            <a:off x="11213600" y="479800"/>
+            <a:ext cx="179200" cy="230400"/>
+          </a:xfrm>
+          <a:prstGeom prst="line">
+            <a:avLst/>
+          </a:prstGeom>
+          <a:ln w="49530">
+            <a:solidFill>
+              <a:srgbClr val="74A6FF"/>
+            </a:solidFill>
+          </a:ln>
+          <a:effectLst/>
+        </p:spPr>
+        <p:style>
+          <a:lnRef idx="2">
+            <a:schemeClr val="accent1"/>
+          </a:lnRef>
+          <a:fillRef idx="0">
+            <a:schemeClr val="accent1"/>
+          </a:fillRef>
+          <a:effectRef idx="1">
+            <a:schemeClr val="accent1"/>
+          </a:effectRef>
+          <a:fontRef idx="minor">
+            <a:schemeClr val="tx1"/>
+          </a:fontRef>
+        </p:style>
+      </p:cxnSp>
+      <p:sp>
+        <p:nvSpPr>
+          <p:cNvPr id="11" name="Rounded Rectangle 10"/>
+          <p:cNvSpPr/>
+          <p:nvPr/>
+        </p:nvSpPr>
+        <p:spPr>
+          <a:xfrm>
             <a:off x="620000" y="2620000"/>
             <a:ext cx="300000" cy="300000"/>
           </a:xfrm>
@@ -18361,7 +19377,7 @@
       </p:sp>
       <p:sp>
         <p:nvSpPr>
-          <p:cNvPr id="9" name="TextBox 8"/>
+          <p:cNvPr id="12" name="TextBox 11"/>
           <p:cNvSpPr txBox="1"/>
           <p:nvPr/>
         </p:nvSpPr>
@@ -18407,7 +19423,7 @@
       </p:sp>
       <p:sp>
         <p:nvSpPr>
-          <p:cNvPr id="10" name="Rounded Rectangle 9"/>
+          <p:cNvPr id="13" name="Rounded Rectangle 12"/>
           <p:cNvSpPr/>
           <p:nvPr/>
         </p:nvSpPr>
@@ -18475,7 +19491,7 @@
       </p:sp>
       <p:sp>
         <p:nvSpPr>
-          <p:cNvPr id="11" name="TextBox 10"/>
+          <p:cNvPr id="14" name="TextBox 13"/>
           <p:cNvSpPr txBox="1"/>
           <p:nvPr/>
         </p:nvSpPr>
@@ -18521,7 +19537,7 @@
       </p:sp>
       <p:sp>
         <p:nvSpPr>
-          <p:cNvPr id="12" name="Rounded Rectangle 11"/>
+          <p:cNvPr id="15" name="Rounded Rectangle 14"/>
           <p:cNvSpPr/>
           <p:nvPr/>
         </p:nvSpPr>
@@ -18589,7 +19605,7 @@
       </p:sp>
       <p:sp>
         <p:nvSpPr>
-          <p:cNvPr id="13" name="TextBox 12"/>
+          <p:cNvPr id="16" name="TextBox 15"/>
           <p:cNvSpPr txBox="1"/>
           <p:nvPr/>
         </p:nvSpPr>
@@ -18635,7 +19651,7 @@
       </p:sp>
       <p:sp>
         <p:nvSpPr>
-          <p:cNvPr id="14" name="Rounded Rectangle 13"/>
+          <p:cNvPr id="17" name="Rounded Rectangle 16"/>
           <p:cNvSpPr/>
           <p:nvPr/>
         </p:nvSpPr>
@@ -18703,7 +19719,7 @@
       </p:sp>
       <p:sp>
         <p:nvSpPr>
-          <p:cNvPr id="15" name="TextBox 14"/>
+          <p:cNvPr id="18" name="TextBox 17"/>
           <p:cNvSpPr txBox="1"/>
           <p:nvPr/>
         </p:nvSpPr>
@@ -18749,7 +19765,7 @@
       </p:sp>
       <p:sp>
         <p:nvSpPr>
-          <p:cNvPr id="16" name="Rounded Rectangle 15"/>
+          <p:cNvPr id="19" name="Rounded Rectangle 18"/>
           <p:cNvSpPr/>
           <p:nvPr/>
         </p:nvSpPr>
@@ -18817,7 +19833,7 @@
       </p:sp>
       <p:sp>
         <p:nvSpPr>
-          <p:cNvPr id="17" name="TextBox 16"/>
+          <p:cNvPr id="20" name="TextBox 19"/>
           <p:cNvSpPr txBox="1"/>
           <p:nvPr/>
         </p:nvSpPr>
@@ -18863,7 +19879,7 @@
       </p:sp>
       <p:sp>
         <p:nvSpPr>
-          <p:cNvPr id="18" name="Rounded Rectangle 17"/>
+          <p:cNvPr id="21" name="Rounded Rectangle 20"/>
           <p:cNvSpPr/>
           <p:nvPr/>
         </p:nvSpPr>
@@ -18931,7 +19947,7 @@
       </p:sp>
       <p:sp>
         <p:nvSpPr>
-          <p:cNvPr id="19" name="TextBox 18"/>
+          <p:cNvPr id="22" name="TextBox 21"/>
           <p:cNvSpPr txBox="1"/>
           <p:nvPr/>
         </p:nvSpPr>
@@ -18977,7 +19993,7 @@
       </p:sp>
       <p:sp>
         <p:nvSpPr>
-          <p:cNvPr id="20" name="Rounded Rectangle 19"/>
+          <p:cNvPr id="23" name="Rounded Rectangle 22"/>
           <p:cNvSpPr/>
           <p:nvPr/>
         </p:nvSpPr>
@@ -19045,7 +20061,7 @@
       </p:sp>
       <p:sp>
         <p:nvSpPr>
-          <p:cNvPr id="21" name="TextBox 20"/>
+          <p:cNvPr id="24" name="TextBox 23"/>
           <p:cNvSpPr txBox="1"/>
           <p:nvPr/>
         </p:nvSpPr>
@@ -19091,7 +20107,7 @@
       </p:sp>
       <p:sp>
         <p:nvSpPr>
-          <p:cNvPr id="22" name="Rounded Rectangle 21"/>
+          <p:cNvPr id="25" name="Rounded Rectangle 24"/>
           <p:cNvSpPr/>
           <p:nvPr/>
         </p:nvSpPr>
@@ -19159,7 +20175,7 @@
       </p:sp>
       <p:sp>
         <p:nvSpPr>
-          <p:cNvPr id="23" name="TextBox 22"/>
+          <p:cNvPr id="26" name="TextBox 25"/>
           <p:cNvSpPr txBox="1"/>
           <p:nvPr/>
         </p:nvSpPr>
@@ -19205,7 +20221,7 @@
       </p:sp>
       <p:sp>
         <p:nvSpPr>
-          <p:cNvPr id="24" name="Rounded Rectangle 23"/>
+          <p:cNvPr id="27" name="Rounded Rectangle 26"/>
           <p:cNvSpPr/>
           <p:nvPr/>
         </p:nvSpPr>
@@ -19273,7 +20289,7 @@
       </p:sp>
       <p:sp>
         <p:nvSpPr>
-          <p:cNvPr id="25" name="TextBox 24"/>
+          <p:cNvPr id="28" name="TextBox 27"/>
           <p:cNvSpPr txBox="1"/>
           <p:nvPr/>
         </p:nvSpPr>
@@ -19319,7 +20335,7 @@
       </p:sp>
       <p:sp>
         <p:nvSpPr>
-          <p:cNvPr id="26" name="Rounded Rectangle 25"/>
+          <p:cNvPr id="29" name="Rounded Rectangle 28"/>
           <p:cNvSpPr/>
           <p:nvPr/>
         </p:nvSpPr>
@@ -19387,7 +20403,7 @@
       </p:sp>
       <p:sp>
         <p:nvSpPr>
-          <p:cNvPr id="27" name="TextBox 26"/>
+          <p:cNvPr id="30" name="TextBox 29"/>
           <p:cNvSpPr txBox="1"/>
           <p:nvPr/>
         </p:nvSpPr>
@@ -19503,53 +20519,23 @@
       </p:sp>
       <p:sp>
         <p:nvSpPr>
-          <p:cNvPr id="3" name="Freeform 2"/>
+          <p:cNvPr id="3" name="Oval 2"/>
           <p:cNvSpPr/>
           <p:nvPr/>
         </p:nvSpPr>
         <p:spPr>
           <a:xfrm>
-            <a:off x="-163645" y="4308000"/>
-            <a:ext cx="2827290" cy="2756404"/>
-          </a:xfrm>
-          <a:custGeom>
-            <a:avLst/>
-            <a:gdLst/>
-            <a:ahLst/>
-            <a:cxnLst/>
-            <a:rect l="l" t="t" r="r" b="b"/>
-            <a:pathLst>
-              <a:path w="2827290" h="2756404">
-                <a:moveTo>
-                  <a:pt x="1413645" y="0"/>
-                </a:moveTo>
-                <a:lnTo>
-                  <a:pt x="2547300" y="545939"/>
-                </a:lnTo>
-                <a:lnTo>
-                  <a:pt x="2827290" y="1772655"/>
-                </a:lnTo>
-                <a:lnTo>
-                  <a:pt x="2042776" y="2756404"/>
-                </a:lnTo>
-                <a:lnTo>
-                  <a:pt x="784513" y="2756404"/>
-                </a:lnTo>
-                <a:lnTo>
-                  <a:pt x="0" y="1772655"/>
-                </a:lnTo>
-                <a:lnTo>
-                  <a:pt x="279989" y="545939"/>
-                </a:lnTo>
-                <a:close/>
-              </a:path>
-            </a:pathLst>
-          </a:custGeom>
-          <a:noFill/>
-          <a:ln w="31750">
-            <a:solidFill>
-              <a:srgbClr val="26354E"/>
-            </a:solidFill>
+            <a:off x="-1400000" y="4358000"/>
+            <a:ext cx="3800000" cy="3800000"/>
+          </a:xfrm>
+          <a:prstGeom prst="ellipse">
+            <a:avLst/>
+          </a:prstGeom>
+          <a:solidFill>
+            <a:srgbClr val="0B1220"/>
+          </a:solidFill>
+          <a:ln>
+            <a:noFill/>
           </a:ln>
           <a:effectLst/>
         </p:spPr>
@@ -19575,9 +20561,33 @@
           </a:p>
         </p:txBody>
       </p:sp>
-      <p:sp>
-        <p:nvSpPr>
-          <p:cNvPr id="4" name="TextBox 3"/>
+      <p:pic>
+        <p:nvPicPr>
+          <p:cNvPr id="4" name="Picture 3" descr="kubernetes.png"/>
+          <p:cNvPicPr>
+            <a:picLocks noChangeAspect="1"/>
+          </p:cNvPicPr>
+          <p:nvPr/>
+        </p:nvPicPr>
+        <p:blipFill>
+          <a:blip r:embed="rId2"/>
+          <a:stretch>
+            <a:fillRect/>
+          </a:stretch>
+        </p:blipFill>
+        <p:spPr>
+          <a:xfrm>
+            <a:off x="9542000" y="900000"/>
+            <a:ext cx="1650000" cy="1650000"/>
+          </a:xfrm>
+          <a:prstGeom prst="rect">
+            <a:avLst/>
+          </a:prstGeom>
+        </p:spPr>
+      </p:pic>
+      <p:sp>
+        <p:nvSpPr>
+          <p:cNvPr id="5" name="TextBox 4"/>
           <p:cNvSpPr txBox="1"/>
           <p:nvPr/>
         </p:nvSpPr>
@@ -19623,14 +20633,14 @@
       </p:sp>
       <p:sp>
         <p:nvSpPr>
-          <p:cNvPr id="5" name="TextBox 4"/>
+          <p:cNvPr id="6" name="TextBox 5"/>
           <p:cNvSpPr txBox="1"/>
           <p:nvPr/>
         </p:nvSpPr>
         <p:spPr>
           <a:xfrm>
-            <a:off x="640000" y="1500000"/>
-            <a:ext cx="10000000" cy="900000"/>
+            <a:off x="640000" y="1560000"/>
+            <a:ext cx="9200000" cy="900000"/>
           </a:xfrm>
           <a:prstGeom prst="rect">
             <a:avLst/>
@@ -19656,7 +20666,7 @@
               <a:buNone/>
             </a:pPr>
             <a:r>
-              <a:rPr sz="4600" b="0" i="0">
+              <a:rPr sz="4400" b="0" i="0">
                 <a:solidFill>
                   <a:srgbClr val="F3F6FC"/>
                 </a:solidFill>
@@ -19669,7 +20679,7 @@
       </p:sp>
       <p:sp>
         <p:nvSpPr>
-          <p:cNvPr id="6" name="Rectangle 5"/>
+          <p:cNvPr id="7" name="Rectangle 6"/>
           <p:cNvSpPr/>
           <p:nvPr/>
         </p:nvSpPr>
@@ -19715,7 +20725,7 @@
       </p:sp>
       <p:sp>
         <p:nvSpPr>
-          <p:cNvPr id="7" name="TextBox 6"/>
+          <p:cNvPr id="8" name="TextBox 7"/>
           <p:cNvSpPr txBox="1"/>
           <p:nvPr/>
         </p:nvSpPr>
@@ -19807,7 +20817,7 @@
       </p:sp>
       <p:sp>
         <p:nvSpPr>
-          <p:cNvPr id="8" name="Rectangle 7"/>
+          <p:cNvPr id="9" name="Rectangle 8"/>
           <p:cNvSpPr/>
           <p:nvPr/>
         </p:nvSpPr>
@@ -19853,7 +20863,7 @@
       </p:sp>
       <p:sp>
         <p:nvSpPr>
-          <p:cNvPr id="9" name="TextBox 8"/>
+          <p:cNvPr id="10" name="TextBox 9"/>
           <p:cNvSpPr txBox="1"/>
           <p:nvPr/>
         </p:nvSpPr>
@@ -19899,7 +20909,7 @@
       </p:sp>
       <p:sp>
         <p:nvSpPr>
-          <p:cNvPr id="10" name="TextBox 9"/>
+          <p:cNvPr id="11" name="TextBox 10"/>
           <p:cNvSpPr txBox="1"/>
           <p:nvPr/>
         </p:nvSpPr>
@@ -20024,7 +21034,7 @@
         <p:spPr>
           <a:xfrm>
             <a:off x="620000" y="560000"/>
-            <a:ext cx="10952000" cy="620000"/>
+            <a:ext cx="10052000" cy="620000"/>
           </a:xfrm>
           <a:prstGeom prst="rect">
             <a:avLst/>
@@ -20247,7 +21257,123 @@
       </p:sp>
       <p:sp>
         <p:nvSpPr>
-          <p:cNvPr id="8" name="TextBox 7"/>
+          <p:cNvPr id="8" name="Oval 7"/>
+          <p:cNvSpPr/>
+          <p:nvPr/>
+        </p:nvSpPr>
+        <p:spPr>
+          <a:xfrm>
+            <a:off x="10983200" y="326200"/>
+            <a:ext cx="537600" cy="537600"/>
+          </a:xfrm>
+          <a:prstGeom prst="ellipse">
+            <a:avLst/>
+          </a:prstGeom>
+          <a:noFill/>
+          <a:ln w="38100">
+            <a:solidFill>
+              <a:srgbClr val="74A6FF"/>
+            </a:solidFill>
+          </a:ln>
+          <a:effectLst/>
+        </p:spPr>
+        <p:style>
+          <a:lnRef idx="1">
+            <a:schemeClr val="accent1"/>
+          </a:lnRef>
+          <a:fillRef idx="3">
+            <a:schemeClr val="accent1"/>
+          </a:fillRef>
+          <a:effectRef idx="2">
+            <a:schemeClr val="accent1"/>
+          </a:effectRef>
+          <a:fontRef idx="minor">
+            <a:schemeClr val="lt1"/>
+          </a:fontRef>
+        </p:style>
+        <p:txBody>
+          <a:bodyPr rtlCol="0" anchor="ctr"/>
+          <a:lstStyle/>
+          <a:p>
+            <a:pPr algn="ctr"/>
+          </a:p>
+        </p:txBody>
+      </p:sp>
+      <p:cxnSp>
+        <p:nvCxnSpPr>
+          <p:cNvPr id="9" name="Connector 8"/>
+          <p:cNvCxnSpPr/>
+          <p:nvPr/>
+        </p:nvCxnSpPr>
+        <p:spPr>
+          <a:xfrm flipV="1">
+            <a:off x="11252000" y="415800"/>
+            <a:ext cx="0" cy="179200"/>
+          </a:xfrm>
+          <a:prstGeom prst="line">
+            <a:avLst/>
+          </a:prstGeom>
+          <a:ln w="38100">
+            <a:solidFill>
+              <a:srgbClr val="74A6FF"/>
+            </a:solidFill>
+          </a:ln>
+          <a:effectLst/>
+        </p:spPr>
+        <p:style>
+          <a:lnRef idx="2">
+            <a:schemeClr val="accent1"/>
+          </a:lnRef>
+          <a:fillRef idx="0">
+            <a:schemeClr val="accent1"/>
+          </a:fillRef>
+          <a:effectRef idx="1">
+            <a:schemeClr val="accent1"/>
+          </a:effectRef>
+          <a:fontRef idx="minor">
+            <a:schemeClr val="tx1"/>
+          </a:fontRef>
+        </p:style>
+      </p:cxnSp>
+      <p:cxnSp>
+        <p:nvCxnSpPr>
+          <p:cNvPr id="10" name="Connector 9"/>
+          <p:cNvCxnSpPr/>
+          <p:nvPr/>
+        </p:nvCxnSpPr>
+        <p:spPr>
+          <a:xfrm>
+            <a:off x="11252000" y="595000"/>
+            <a:ext cx="128000" cy="51200"/>
+          </a:xfrm>
+          <a:prstGeom prst="line">
+            <a:avLst/>
+          </a:prstGeom>
+          <a:ln w="38100">
+            <a:solidFill>
+              <a:srgbClr val="74A6FF"/>
+            </a:solidFill>
+          </a:ln>
+          <a:effectLst/>
+        </p:spPr>
+        <p:style>
+          <a:lnRef idx="2">
+            <a:schemeClr val="accent1"/>
+          </a:lnRef>
+          <a:fillRef idx="0">
+            <a:schemeClr val="accent1"/>
+          </a:fillRef>
+          <a:effectRef idx="1">
+            <a:schemeClr val="accent1"/>
+          </a:effectRef>
+          <a:fontRef idx="minor">
+            <a:schemeClr val="tx1"/>
+          </a:fontRef>
+        </p:style>
+      </p:cxnSp>
+      <p:sp>
+        <p:nvSpPr>
+          <p:cNvPr id="11" name="TextBox 10"/>
           <p:cNvSpPr txBox="1"/>
           <p:nvPr/>
         </p:nvSpPr>
@@ -20293,7 +21419,7 @@
       </p:sp>
       <p:sp>
         <p:nvSpPr>
-          <p:cNvPr id="9" name="Rectangle 8"/>
+          <p:cNvPr id="12" name="Rectangle 11"/>
           <p:cNvSpPr/>
           <p:nvPr/>
         </p:nvSpPr>
@@ -20339,7 +21465,7 @@
       </p:sp>
       <p:sp>
         <p:nvSpPr>
-          <p:cNvPr id="10" name="TextBox 9"/>
+          <p:cNvPr id="13" name="TextBox 12"/>
           <p:cNvSpPr txBox="1"/>
           <p:nvPr/>
         </p:nvSpPr>
@@ -20385,7 +21511,7 @@
       </p:sp>
       <p:sp>
         <p:nvSpPr>
-          <p:cNvPr id="11" name="TextBox 10"/>
+          <p:cNvPr id="14" name="TextBox 13"/>
           <p:cNvSpPr txBox="1"/>
           <p:nvPr/>
         </p:nvSpPr>
@@ -20431,7 +21557,7 @@
       </p:sp>
       <p:sp>
         <p:nvSpPr>
-          <p:cNvPr id="12" name="Rectangle 11"/>
+          <p:cNvPr id="15" name="Rectangle 14"/>
           <p:cNvSpPr/>
           <p:nvPr/>
         </p:nvSpPr>
@@ -20477,7 +21603,7 @@
       </p:sp>
       <p:sp>
         <p:nvSpPr>
-          <p:cNvPr id="13" name="TextBox 12"/>
+          <p:cNvPr id="16" name="TextBox 15"/>
           <p:cNvSpPr txBox="1"/>
           <p:nvPr/>
         </p:nvSpPr>
@@ -20523,7 +21649,7 @@
       </p:sp>
       <p:sp>
         <p:nvSpPr>
-          <p:cNvPr id="14" name="TextBox 13"/>
+          <p:cNvPr id="17" name="TextBox 16"/>
           <p:cNvSpPr txBox="1"/>
           <p:nvPr/>
         </p:nvSpPr>
@@ -20569,7 +21695,7 @@
       </p:sp>
       <p:sp>
         <p:nvSpPr>
-          <p:cNvPr id="15" name="Rectangle 14"/>
+          <p:cNvPr id="18" name="Rectangle 17"/>
           <p:cNvSpPr/>
           <p:nvPr/>
         </p:nvSpPr>
@@ -20615,7 +21741,7 @@
       </p:sp>
       <p:sp>
         <p:nvSpPr>
-          <p:cNvPr id="16" name="TextBox 15"/>
+          <p:cNvPr id="19" name="TextBox 18"/>
           <p:cNvSpPr txBox="1"/>
           <p:nvPr/>
         </p:nvSpPr>
@@ -20661,7 +21787,7 @@
       </p:sp>
       <p:sp>
         <p:nvSpPr>
-          <p:cNvPr id="17" name="Rounded Rectangle 16"/>
+          <p:cNvPr id="20" name="Rounded Rectangle 19"/>
           <p:cNvSpPr/>
           <p:nvPr/>
         </p:nvSpPr>
@@ -20709,7 +21835,7 @@
       </p:sp>
       <p:sp>
         <p:nvSpPr>
-          <p:cNvPr id="18" name="TextBox 17"/>
+          <p:cNvPr id="21" name="TextBox 20"/>
           <p:cNvSpPr txBox="1"/>
           <p:nvPr/>
         </p:nvSpPr>
@@ -20755,7 +21881,7 @@
       </p:sp>
       <p:sp>
         <p:nvSpPr>
-          <p:cNvPr id="19" name="Rectangle 18"/>
+          <p:cNvPr id="22" name="Rectangle 21"/>
           <p:cNvSpPr/>
           <p:nvPr/>
         </p:nvSpPr>
@@ -20801,7 +21927,7 @@
       </p:sp>
       <p:sp>
         <p:nvSpPr>
-          <p:cNvPr id="20" name="TextBox 19"/>
+          <p:cNvPr id="23" name="TextBox 22"/>
           <p:cNvSpPr txBox="1"/>
           <p:nvPr/>
         </p:nvSpPr>
@@ -20847,7 +21973,7 @@
       </p:sp>
       <p:sp>
         <p:nvSpPr>
-          <p:cNvPr id="21" name="TextBox 20"/>
+          <p:cNvPr id="24" name="TextBox 23"/>
           <p:cNvSpPr txBox="1"/>
           <p:nvPr/>
         </p:nvSpPr>
@@ -20893,7 +22019,7 @@
       </p:sp>
       <p:sp>
         <p:nvSpPr>
-          <p:cNvPr id="22" name="Rectangle 21"/>
+          <p:cNvPr id="25" name="Rectangle 24"/>
           <p:cNvSpPr/>
           <p:nvPr/>
         </p:nvSpPr>
@@ -20939,7 +22065,7 @@
       </p:sp>
       <p:sp>
         <p:nvSpPr>
-          <p:cNvPr id="23" name="TextBox 22"/>
+          <p:cNvPr id="26" name="TextBox 25"/>
           <p:cNvSpPr txBox="1"/>
           <p:nvPr/>
         </p:nvSpPr>
@@ -20985,7 +22111,7 @@
       </p:sp>
       <p:sp>
         <p:nvSpPr>
-          <p:cNvPr id="24" name="Rounded Rectangle 23"/>
+          <p:cNvPr id="27" name="Rounded Rectangle 26"/>
           <p:cNvSpPr/>
           <p:nvPr/>
         </p:nvSpPr>
@@ -21033,7 +22159,7 @@
       </p:sp>
       <p:sp>
         <p:nvSpPr>
-          <p:cNvPr id="25" name="TextBox 24"/>
+          <p:cNvPr id="28" name="TextBox 27"/>
           <p:cNvSpPr txBox="1"/>
           <p:nvPr/>
         </p:nvSpPr>
@@ -21079,7 +22205,7 @@
       </p:sp>
       <p:sp>
         <p:nvSpPr>
-          <p:cNvPr id="26" name="Rectangle 25"/>
+          <p:cNvPr id="29" name="Rectangle 28"/>
           <p:cNvSpPr/>
           <p:nvPr/>
         </p:nvSpPr>
@@ -21125,7 +22251,7 @@
       </p:sp>
       <p:sp>
         <p:nvSpPr>
-          <p:cNvPr id="27" name="TextBox 26"/>
+          <p:cNvPr id="30" name="TextBox 29"/>
           <p:cNvSpPr txBox="1"/>
           <p:nvPr/>
         </p:nvSpPr>
@@ -21171,7 +22297,7 @@
       </p:sp>
       <p:sp>
         <p:nvSpPr>
-          <p:cNvPr id="28" name="TextBox 27"/>
+          <p:cNvPr id="31" name="TextBox 30"/>
           <p:cNvSpPr txBox="1"/>
           <p:nvPr/>
         </p:nvSpPr>
@@ -21217,7 +22343,7 @@
       </p:sp>
       <p:sp>
         <p:nvSpPr>
-          <p:cNvPr id="29" name="Rectangle 28"/>
+          <p:cNvPr id="32" name="Rectangle 31"/>
           <p:cNvSpPr/>
           <p:nvPr/>
         </p:nvSpPr>
@@ -21263,7 +22389,7 @@
       </p:sp>
       <p:sp>
         <p:nvSpPr>
-          <p:cNvPr id="30" name="TextBox 29"/>
+          <p:cNvPr id="33" name="TextBox 32"/>
           <p:cNvSpPr txBox="1"/>
           <p:nvPr/>
         </p:nvSpPr>
@@ -21309,7 +22435,7 @@
       </p:sp>
       <p:sp>
         <p:nvSpPr>
-          <p:cNvPr id="31" name="Rounded Rectangle 30"/>
+          <p:cNvPr id="34" name="Rounded Rectangle 33"/>
           <p:cNvSpPr/>
           <p:nvPr/>
         </p:nvSpPr>
@@ -21357,7 +22483,7 @@
       </p:sp>
       <p:sp>
         <p:nvSpPr>
-          <p:cNvPr id="32" name="TextBox 31"/>
+          <p:cNvPr id="35" name="TextBox 34"/>
           <p:cNvSpPr txBox="1"/>
           <p:nvPr/>
         </p:nvSpPr>
@@ -21403,7 +22529,7 @@
       </p:sp>
       <p:sp>
         <p:nvSpPr>
-          <p:cNvPr id="33" name="Rectangle 32"/>
+          <p:cNvPr id="36" name="Rectangle 35"/>
           <p:cNvSpPr/>
           <p:nvPr/>
         </p:nvSpPr>
@@ -21449,7 +22575,7 @@
       </p:sp>
       <p:sp>
         <p:nvSpPr>
-          <p:cNvPr id="34" name="TextBox 33"/>
+          <p:cNvPr id="37" name="TextBox 36"/>
           <p:cNvSpPr txBox="1"/>
           <p:nvPr/>
         </p:nvSpPr>
@@ -21495,7 +22621,7 @@
       </p:sp>
       <p:sp>
         <p:nvSpPr>
-          <p:cNvPr id="35" name="Rounded Rectangle 34"/>
+          <p:cNvPr id="38" name="Rounded Rectangle 37"/>
           <p:cNvSpPr/>
           <p:nvPr/>
         </p:nvSpPr>
@@ -21543,7 +22669,7 @@
       </p:sp>
       <p:sp>
         <p:nvSpPr>
-          <p:cNvPr id="36" name="TextBox 35"/>
+          <p:cNvPr id="39" name="TextBox 38"/>
           <p:cNvSpPr txBox="1"/>
           <p:nvPr/>
         </p:nvSpPr>
@@ -21589,7 +22715,7 @@
       </p:sp>
       <p:sp>
         <p:nvSpPr>
-          <p:cNvPr id="37" name="Rectangle 36"/>
+          <p:cNvPr id="40" name="Rectangle 39"/>
           <p:cNvSpPr/>
           <p:nvPr/>
         </p:nvSpPr>
@@ -21635,7 +22761,7 @@
       </p:sp>
       <p:sp>
         <p:nvSpPr>
-          <p:cNvPr id="38" name="TextBox 37"/>
+          <p:cNvPr id="41" name="TextBox 40"/>
           <p:cNvSpPr txBox="1"/>
           <p:nvPr/>
         </p:nvSpPr>
@@ -21681,7 +22807,7 @@
       </p:sp>
       <p:sp>
         <p:nvSpPr>
-          <p:cNvPr id="39" name="TextBox 38"/>
+          <p:cNvPr id="42" name="TextBox 41"/>
           <p:cNvSpPr txBox="1"/>
           <p:nvPr/>
         </p:nvSpPr>
@@ -21727,7 +22853,7 @@
       </p:sp>
       <p:sp>
         <p:nvSpPr>
-          <p:cNvPr id="40" name="Rectangle 39"/>
+          <p:cNvPr id="43" name="Rectangle 42"/>
           <p:cNvSpPr/>
           <p:nvPr/>
         </p:nvSpPr>
@@ -21773,7 +22899,7 @@
       </p:sp>
       <p:sp>
         <p:nvSpPr>
-          <p:cNvPr id="41" name="TextBox 40"/>
+          <p:cNvPr id="44" name="TextBox 43"/>
           <p:cNvSpPr txBox="1"/>
           <p:nvPr/>
         </p:nvSpPr>
@@ -21887,80 +23013,30 @@
           </a:p>
         </p:txBody>
       </p:sp>
-      <p:sp>
-        <p:nvSpPr>
-          <p:cNvPr id="3" name="Freeform 2"/>
-          <p:cNvSpPr/>
-          <p:nvPr/>
-        </p:nvSpPr>
-        <p:spPr>
-          <a:xfrm>
-            <a:off x="9479608" y="4208000"/>
-            <a:ext cx="2924783" cy="2851453"/>
-          </a:xfrm>
-          <a:custGeom>
-            <a:avLst/>
-            <a:gdLst/>
-            <a:ahLst/>
-            <a:cxnLst/>
-            <a:rect l="l" t="t" r="r" b="b"/>
-            <a:pathLst>
-              <a:path w="2924783" h="2851453">
-                <a:moveTo>
-                  <a:pt x="1462392" y="0"/>
-                </a:moveTo>
-                <a:lnTo>
-                  <a:pt x="2635139" y="564765"/>
-                </a:lnTo>
-                <a:lnTo>
-                  <a:pt x="2924783" y="1833781"/>
-                </a:lnTo>
-                <a:lnTo>
-                  <a:pt x="2113217" y="2851453"/>
-                </a:lnTo>
-                <a:lnTo>
-                  <a:pt x="811566" y="2851453"/>
-                </a:lnTo>
-                <a:lnTo>
-                  <a:pt x="0" y="1833781"/>
-                </a:lnTo>
-                <a:lnTo>
-                  <a:pt x="289644" y="564765"/>
-                </a:lnTo>
-                <a:close/>
-              </a:path>
-            </a:pathLst>
-          </a:custGeom>
-          <a:noFill/>
-          <a:ln w="31750">
-            <a:solidFill>
-              <a:srgbClr val="26354E"/>
-            </a:solidFill>
-          </a:ln>
-          <a:effectLst/>
-        </p:spPr>
-        <p:style>
-          <a:lnRef idx="1">
-            <a:schemeClr val="accent1"/>
-          </a:lnRef>
-          <a:fillRef idx="3">
-            <a:schemeClr val="accent1"/>
-          </a:fillRef>
-          <a:effectRef idx="2">
-            <a:schemeClr val="accent1"/>
-          </a:effectRef>
-          <a:fontRef idx="minor">
-            <a:schemeClr val="lt1"/>
-          </a:fontRef>
-        </p:style>
-        <p:txBody>
-          <a:bodyPr rtlCol="0" anchor="ctr"/>
-          <a:lstStyle/>
-          <a:p>
-            <a:pPr algn="ctr"/>
-          </a:p>
-        </p:txBody>
-      </p:sp>
+      <p:pic>
+        <p:nvPicPr>
+          <p:cNvPr id="3" name="Picture 2" descr="svc.png"/>
+          <p:cNvPicPr>
+            <a:picLocks noChangeAspect="1"/>
+          </p:cNvPicPr>
+          <p:nvPr/>
+        </p:nvPicPr>
+        <p:blipFill>
+          <a:blip r:embed="rId2"/>
+          <a:stretch>
+            <a:fillRect/>
+          </a:stretch>
+        </p:blipFill>
+        <p:spPr>
+          <a:xfrm>
+            <a:off x="8842000" y="2150000"/>
+            <a:ext cx="1800000" cy="1800000"/>
+          </a:xfrm>
+          <a:prstGeom prst="rect">
+            <a:avLst/>
+          </a:prstGeom>
+        </p:spPr>
+      </p:pic>
       <p:sp>
         <p:nvSpPr>
           <p:cNvPr id="4" name="TextBox 3"/>
@@ -22410,7 +23486,7 @@
         <p:spPr>
           <a:xfrm>
             <a:off x="620000" y="560000"/>
-            <a:ext cx="10952000" cy="620000"/>
+            <a:ext cx="10052000" cy="620000"/>
           </a:xfrm>
           <a:prstGeom prst="rect">
             <a:avLst/>
@@ -22631,20 +23707,44 @@
           </a:p>
         </p:txBody>
       </p:sp>
-      <p:sp>
-        <p:nvSpPr>
-          <p:cNvPr id="8" name="Rounded Rectangle 7"/>
+      <p:pic>
+        <p:nvPicPr>
+          <p:cNvPr id="8" name="Picture 7" descr="svc.png"/>
+          <p:cNvPicPr>
+            <a:picLocks noChangeAspect="1"/>
+          </p:cNvPicPr>
+          <p:nvPr/>
+        </p:nvPicPr>
+        <p:blipFill>
+          <a:blip r:embed="rId2"/>
+          <a:stretch>
+            <a:fillRect/>
+          </a:stretch>
+        </p:blipFill>
+        <p:spPr>
+          <a:xfrm>
+            <a:off x="10932000" y="275000"/>
+            <a:ext cx="640000" cy="640000"/>
+          </a:xfrm>
+          <a:prstGeom prst="rect">
+            <a:avLst/>
+          </a:prstGeom>
+        </p:spPr>
+      </p:pic>
+      <p:sp>
+        <p:nvSpPr>
+          <p:cNvPr id="9" name="Rounded Rectangle 8"/>
           <p:cNvSpPr/>
           <p:nvPr/>
         </p:nvSpPr>
         <p:spPr>
           <a:xfrm>
-            <a:off x="620000" y="1790000"/>
-            <a:ext cx="2070400" cy="720000"/>
+            <a:off x="620000" y="1830000"/>
+            <a:ext cx="2022400" cy="760000"/>
           </a:xfrm>
           <a:prstGeom prst="roundRect">
             <a:avLst>
-              <a:gd name="adj" fmla="val 12000"/>
+              <a:gd name="adj" fmla="val 11000"/>
             </a:avLst>
           </a:prstGeom>
           <a:solidFill>
@@ -22683,60 +23783,14 @@
       </p:sp>
       <p:sp>
         <p:nvSpPr>
-          <p:cNvPr id="9" name="TextBox 8"/>
-          <p:cNvSpPr txBox="1"/>
-          <p:nvPr/>
-        </p:nvSpPr>
-        <p:spPr>
-          <a:xfrm>
-            <a:off x="690000" y="1790000"/>
-            <a:ext cx="1930400" cy="720000"/>
-          </a:xfrm>
-          <a:prstGeom prst="rect">
-            <a:avLst/>
-          </a:prstGeom>
-          <a:noFill/>
-        </p:spPr>
-        <p:txBody>
-          <a:bodyPr wrap="square" anchor="ctr" lIns="0" rIns="0" tIns="0" bIns="0">
-            <a:noAutofit/>
-          </a:bodyPr>
-          <a:lstStyle/>
-          <a:p>
-            <a:pPr algn="ctr" marL="0" indent="0">
-              <a:lnSpc>
-                <a:spcPct val="112000"/>
-              </a:lnSpc>
-              <a:spcBef>
-                <a:spcPts val="0"/>
-              </a:spcBef>
-              <a:spcAft>
-                <a:spcPts val="0"/>
-              </a:spcAft>
-              <a:buNone/>
-            </a:pPr>
-            <a:r>
-              <a:rPr sz="1100" b="1" i="0">
-                <a:solidFill>
-                  <a:srgbClr val="F3F6FC"/>
-                </a:solidFill>
-                <a:latin typeface="Segoe UI Semibold"/>
-              </a:rPr>
-              <a:t>Cliente</a:t>
-            </a:r>
-          </a:p>
-        </p:txBody>
-      </p:sp>
-      <p:sp>
-        <p:nvSpPr>
           <p:cNvPr id="10" name="TextBox 9"/>
           <p:cNvSpPr txBox="1"/>
           <p:nvPr/>
         </p:nvSpPr>
         <p:spPr>
           <a:xfrm>
-            <a:off x="2650400" y="1790000"/>
-            <a:ext cx="230000" cy="720000"/>
+            <a:off x="690000" y="1830000"/>
+            <a:ext cx="1882400" cy="760000"/>
           </a:xfrm>
           <a:prstGeom prst="rect">
             <a:avLst/>
@@ -22751,42 +23805,79 @@
           <a:p>
             <a:pPr algn="ctr" marL="0" indent="0">
               <a:lnSpc>
-                <a:spcPct val="100000"/>
-              </a:lnSpc>
-              <a:spcBef>
-                <a:spcPts val="0"/>
-              </a:spcBef>
-              <a:spcAft>
-                <a:spcPts val="0"/>
-              </a:spcAft>
-              <a:buNone/>
-            </a:pPr>
-            <a:r>
-              <a:rPr sz="1500" b="0" i="0">
-                <a:solidFill>
-                  <a:srgbClr val="74A6FF"/>
-                </a:solidFill>
-                <a:latin typeface="Segoe UI"/>
-              </a:rPr>
-              <a:t>→</a:t>
-            </a:r>
-          </a:p>
-        </p:txBody>
-      </p:sp>
-      <p:sp>
-        <p:nvSpPr>
-          <p:cNvPr id="11" name="Rounded Rectangle 10"/>
+                <a:spcPct val="112000"/>
+              </a:lnSpc>
+              <a:spcBef>
+                <a:spcPts val="0"/>
+              </a:spcBef>
+              <a:spcAft>
+                <a:spcPts val="0"/>
+              </a:spcAft>
+              <a:buNone/>
+            </a:pPr>
+            <a:r>
+              <a:rPr sz="1100" b="1" i="0">
+                <a:solidFill>
+                  <a:srgbClr val="F3F6FC"/>
+                </a:solidFill>
+                <a:latin typeface="Segoe UI Semibold"/>
+              </a:rPr>
+              <a:t>Cliente</a:t>
+            </a:r>
+          </a:p>
+        </p:txBody>
+      </p:sp>
+      <p:cxnSp>
+        <p:nvCxnSpPr>
+          <p:cNvPr id="11" name="Connector 10"/>
+          <p:cNvCxnSpPr/>
+          <p:nvPr/>
+        </p:nvCxnSpPr>
+        <p:spPr>
+          <a:xfrm>
+            <a:off x="2666400" y="2210000"/>
+            <a:ext cx="162000" cy="0"/>
+          </a:xfrm>
+          <a:prstGeom prst="line">
+            <a:avLst/>
+          </a:prstGeom>
+          <a:ln w="22225">
+            <a:solidFill>
+              <a:srgbClr val="74A6FF"/>
+            </a:solidFill>
+            <a:tailEnd type="triangle" w="med" len="med"/>
+          </a:ln>
+          <a:effectLst/>
+        </p:spPr>
+        <p:style>
+          <a:lnRef idx="2">
+            <a:schemeClr val="accent1"/>
+          </a:lnRef>
+          <a:fillRef idx="0">
+            <a:schemeClr val="accent1"/>
+          </a:fillRef>
+          <a:effectRef idx="1">
+            <a:schemeClr val="accent1"/>
+          </a:effectRef>
+          <a:fontRef idx="minor">
+            <a:schemeClr val="tx1"/>
+          </a:fontRef>
+        </p:style>
+      </p:cxnSp>
+      <p:sp>
+        <p:nvSpPr>
+          <p:cNvPr id="12" name="Rounded Rectangle 11"/>
           <p:cNvSpPr/>
           <p:nvPr/>
         </p:nvSpPr>
         <p:spPr>
           <a:xfrm>
-            <a:off x="2840400" y="1790000"/>
-            <a:ext cx="2070400" cy="720000"/>
+            <a:off x="2852400" y="1830000"/>
+            <a:ext cx="2022400" cy="760000"/>
           </a:xfrm>
           <a:prstGeom prst="roundRect">
             <a:avLst>
-              <a:gd name="adj" fmla="val 12000"/>
+              <a:gd name="adj" fmla="val 11000"/>
             </a:avLst>
           </a:prstGeom>
           <a:solidFill>
@@ -22825,60 +23916,14 @@
       </p:sp>
       <p:sp>
         <p:nvSpPr>
-          <p:cNvPr id="12" name="TextBox 11"/>
-          <p:cNvSpPr txBox="1"/>
-          <p:nvPr/>
-        </p:nvSpPr>
-        <p:spPr>
-          <a:xfrm>
-            <a:off x="2910400" y="1790000"/>
-            <a:ext cx="1930400" cy="720000"/>
-          </a:xfrm>
-          <a:prstGeom prst="rect">
-            <a:avLst/>
-          </a:prstGeom>
-          <a:noFill/>
-        </p:spPr>
-        <p:txBody>
-          <a:bodyPr wrap="square" anchor="ctr" lIns="0" rIns="0" tIns="0" bIns="0">
-            <a:noAutofit/>
-          </a:bodyPr>
-          <a:lstStyle/>
-          <a:p>
-            <a:pPr algn="ctr" marL="0" indent="0">
-              <a:lnSpc>
-                <a:spcPct val="112000"/>
-              </a:lnSpc>
-              <a:spcBef>
-                <a:spcPts val="0"/>
-              </a:spcBef>
-              <a:spcAft>
-                <a:spcPts val="0"/>
-              </a:spcAft>
-              <a:buNone/>
-            </a:pPr>
-            <a:r>
-              <a:rPr sz="1100" b="1" i="0">
-                <a:solidFill>
-                  <a:srgbClr val="F3F6FC"/>
-                </a:solidFill>
-                <a:latin typeface="Segoe UI Semibold"/>
-              </a:rPr>
-              <a:t>ClusterIP (virtual)</a:t>
-            </a:r>
-          </a:p>
-        </p:txBody>
-      </p:sp>
-      <p:sp>
-        <p:nvSpPr>
           <p:cNvPr id="13" name="TextBox 12"/>
           <p:cNvSpPr txBox="1"/>
           <p:nvPr/>
         </p:nvSpPr>
         <p:spPr>
           <a:xfrm>
-            <a:off x="4870800" y="1790000"/>
-            <a:ext cx="230000" cy="720000"/>
+            <a:off x="2922400" y="1830000"/>
+            <a:ext cx="1882400" cy="760000"/>
           </a:xfrm>
           <a:prstGeom prst="rect">
             <a:avLst/>
@@ -22893,42 +23938,79 @@
           <a:p>
             <a:pPr algn="ctr" marL="0" indent="0">
               <a:lnSpc>
-                <a:spcPct val="100000"/>
-              </a:lnSpc>
-              <a:spcBef>
-                <a:spcPts val="0"/>
-              </a:spcBef>
-              <a:spcAft>
-                <a:spcPts val="0"/>
-              </a:spcAft>
-              <a:buNone/>
-            </a:pPr>
-            <a:r>
-              <a:rPr sz="1500" b="0" i="0">
-                <a:solidFill>
-                  <a:srgbClr val="74A6FF"/>
-                </a:solidFill>
-                <a:latin typeface="Segoe UI"/>
-              </a:rPr>
-              <a:t>→</a:t>
-            </a:r>
-          </a:p>
-        </p:txBody>
-      </p:sp>
-      <p:sp>
-        <p:nvSpPr>
-          <p:cNvPr id="14" name="Rounded Rectangle 13"/>
+                <a:spcPct val="112000"/>
+              </a:lnSpc>
+              <a:spcBef>
+                <a:spcPts val="0"/>
+              </a:spcBef>
+              <a:spcAft>
+                <a:spcPts val="0"/>
+              </a:spcAft>
+              <a:buNone/>
+            </a:pPr>
+            <a:r>
+              <a:rPr sz="1100" b="1" i="0">
+                <a:solidFill>
+                  <a:srgbClr val="F3F6FC"/>
+                </a:solidFill>
+                <a:latin typeface="Segoe UI Semibold"/>
+              </a:rPr>
+              <a:t>ClusterIP (virtual)</a:t>
+            </a:r>
+          </a:p>
+        </p:txBody>
+      </p:sp>
+      <p:cxnSp>
+        <p:nvCxnSpPr>
+          <p:cNvPr id="14" name="Connector 13"/>
+          <p:cNvCxnSpPr/>
+          <p:nvPr/>
+        </p:nvCxnSpPr>
+        <p:spPr>
+          <a:xfrm>
+            <a:off x="4898800" y="2210000"/>
+            <a:ext cx="162000" cy="0"/>
+          </a:xfrm>
+          <a:prstGeom prst="line">
+            <a:avLst/>
+          </a:prstGeom>
+          <a:ln w="22225">
+            <a:solidFill>
+              <a:srgbClr val="74A6FF"/>
+            </a:solidFill>
+            <a:tailEnd type="triangle" w="med" len="med"/>
+          </a:ln>
+          <a:effectLst/>
+        </p:spPr>
+        <p:style>
+          <a:lnRef idx="2">
+            <a:schemeClr val="accent1"/>
+          </a:lnRef>
+          <a:fillRef idx="0">
+            <a:schemeClr val="accent1"/>
+          </a:fillRef>
+          <a:effectRef idx="1">
+            <a:schemeClr val="accent1"/>
+          </a:effectRef>
+          <a:fontRef idx="minor">
+            <a:schemeClr val="tx1"/>
+          </a:fontRef>
+        </p:style>
+      </p:cxnSp>
+      <p:sp>
+        <p:nvSpPr>
+          <p:cNvPr id="15" name="Rounded Rectangle 14"/>
           <p:cNvSpPr/>
           <p:nvPr/>
         </p:nvSpPr>
         <p:spPr>
           <a:xfrm>
-            <a:off x="5060800" y="1790000"/>
-            <a:ext cx="2070400" cy="720000"/>
+            <a:off x="5084800" y="1830000"/>
+            <a:ext cx="2022400" cy="760000"/>
           </a:xfrm>
           <a:prstGeom prst="roundRect">
             <a:avLst>
-              <a:gd name="adj" fmla="val 12000"/>
+              <a:gd name="adj" fmla="val 11000"/>
             </a:avLst>
           </a:prstGeom>
           <a:solidFill>
@@ -22967,60 +24049,14 @@
       </p:sp>
       <p:sp>
         <p:nvSpPr>
-          <p:cNvPr id="15" name="TextBox 14"/>
-          <p:cNvSpPr txBox="1"/>
-          <p:nvPr/>
-        </p:nvSpPr>
-        <p:spPr>
-          <a:xfrm>
-            <a:off x="5130800" y="1790000"/>
-            <a:ext cx="1930400" cy="720000"/>
-          </a:xfrm>
-          <a:prstGeom prst="rect">
-            <a:avLst/>
-          </a:prstGeom>
-          <a:noFill/>
-        </p:spPr>
-        <p:txBody>
-          <a:bodyPr wrap="square" anchor="ctr" lIns="0" rIns="0" tIns="0" bIns="0">
-            <a:noAutofit/>
-          </a:bodyPr>
-          <a:lstStyle/>
-          <a:p>
-            <a:pPr algn="ctr" marL="0" indent="0">
-              <a:lnSpc>
-                <a:spcPct val="112000"/>
-              </a:lnSpc>
-              <a:spcBef>
-                <a:spcPts val="0"/>
-              </a:spcBef>
-              <a:spcAft>
-                <a:spcPts val="0"/>
-              </a:spcAft>
-              <a:buNone/>
-            </a:pPr>
-            <a:r>
-              <a:rPr sz="1100" b="1" i="0">
-                <a:solidFill>
-                  <a:srgbClr val="F3F6FC"/>
-                </a:solidFill>
-                <a:latin typeface="Segoe UI Semibold"/>
-              </a:rPr>
-              <a:t>kube-proxy · iptables/IPVS</a:t>
-            </a:r>
-          </a:p>
-        </p:txBody>
-      </p:sp>
-      <p:sp>
-        <p:nvSpPr>
           <p:cNvPr id="16" name="TextBox 15"/>
           <p:cNvSpPr txBox="1"/>
           <p:nvPr/>
         </p:nvSpPr>
         <p:spPr>
           <a:xfrm>
-            <a:off x="7091200" y="1790000"/>
-            <a:ext cx="230000" cy="720000"/>
+            <a:off x="5154800" y="1830000"/>
+            <a:ext cx="1882400" cy="760000"/>
           </a:xfrm>
           <a:prstGeom prst="rect">
             <a:avLst/>
@@ -23035,42 +24071,79 @@
           <a:p>
             <a:pPr algn="ctr" marL="0" indent="0">
               <a:lnSpc>
-                <a:spcPct val="100000"/>
-              </a:lnSpc>
-              <a:spcBef>
-                <a:spcPts val="0"/>
-              </a:spcBef>
-              <a:spcAft>
-                <a:spcPts val="0"/>
-              </a:spcAft>
-              <a:buNone/>
-            </a:pPr>
-            <a:r>
-              <a:rPr sz="1500" b="0" i="0">
-                <a:solidFill>
-                  <a:srgbClr val="74A6FF"/>
-                </a:solidFill>
-                <a:latin typeface="Segoe UI"/>
-              </a:rPr>
-              <a:t>→</a:t>
-            </a:r>
-          </a:p>
-        </p:txBody>
-      </p:sp>
-      <p:sp>
-        <p:nvSpPr>
-          <p:cNvPr id="17" name="Rounded Rectangle 16"/>
+                <a:spcPct val="112000"/>
+              </a:lnSpc>
+              <a:spcBef>
+                <a:spcPts val="0"/>
+              </a:spcBef>
+              <a:spcAft>
+                <a:spcPts val="0"/>
+              </a:spcAft>
+              <a:buNone/>
+            </a:pPr>
+            <a:r>
+              <a:rPr sz="1100" b="1" i="0">
+                <a:solidFill>
+                  <a:srgbClr val="F3F6FC"/>
+                </a:solidFill>
+                <a:latin typeface="Segoe UI Semibold"/>
+              </a:rPr>
+              <a:t>kube-proxy · iptables/IPVS</a:t>
+            </a:r>
+          </a:p>
+        </p:txBody>
+      </p:sp>
+      <p:cxnSp>
+        <p:nvCxnSpPr>
+          <p:cNvPr id="17" name="Connector 16"/>
+          <p:cNvCxnSpPr/>
+          <p:nvPr/>
+        </p:nvCxnSpPr>
+        <p:spPr>
+          <a:xfrm>
+            <a:off x="7131200" y="2210000"/>
+            <a:ext cx="162000" cy="0"/>
+          </a:xfrm>
+          <a:prstGeom prst="line">
+            <a:avLst/>
+          </a:prstGeom>
+          <a:ln w="22225">
+            <a:solidFill>
+              <a:srgbClr val="74A6FF"/>
+            </a:solidFill>
+            <a:tailEnd type="triangle" w="med" len="med"/>
+          </a:ln>
+          <a:effectLst/>
+        </p:spPr>
+        <p:style>
+          <a:lnRef idx="2">
+            <a:schemeClr val="accent1"/>
+          </a:lnRef>
+          <a:fillRef idx="0">
+            <a:schemeClr val="accent1"/>
+          </a:fillRef>
+          <a:effectRef idx="1">
+            <a:schemeClr val="accent1"/>
+          </a:effectRef>
+          <a:fontRef idx="minor">
+            <a:schemeClr val="tx1"/>
+          </a:fontRef>
+        </p:style>
+      </p:cxnSp>
+      <p:sp>
+        <p:nvSpPr>
+          <p:cNvPr id="18" name="Rounded Rectangle 17"/>
           <p:cNvSpPr/>
           <p:nvPr/>
         </p:nvSpPr>
         <p:spPr>
           <a:xfrm>
-            <a:off x="7281200" y="1790000"/>
-            <a:ext cx="2070400" cy="720000"/>
+            <a:off x="7317200" y="1830000"/>
+            <a:ext cx="2022400" cy="760000"/>
           </a:xfrm>
           <a:prstGeom prst="roundRect">
             <a:avLst>
-              <a:gd name="adj" fmla="val 12000"/>
+              <a:gd name="adj" fmla="val 11000"/>
             </a:avLst>
           </a:prstGeom>
           <a:solidFill>
@@ -23109,60 +24182,14 @@
       </p:sp>
       <p:sp>
         <p:nvSpPr>
-          <p:cNvPr id="18" name="TextBox 17"/>
-          <p:cNvSpPr txBox="1"/>
-          <p:nvPr/>
-        </p:nvSpPr>
-        <p:spPr>
-          <a:xfrm>
-            <a:off x="7351200" y="1790000"/>
-            <a:ext cx="1930400" cy="720000"/>
-          </a:xfrm>
-          <a:prstGeom prst="rect">
-            <a:avLst/>
-          </a:prstGeom>
-          <a:noFill/>
-        </p:spPr>
-        <p:txBody>
-          <a:bodyPr wrap="square" anchor="ctr" lIns="0" rIns="0" tIns="0" bIns="0">
-            <a:noAutofit/>
-          </a:bodyPr>
-          <a:lstStyle/>
-          <a:p>
-            <a:pPr algn="ctr" marL="0" indent="0">
-              <a:lnSpc>
-                <a:spcPct val="112000"/>
-              </a:lnSpc>
-              <a:spcBef>
-                <a:spcPts val="0"/>
-              </a:spcBef>
-              <a:spcAft>
-                <a:spcPts val="0"/>
-              </a:spcAft>
-              <a:buNone/>
-            </a:pPr>
-            <a:r>
-              <a:rPr sz="1100" b="1" i="0">
-                <a:solidFill>
-                  <a:srgbClr val="F3F6FC"/>
-                </a:solidFill>
-                <a:latin typeface="Segoe UI Semibold"/>
-              </a:rPr>
-              <a:t>EndpointSlice</a:t>
-            </a:r>
-          </a:p>
-        </p:txBody>
-      </p:sp>
-      <p:sp>
-        <p:nvSpPr>
           <p:cNvPr id="19" name="TextBox 18"/>
           <p:cNvSpPr txBox="1"/>
           <p:nvPr/>
         </p:nvSpPr>
         <p:spPr>
           <a:xfrm>
-            <a:off x="9311600" y="1790000"/>
-            <a:ext cx="230000" cy="720000"/>
+            <a:off x="7387200" y="1830000"/>
+            <a:ext cx="1882400" cy="760000"/>
           </a:xfrm>
           <a:prstGeom prst="rect">
             <a:avLst/>
@@ -23177,42 +24204,79 @@
           <a:p>
             <a:pPr algn="ctr" marL="0" indent="0">
               <a:lnSpc>
-                <a:spcPct val="100000"/>
-              </a:lnSpc>
-              <a:spcBef>
-                <a:spcPts val="0"/>
-              </a:spcBef>
-              <a:spcAft>
-                <a:spcPts val="0"/>
-              </a:spcAft>
-              <a:buNone/>
-            </a:pPr>
-            <a:r>
-              <a:rPr sz="1500" b="0" i="0">
-                <a:solidFill>
-                  <a:srgbClr val="74A6FF"/>
-                </a:solidFill>
-                <a:latin typeface="Segoe UI"/>
-              </a:rPr>
-              <a:t>→</a:t>
-            </a:r>
-          </a:p>
-        </p:txBody>
-      </p:sp>
-      <p:sp>
-        <p:nvSpPr>
-          <p:cNvPr id="20" name="Rounded Rectangle 19"/>
+                <a:spcPct val="112000"/>
+              </a:lnSpc>
+              <a:spcBef>
+                <a:spcPts val="0"/>
+              </a:spcBef>
+              <a:spcAft>
+                <a:spcPts val="0"/>
+              </a:spcAft>
+              <a:buNone/>
+            </a:pPr>
+            <a:r>
+              <a:rPr sz="1100" b="1" i="0">
+                <a:solidFill>
+                  <a:srgbClr val="F3F6FC"/>
+                </a:solidFill>
+                <a:latin typeface="Segoe UI Semibold"/>
+              </a:rPr>
+              <a:t>EndpointSlice</a:t>
+            </a:r>
+          </a:p>
+        </p:txBody>
+      </p:sp>
+      <p:cxnSp>
+        <p:nvCxnSpPr>
+          <p:cNvPr id="20" name="Connector 19"/>
+          <p:cNvCxnSpPr/>
+          <p:nvPr/>
+        </p:nvCxnSpPr>
+        <p:spPr>
+          <a:xfrm>
+            <a:off x="9363600" y="2210000"/>
+            <a:ext cx="162000" cy="0"/>
+          </a:xfrm>
+          <a:prstGeom prst="line">
+            <a:avLst/>
+          </a:prstGeom>
+          <a:ln w="22225">
+            <a:solidFill>
+              <a:srgbClr val="74A6FF"/>
+            </a:solidFill>
+            <a:tailEnd type="triangle" w="med" len="med"/>
+          </a:ln>
+          <a:effectLst/>
+        </p:spPr>
+        <p:style>
+          <a:lnRef idx="2">
+            <a:schemeClr val="accent1"/>
+          </a:lnRef>
+          <a:fillRef idx="0">
+            <a:schemeClr val="accent1"/>
+          </a:fillRef>
+          <a:effectRef idx="1">
+            <a:schemeClr val="accent1"/>
+          </a:effectRef>
+          <a:fontRef idx="minor">
+            <a:schemeClr val="tx1"/>
+          </a:fontRef>
+        </p:style>
+      </p:cxnSp>
+      <p:sp>
+        <p:nvSpPr>
+          <p:cNvPr id="21" name="Rounded Rectangle 20"/>
           <p:cNvSpPr/>
           <p:nvPr/>
         </p:nvSpPr>
         <p:spPr>
           <a:xfrm>
-            <a:off x="9501600" y="1790000"/>
-            <a:ext cx="2070400" cy="720000"/>
+            <a:off x="9549600" y="1830000"/>
+            <a:ext cx="2022400" cy="760000"/>
           </a:xfrm>
           <a:prstGeom prst="roundRect">
             <a:avLst>
-              <a:gd name="adj" fmla="val 12000"/>
+              <a:gd name="adj" fmla="val 11000"/>
             </a:avLst>
           </a:prstGeom>
           <a:solidFill>
@@ -23251,14 +24315,14 @@
       </p:sp>
       <p:sp>
         <p:nvSpPr>
-          <p:cNvPr id="21" name="TextBox 20"/>
+          <p:cNvPr id="22" name="TextBox 21"/>
           <p:cNvSpPr txBox="1"/>
           <p:nvPr/>
         </p:nvSpPr>
         <p:spPr>
           <a:xfrm>
-            <a:off x="9571600" y="1790000"/>
-            <a:ext cx="1930400" cy="720000"/>
+            <a:off x="9619600" y="1830000"/>
+            <a:ext cx="1882400" cy="760000"/>
           </a:xfrm>
           <a:prstGeom prst="rect">
             <a:avLst/>
@@ -23297,13 +24361,13 @@
       </p:sp>
       <p:sp>
         <p:nvSpPr>
-          <p:cNvPr id="22" name="Rounded Rectangle 21"/>
+          <p:cNvPr id="23" name="Rounded Rectangle 22"/>
           <p:cNvSpPr/>
           <p:nvPr/>
         </p:nvSpPr>
         <p:spPr>
           <a:xfrm>
-            <a:off x="620000" y="2830000"/>
+            <a:off x="620000" y="2950000"/>
             <a:ext cx="10952000" cy="1820000"/>
           </a:xfrm>
           <a:prstGeom prst="roundRect">
@@ -23347,13 +24411,13 @@
       </p:sp>
       <p:sp>
         <p:nvSpPr>
-          <p:cNvPr id="23" name="Rectangle 22"/>
+          <p:cNvPr id="24" name="Rectangle 23"/>
           <p:cNvSpPr/>
           <p:nvPr/>
         </p:nvSpPr>
         <p:spPr>
           <a:xfrm>
-            <a:off x="650000" y="2854000"/>
+            <a:off x="650000" y="2974000"/>
             <a:ext cx="40000" cy="1772000"/>
           </a:xfrm>
           <a:prstGeom prst="rect">
@@ -23393,13 +24457,13 @@
       </p:sp>
       <p:sp>
         <p:nvSpPr>
-          <p:cNvPr id="24" name="TextBox 23"/>
+          <p:cNvPr id="25" name="TextBox 24"/>
           <p:cNvSpPr txBox="1"/>
           <p:nvPr/>
         </p:nvSpPr>
         <p:spPr>
           <a:xfrm>
-            <a:off x="880000" y="3070000"/>
+            <a:off x="880000" y="3190000"/>
             <a:ext cx="10432000" cy="1420000"/>
           </a:xfrm>
           <a:prstGeom prst="rect">
@@ -23614,7 +24678,7 @@
         <p:spPr>
           <a:xfrm>
             <a:off x="620000" y="560000"/>
-            <a:ext cx="10952000" cy="620000"/>
+            <a:ext cx="10052000" cy="620000"/>
           </a:xfrm>
           <a:prstGeom prst="rect">
             <a:avLst/>
@@ -23997,52 +25061,30 @@
           </a:p>
         </p:txBody>
       </p:sp>
-      <p:sp>
-        <p:nvSpPr>
-          <p:cNvPr id="11" name="TextBox 10"/>
-          <p:cNvSpPr txBox="1"/>
-          <p:nvPr/>
-        </p:nvSpPr>
-        <p:spPr>
-          <a:xfrm>
-            <a:off x="1260000" y="2432000"/>
-            <a:ext cx="2747333" cy="340000"/>
-          </a:xfrm>
-          <a:prstGeom prst="rect">
-            <a:avLst/>
-          </a:prstGeom>
-          <a:noFill/>
-        </p:spPr>
-        <p:txBody>
-          <a:bodyPr wrap="square" anchor="ctr" lIns="0" rIns="0" tIns="0" bIns="0">
-            <a:noAutofit/>
-          </a:bodyPr>
-          <a:lstStyle/>
-          <a:p>
-            <a:pPr algn="l" marL="0" indent="0">
-              <a:lnSpc>
-                <a:spcPct val="105000"/>
-              </a:lnSpc>
-              <a:spcBef>
-                <a:spcPts val="0"/>
-              </a:spcBef>
-              <a:spcAft>
-                <a:spcPts val="0"/>
-              </a:spcAft>
-              <a:buNone/>
-            </a:pPr>
-            <a:r>
-              <a:rPr sz="1500" b="1" i="0">
-                <a:solidFill>
-                  <a:srgbClr val="F3F6FC"/>
-                </a:solidFill>
-                <a:latin typeface="Segoe UI Semibold"/>
-              </a:rPr>
-              <a:t>ClusterIP</a:t>
-            </a:r>
-          </a:p>
-        </p:txBody>
-      </p:sp>
+      <p:pic>
+        <p:nvPicPr>
+          <p:cNvPr id="11" name="Picture 10" descr="svc.png"/>
+          <p:cNvPicPr>
+            <a:picLocks noChangeAspect="1"/>
+          </p:cNvPicPr>
+          <p:nvPr/>
+        </p:nvPicPr>
+        <p:blipFill>
+          <a:blip r:embed="rId2"/>
+          <a:stretch>
+            <a:fillRect/>
+          </a:stretch>
+        </p:blipFill>
+        <p:spPr>
+          <a:xfrm>
+            <a:off x="3497333" y="2438000"/>
+            <a:ext cx="330000" cy="330000"/>
+          </a:xfrm>
+          <a:prstGeom prst="rect">
+            <a:avLst/>
+          </a:prstGeom>
+        </p:spPr>
+      </p:pic>
       <p:sp>
         <p:nvSpPr>
           <p:cNvPr id="12" name="TextBox 11"/>
@@ -24051,6 +25093,52 @@
         </p:nvSpPr>
         <p:spPr>
           <a:xfrm>
+            <a:off x="1260000" y="2432000"/>
+            <a:ext cx="2377333" cy="340000"/>
+          </a:xfrm>
+          <a:prstGeom prst="rect">
+            <a:avLst/>
+          </a:prstGeom>
+          <a:noFill/>
+        </p:spPr>
+        <p:txBody>
+          <a:bodyPr wrap="square" anchor="ctr" lIns="0" rIns="0" tIns="0" bIns="0">
+            <a:noAutofit/>
+          </a:bodyPr>
+          <a:lstStyle/>
+          <a:p>
+            <a:pPr algn="l" marL="0" indent="0">
+              <a:lnSpc>
+                <a:spcPct val="105000"/>
+              </a:lnSpc>
+              <a:spcBef>
+                <a:spcPts val="0"/>
+              </a:spcBef>
+              <a:spcAft>
+                <a:spcPts val="0"/>
+              </a:spcAft>
+              <a:buNone/>
+            </a:pPr>
+            <a:r>
+              <a:rPr sz="1500" b="1" i="0">
+                <a:solidFill>
+                  <a:srgbClr val="F3F6FC"/>
+                </a:solidFill>
+                <a:latin typeface="Segoe UI Semibold"/>
+              </a:rPr>
+              <a:t>ClusterIP</a:t>
+            </a:r>
+          </a:p>
+        </p:txBody>
+      </p:sp>
+      <p:sp>
+        <p:nvSpPr>
+          <p:cNvPr id="13" name="TextBox 12"/>
+          <p:cNvSpPr txBox="1"/>
+          <p:nvPr/>
+        </p:nvSpPr>
+        <p:spPr>
+          <a:xfrm>
             <a:off x="850000" y="2852000"/>
             <a:ext cx="2977333" cy="838000"/>
           </a:xfrm>
@@ -24091,7 +25179,7 @@
       </p:sp>
       <p:sp>
         <p:nvSpPr>
-          <p:cNvPr id="13" name="Rounded Rectangle 12"/>
+          <p:cNvPr id="14" name="Rounded Rectangle 13"/>
           <p:cNvSpPr/>
           <p:nvPr/>
         </p:nvSpPr>
@@ -24141,7 +25229,7 @@
       </p:sp>
       <p:sp>
         <p:nvSpPr>
-          <p:cNvPr id="14" name="Rectangle 13"/>
+          <p:cNvPr id="15" name="Rectangle 14"/>
           <p:cNvSpPr/>
           <p:nvPr/>
         </p:nvSpPr>
@@ -24187,7 +25275,7 @@
       </p:sp>
       <p:sp>
         <p:nvSpPr>
-          <p:cNvPr id="15" name="Oval 14"/>
+          <p:cNvPr id="16" name="Oval 15"/>
           <p:cNvSpPr/>
           <p:nvPr/>
         </p:nvSpPr>
@@ -24251,16 +25339,40 @@
           </a:p>
         </p:txBody>
       </p:sp>
-      <p:sp>
-        <p:nvSpPr>
-          <p:cNvPr id="16" name="TextBox 15"/>
+      <p:pic>
+        <p:nvPicPr>
+          <p:cNvPr id="17" name="Picture 16" descr="svc.png"/>
+          <p:cNvPicPr>
+            <a:picLocks noChangeAspect="1"/>
+          </p:cNvPicPr>
+          <p:nvPr/>
+        </p:nvPicPr>
+        <p:blipFill>
+          <a:blip r:embed="rId2"/>
+          <a:stretch>
+            <a:fillRect/>
+          </a:stretch>
+        </p:blipFill>
+        <p:spPr>
+          <a:xfrm>
+            <a:off x="7254666" y="2438000"/>
+            <a:ext cx="330000" cy="330000"/>
+          </a:xfrm>
+          <a:prstGeom prst="rect">
+            <a:avLst/>
+          </a:prstGeom>
+        </p:spPr>
+      </p:pic>
+      <p:sp>
+        <p:nvSpPr>
+          <p:cNvPr id="18" name="TextBox 17"/>
           <p:cNvSpPr txBox="1"/>
           <p:nvPr/>
         </p:nvSpPr>
         <p:spPr>
           <a:xfrm>
             <a:off x="5017333" y="2432000"/>
-            <a:ext cx="2747333" cy="340000"/>
+            <a:ext cx="2377333" cy="340000"/>
           </a:xfrm>
           <a:prstGeom prst="rect">
             <a:avLst/>
@@ -24299,7 +25411,7 @@
       </p:sp>
       <p:sp>
         <p:nvSpPr>
-          <p:cNvPr id="17" name="TextBox 16"/>
+          <p:cNvPr id="19" name="TextBox 18"/>
           <p:cNvSpPr txBox="1"/>
           <p:nvPr/>
         </p:nvSpPr>
@@ -24345,7 +25457,7 @@
       </p:sp>
       <p:sp>
         <p:nvSpPr>
-          <p:cNvPr id="18" name="Rounded Rectangle 17"/>
+          <p:cNvPr id="20" name="Rounded Rectangle 19"/>
           <p:cNvSpPr/>
           <p:nvPr/>
         </p:nvSpPr>
@@ -24395,7 +25507,7 @@
       </p:sp>
       <p:sp>
         <p:nvSpPr>
-          <p:cNvPr id="19" name="Rectangle 18"/>
+          <p:cNvPr id="21" name="Rectangle 20"/>
           <p:cNvSpPr/>
           <p:nvPr/>
         </p:nvSpPr>
@@ -24441,7 +25553,7 @@
       </p:sp>
       <p:sp>
         <p:nvSpPr>
-          <p:cNvPr id="20" name="Oval 19"/>
+          <p:cNvPr id="22" name="Oval 21"/>
           <p:cNvSpPr/>
           <p:nvPr/>
         </p:nvSpPr>
@@ -24505,16 +25617,40 @@
           </a:p>
         </p:txBody>
       </p:sp>
-      <p:sp>
-        <p:nvSpPr>
-          <p:cNvPr id="21" name="TextBox 20"/>
+      <p:pic>
+        <p:nvPicPr>
+          <p:cNvPr id="23" name="Picture 22" descr="svc.png"/>
+          <p:cNvPicPr>
+            <a:picLocks noChangeAspect="1"/>
+          </p:cNvPicPr>
+          <p:nvPr/>
+        </p:nvPicPr>
+        <p:blipFill>
+          <a:blip r:embed="rId2"/>
+          <a:stretch>
+            <a:fillRect/>
+          </a:stretch>
+        </p:blipFill>
+        <p:spPr>
+          <a:xfrm>
+            <a:off x="11012000" y="2438000"/>
+            <a:ext cx="330000" cy="330000"/>
+          </a:xfrm>
+          <a:prstGeom prst="rect">
+            <a:avLst/>
+          </a:prstGeom>
+        </p:spPr>
+      </p:pic>
+      <p:sp>
+        <p:nvSpPr>
+          <p:cNvPr id="24" name="TextBox 23"/>
           <p:cNvSpPr txBox="1"/>
           <p:nvPr/>
         </p:nvSpPr>
         <p:spPr>
           <a:xfrm>
             <a:off x="8774666" y="2432000"/>
-            <a:ext cx="2747333" cy="340000"/>
+            <a:ext cx="2377333" cy="340000"/>
           </a:xfrm>
           <a:prstGeom prst="rect">
             <a:avLst/>
@@ -24553,7 +25689,7 @@
       </p:sp>
       <p:sp>
         <p:nvSpPr>
-          <p:cNvPr id="22" name="TextBox 21"/>
+          <p:cNvPr id="25" name="TextBox 24"/>
           <p:cNvSpPr txBox="1"/>
           <p:nvPr/>
         </p:nvSpPr>
@@ -24599,7 +25735,7 @@
       </p:sp>
       <p:sp>
         <p:nvSpPr>
-          <p:cNvPr id="23" name="Rounded Rectangle 22"/>
+          <p:cNvPr id="26" name="Rounded Rectangle 25"/>
           <p:cNvSpPr/>
           <p:nvPr/>
         </p:nvSpPr>
@@ -24649,7 +25785,7 @@
       </p:sp>
       <p:sp>
         <p:nvSpPr>
-          <p:cNvPr id="24" name="Rectangle 23"/>
+          <p:cNvPr id="27" name="Rectangle 26"/>
           <p:cNvSpPr/>
           <p:nvPr/>
         </p:nvSpPr>
@@ -24695,7 +25831,7 @@
       </p:sp>
       <p:sp>
         <p:nvSpPr>
-          <p:cNvPr id="25" name="Oval 24"/>
+          <p:cNvPr id="28" name="Oval 27"/>
           <p:cNvSpPr/>
           <p:nvPr/>
         </p:nvSpPr>
@@ -24759,16 +25895,40 @@
           </a:p>
         </p:txBody>
       </p:sp>
-      <p:sp>
-        <p:nvSpPr>
-          <p:cNvPr id="26" name="TextBox 25"/>
+      <p:pic>
+        <p:nvPicPr>
+          <p:cNvPr id="29" name="Picture 28" descr="svc.png"/>
+          <p:cNvPicPr>
+            <a:picLocks noChangeAspect="1"/>
+          </p:cNvPicPr>
+          <p:nvPr/>
+        </p:nvPicPr>
+        <p:blipFill>
+          <a:blip r:embed="rId2"/>
+          <a:stretch>
+            <a:fillRect/>
+          </a:stretch>
+        </p:blipFill>
+        <p:spPr>
+          <a:xfrm>
+            <a:off x="3497333" y="4246000"/>
+            <a:ext cx="330000" cy="330000"/>
+          </a:xfrm>
+          <a:prstGeom prst="rect">
+            <a:avLst/>
+          </a:prstGeom>
+        </p:spPr>
+      </p:pic>
+      <p:sp>
+        <p:nvSpPr>
+          <p:cNvPr id="30" name="TextBox 29"/>
           <p:cNvSpPr txBox="1"/>
           <p:nvPr/>
         </p:nvSpPr>
         <p:spPr>
           <a:xfrm>
             <a:off x="1260000" y="4240000"/>
-            <a:ext cx="2747333" cy="340000"/>
+            <a:ext cx="2377333" cy="340000"/>
           </a:xfrm>
           <a:prstGeom prst="rect">
             <a:avLst/>
@@ -24807,7 +25967,7 @@
       </p:sp>
       <p:sp>
         <p:nvSpPr>
-          <p:cNvPr id="27" name="TextBox 26"/>
+          <p:cNvPr id="31" name="TextBox 30"/>
           <p:cNvSpPr txBox="1"/>
           <p:nvPr/>
         </p:nvSpPr>
@@ -24853,7 +26013,7 @@
       </p:sp>
       <p:sp>
         <p:nvSpPr>
-          <p:cNvPr id="28" name="Rounded Rectangle 27"/>
+          <p:cNvPr id="32" name="Rounded Rectangle 31"/>
           <p:cNvSpPr/>
           <p:nvPr/>
         </p:nvSpPr>
@@ -24903,7 +26063,7 @@
       </p:sp>
       <p:sp>
         <p:nvSpPr>
-          <p:cNvPr id="29" name="Rectangle 28"/>
+          <p:cNvPr id="33" name="Rectangle 32"/>
           <p:cNvSpPr/>
           <p:nvPr/>
         </p:nvSpPr>
@@ -24949,7 +26109,7 @@
       </p:sp>
       <p:sp>
         <p:nvSpPr>
-          <p:cNvPr id="30" name="Oval 29"/>
+          <p:cNvPr id="34" name="Oval 33"/>
           <p:cNvSpPr/>
           <p:nvPr/>
         </p:nvSpPr>
@@ -25013,16 +26173,40 @@
           </a:p>
         </p:txBody>
       </p:sp>
-      <p:sp>
-        <p:nvSpPr>
-          <p:cNvPr id="31" name="TextBox 30"/>
+      <p:pic>
+        <p:nvPicPr>
+          <p:cNvPr id="35" name="Picture 34" descr="svc.png"/>
+          <p:cNvPicPr>
+            <a:picLocks noChangeAspect="1"/>
+          </p:cNvPicPr>
+          <p:nvPr/>
+        </p:nvPicPr>
+        <p:blipFill>
+          <a:blip r:embed="rId2"/>
+          <a:stretch>
+            <a:fillRect/>
+          </a:stretch>
+        </p:blipFill>
+        <p:spPr>
+          <a:xfrm>
+            <a:off x="7254666" y="4246000"/>
+            <a:ext cx="330000" cy="330000"/>
+          </a:xfrm>
+          <a:prstGeom prst="rect">
+            <a:avLst/>
+          </a:prstGeom>
+        </p:spPr>
+      </p:pic>
+      <p:sp>
+        <p:nvSpPr>
+          <p:cNvPr id="36" name="TextBox 35"/>
           <p:cNvSpPr txBox="1"/>
           <p:nvPr/>
         </p:nvSpPr>
         <p:spPr>
           <a:xfrm>
             <a:off x="5017333" y="4240000"/>
-            <a:ext cx="2747333" cy="340000"/>
+            <a:ext cx="2377333" cy="340000"/>
           </a:xfrm>
           <a:prstGeom prst="rect">
             <a:avLst/>
@@ -25061,7 +26245,7 @@
       </p:sp>
       <p:sp>
         <p:nvSpPr>
-          <p:cNvPr id="32" name="TextBox 31"/>
+          <p:cNvPr id="37" name="TextBox 36"/>
           <p:cNvSpPr txBox="1"/>
           <p:nvPr/>
         </p:nvSpPr>
@@ -25107,7 +26291,7 @@
       </p:sp>
       <p:sp>
         <p:nvSpPr>
-          <p:cNvPr id="33" name="Rounded Rectangle 32"/>
+          <p:cNvPr id="38" name="Rounded Rectangle 37"/>
           <p:cNvSpPr/>
           <p:nvPr/>
         </p:nvSpPr>
@@ -25157,7 +26341,7 @@
       </p:sp>
       <p:sp>
         <p:nvSpPr>
-          <p:cNvPr id="34" name="Rectangle 33"/>
+          <p:cNvPr id="39" name="Rectangle 38"/>
           <p:cNvSpPr/>
           <p:nvPr/>
         </p:nvSpPr>
@@ -25203,7 +26387,7 @@
       </p:sp>
       <p:sp>
         <p:nvSpPr>
-          <p:cNvPr id="35" name="Oval 34"/>
+          <p:cNvPr id="40" name="Oval 39"/>
           <p:cNvSpPr/>
           <p:nvPr/>
         </p:nvSpPr>
@@ -25269,14 +26453,130 @@
       </p:sp>
       <p:sp>
         <p:nvSpPr>
-          <p:cNvPr id="36" name="TextBox 35"/>
+          <p:cNvPr id="41" name="Oval 40"/>
+          <p:cNvSpPr/>
+          <p:nvPr/>
+        </p:nvSpPr>
+        <p:spPr>
+          <a:xfrm>
+            <a:off x="11078000" y="4279000"/>
+            <a:ext cx="198000" cy="198000"/>
+          </a:xfrm>
+          <a:prstGeom prst="ellipse">
+            <a:avLst/>
+          </a:prstGeom>
+          <a:noFill/>
+          <a:ln w="24130">
+            <a:solidFill>
+              <a:srgbClr val="74A6FF"/>
+            </a:solidFill>
+          </a:ln>
+          <a:effectLst/>
+        </p:spPr>
+        <p:style>
+          <a:lnRef idx="1">
+            <a:schemeClr val="accent1"/>
+          </a:lnRef>
+          <a:fillRef idx="3">
+            <a:schemeClr val="accent1"/>
+          </a:fillRef>
+          <a:effectRef idx="2">
+            <a:schemeClr val="accent1"/>
+          </a:effectRef>
+          <a:fontRef idx="minor">
+            <a:schemeClr val="lt1"/>
+          </a:fontRef>
+        </p:style>
+        <p:txBody>
+          <a:bodyPr rtlCol="0" anchor="ctr"/>
+          <a:lstStyle/>
+          <a:p>
+            <a:pPr algn="ctr"/>
+          </a:p>
+        </p:txBody>
+      </p:sp>
+      <p:cxnSp>
+        <p:nvCxnSpPr>
+          <p:cNvPr id="42" name="Connector 41"/>
+          <p:cNvCxnSpPr/>
+          <p:nvPr/>
+        </p:nvCxnSpPr>
+        <p:spPr>
+          <a:xfrm>
+            <a:off x="11144000" y="4490200"/>
+            <a:ext cx="66000" cy="0"/>
+          </a:xfrm>
+          <a:prstGeom prst="line">
+            <a:avLst/>
+          </a:prstGeom>
+          <a:ln w="24130">
+            <a:solidFill>
+              <a:srgbClr val="74A6FF"/>
+            </a:solidFill>
+          </a:ln>
+          <a:effectLst/>
+        </p:spPr>
+        <p:style>
+          <a:lnRef idx="2">
+            <a:schemeClr val="accent1"/>
+          </a:lnRef>
+          <a:fillRef idx="0">
+            <a:schemeClr val="accent1"/>
+          </a:fillRef>
+          <a:effectRef idx="1">
+            <a:schemeClr val="accent1"/>
+          </a:effectRef>
+          <a:fontRef idx="minor">
+            <a:schemeClr val="tx1"/>
+          </a:fontRef>
+        </p:style>
+      </p:cxnSp>
+      <p:cxnSp>
+        <p:nvCxnSpPr>
+          <p:cNvPr id="43" name="Connector 42"/>
+          <p:cNvCxnSpPr/>
+          <p:nvPr/>
+        </p:nvCxnSpPr>
+        <p:spPr>
+          <a:xfrm>
+            <a:off x="11150600" y="4529800"/>
+            <a:ext cx="52800" cy="0"/>
+          </a:xfrm>
+          <a:prstGeom prst="line">
+            <a:avLst/>
+          </a:prstGeom>
+          <a:ln w="24130">
+            <a:solidFill>
+              <a:srgbClr val="74A6FF"/>
+            </a:solidFill>
+          </a:ln>
+          <a:effectLst/>
+        </p:spPr>
+        <p:style>
+          <a:lnRef idx="2">
+            <a:schemeClr val="accent1"/>
+          </a:lnRef>
+          <a:fillRef idx="0">
+            <a:schemeClr val="accent1"/>
+          </a:fillRef>
+          <a:effectRef idx="1">
+            <a:schemeClr val="accent1"/>
+          </a:effectRef>
+          <a:fontRef idx="minor">
+            <a:schemeClr val="tx1"/>
+          </a:fontRef>
+        </p:style>
+      </p:cxnSp>
+      <p:sp>
+        <p:nvSpPr>
+          <p:cNvPr id="44" name="TextBox 43"/>
           <p:cNvSpPr txBox="1"/>
           <p:nvPr/>
         </p:nvSpPr>
         <p:spPr>
           <a:xfrm>
             <a:off x="8774666" y="4240000"/>
-            <a:ext cx="2747333" cy="340000"/>
+            <a:ext cx="2377333" cy="340000"/>
           </a:xfrm>
           <a:prstGeom prst="rect">
             <a:avLst/>
@@ -25315,7 +26615,7 @@
       </p:sp>
       <p:sp>
         <p:nvSpPr>
-          <p:cNvPr id="37" name="TextBox 36"/>
+          <p:cNvPr id="45" name="TextBox 44"/>
           <p:cNvSpPr txBox="1"/>
           <p:nvPr/>
         </p:nvSpPr>
@@ -25440,7 +26740,7 @@
         <p:spPr>
           <a:xfrm>
             <a:off x="620000" y="560000"/>
-            <a:ext cx="10952000" cy="620000"/>
+            <a:ext cx="10052000" cy="620000"/>
           </a:xfrm>
           <a:prstGeom prst="rect">
             <a:avLst/>
@@ -25661,9 +26961,33 @@
           </a:p>
         </p:txBody>
       </p:sp>
-      <p:sp>
-        <p:nvSpPr>
-          <p:cNvPr id="8" name="Oval 7"/>
+      <p:pic>
+        <p:nvPicPr>
+          <p:cNvPr id="8" name="Picture 7" descr="svc.png"/>
+          <p:cNvPicPr>
+            <a:picLocks noChangeAspect="1"/>
+          </p:cNvPicPr>
+          <p:nvPr/>
+        </p:nvPicPr>
+        <p:blipFill>
+          <a:blip r:embed="rId2"/>
+          <a:stretch>
+            <a:fillRect/>
+          </a:stretch>
+        </p:blipFill>
+        <p:spPr>
+          <a:xfrm>
+            <a:off x="10932000" y="275000"/>
+            <a:ext cx="640000" cy="640000"/>
+          </a:xfrm>
+          <a:prstGeom prst="rect">
+            <a:avLst/>
+          </a:prstGeom>
+        </p:spPr>
+      </p:pic>
+      <p:sp>
+        <p:nvSpPr>
+          <p:cNvPr id="9" name="Oval 8"/>
           <p:cNvSpPr/>
           <p:nvPr/>
         </p:nvSpPr>
@@ -25707,7 +27031,7 @@
       </p:sp>
       <p:sp>
         <p:nvSpPr>
-          <p:cNvPr id="9" name="TextBox 8"/>
+          <p:cNvPr id="10" name="TextBox 9"/>
           <p:cNvSpPr txBox="1"/>
           <p:nvPr/>
         </p:nvSpPr>
@@ -25753,7 +27077,7 @@
       </p:sp>
       <p:sp>
         <p:nvSpPr>
-          <p:cNvPr id="10" name="Oval 9"/>
+          <p:cNvPr id="11" name="Oval 10"/>
           <p:cNvSpPr/>
           <p:nvPr/>
         </p:nvSpPr>
@@ -25797,7 +27121,7 @@
       </p:sp>
       <p:sp>
         <p:nvSpPr>
-          <p:cNvPr id="11" name="TextBox 10"/>
+          <p:cNvPr id="12" name="TextBox 11"/>
           <p:cNvSpPr txBox="1"/>
           <p:nvPr/>
         </p:nvSpPr>
@@ -25843,7 +27167,7 @@
       </p:sp>
       <p:sp>
         <p:nvSpPr>
-          <p:cNvPr id="12" name="Oval 11"/>
+          <p:cNvPr id="13" name="Oval 12"/>
           <p:cNvSpPr/>
           <p:nvPr/>
         </p:nvSpPr>
@@ -25887,7 +27211,7 @@
       </p:sp>
       <p:sp>
         <p:nvSpPr>
-          <p:cNvPr id="13" name="TextBox 12"/>
+          <p:cNvPr id="14" name="TextBox 13"/>
           <p:cNvSpPr txBox="1"/>
           <p:nvPr/>
         </p:nvSpPr>
@@ -25933,7 +27257,7 @@
       </p:sp>
       <p:sp>
         <p:nvSpPr>
-          <p:cNvPr id="14" name="Oval 13"/>
+          <p:cNvPr id="15" name="Oval 14"/>
           <p:cNvSpPr/>
           <p:nvPr/>
         </p:nvSpPr>
@@ -25977,7 +27301,7 @@
       </p:sp>
       <p:sp>
         <p:nvSpPr>
-          <p:cNvPr id="15" name="TextBox 14"/>
+          <p:cNvPr id="16" name="TextBox 15"/>
           <p:cNvSpPr txBox="1"/>
           <p:nvPr/>
         </p:nvSpPr>
@@ -26023,7 +27347,7 @@
       </p:sp>
       <p:sp>
         <p:nvSpPr>
-          <p:cNvPr id="16" name="Rounded Rectangle 15"/>
+          <p:cNvPr id="17" name="Rounded Rectangle 16"/>
           <p:cNvSpPr/>
           <p:nvPr/>
         </p:nvSpPr>
@@ -26073,7 +27397,7 @@
       </p:sp>
       <p:sp>
         <p:nvSpPr>
-          <p:cNvPr id="17" name="Rectangle 16"/>
+          <p:cNvPr id="18" name="Rectangle 17"/>
           <p:cNvSpPr/>
           <p:nvPr/>
         </p:nvSpPr>
@@ -26119,7 +27443,7 @@
       </p:sp>
       <p:sp>
         <p:nvSpPr>
-          <p:cNvPr id="18" name="TextBox 17"/>
+          <p:cNvPr id="19" name="TextBox 18"/>
           <p:cNvSpPr txBox="1"/>
           <p:nvPr/>
         </p:nvSpPr>
@@ -26165,7 +27489,7 @@
       </p:sp>
       <p:sp>
         <p:nvSpPr>
-          <p:cNvPr id="19" name="Rectangle 18"/>
+          <p:cNvPr id="20" name="Rectangle 19"/>
           <p:cNvSpPr/>
           <p:nvPr/>
         </p:nvSpPr>
@@ -26211,7 +27535,7 @@
       </p:sp>
       <p:sp>
         <p:nvSpPr>
-          <p:cNvPr id="20" name="TextBox 19"/>
+          <p:cNvPr id="21" name="TextBox 20"/>
           <p:cNvSpPr txBox="1"/>
           <p:nvPr/>
         </p:nvSpPr>
@@ -27244,7 +28568,149 @@
       </p:sp>
       <p:sp>
         <p:nvSpPr>
-          <p:cNvPr id="16" name="Rounded Rectangle 15"/>
+          <p:cNvPr id="16" name="Freeform 15"/>
+          <p:cNvSpPr/>
+          <p:nvPr/>
+        </p:nvSpPr>
+        <p:spPr>
+          <a:xfrm>
+            <a:off x="9590000" y="1418800"/>
+            <a:ext cx="784000" cy="842800"/>
+          </a:xfrm>
+          <a:custGeom>
+            <a:avLst/>
+            <a:gdLst/>
+            <a:ahLst/>
+            <a:cxnLst/>
+            <a:rect l="l" t="t" r="r" b="b"/>
+            <a:pathLst>
+              <a:path w="784000" h="842800">
+                <a:moveTo>
+                  <a:pt x="235200" y="0"/>
+                </a:moveTo>
+                <a:lnTo>
+                  <a:pt x="235200" y="333200"/>
+                </a:lnTo>
+                <a:lnTo>
+                  <a:pt x="0" y="842800"/>
+                </a:lnTo>
+                <a:lnTo>
+                  <a:pt x="784000" y="842800"/>
+                </a:lnTo>
+                <a:lnTo>
+                  <a:pt x="548800" y="333200"/>
+                </a:lnTo>
+                <a:lnTo>
+                  <a:pt x="548800" y="0"/>
+                </a:lnTo>
+              </a:path>
+            </a:pathLst>
+          </a:custGeom>
+          <a:noFill/>
+          <a:ln w="33020">
+            <a:solidFill>
+              <a:srgbClr val="74A6FF"/>
+            </a:solidFill>
+          </a:ln>
+          <a:effectLst/>
+        </p:spPr>
+        <p:style>
+          <a:lnRef idx="1">
+            <a:schemeClr val="accent1"/>
+          </a:lnRef>
+          <a:fillRef idx="3">
+            <a:schemeClr val="accent1"/>
+          </a:fillRef>
+          <a:effectRef idx="2">
+            <a:schemeClr val="accent1"/>
+          </a:effectRef>
+          <a:fontRef idx="minor">
+            <a:schemeClr val="lt1"/>
+          </a:fontRef>
+        </p:style>
+        <p:txBody>
+          <a:bodyPr rtlCol="0" anchor="ctr"/>
+          <a:lstStyle/>
+          <a:p>
+            <a:pPr algn="ctr"/>
+          </a:p>
+        </p:txBody>
+      </p:sp>
+      <p:cxnSp>
+        <p:nvCxnSpPr>
+          <p:cNvPr id="17" name="Connector 16"/>
+          <p:cNvCxnSpPr/>
+          <p:nvPr/>
+        </p:nvCxnSpPr>
+        <p:spPr>
+          <a:xfrm>
+            <a:off x="9766400" y="1418800"/>
+            <a:ext cx="431200" cy="0"/>
+          </a:xfrm>
+          <a:prstGeom prst="line">
+            <a:avLst/>
+          </a:prstGeom>
+          <a:ln w="33020">
+            <a:solidFill>
+              <a:srgbClr val="74A6FF"/>
+            </a:solidFill>
+          </a:ln>
+          <a:effectLst/>
+        </p:spPr>
+        <p:style>
+          <a:lnRef idx="2">
+            <a:schemeClr val="accent1"/>
+          </a:lnRef>
+          <a:fillRef idx="0">
+            <a:schemeClr val="accent1"/>
+          </a:fillRef>
+          <a:effectRef idx="1">
+            <a:schemeClr val="accent1"/>
+          </a:effectRef>
+          <a:fontRef idx="minor">
+            <a:schemeClr val="tx1"/>
+          </a:fontRef>
+        </p:style>
+      </p:cxnSp>
+      <p:cxnSp>
+        <p:nvCxnSpPr>
+          <p:cNvPr id="18" name="Connector 17"/>
+          <p:cNvCxnSpPr/>
+          <p:nvPr/>
+        </p:nvCxnSpPr>
+        <p:spPr>
+          <a:xfrm>
+            <a:off x="9727200" y="2006800"/>
+            <a:ext cx="509600" cy="0"/>
+          </a:xfrm>
+          <a:prstGeom prst="line">
+            <a:avLst/>
+          </a:prstGeom>
+          <a:ln w="33020">
+            <a:solidFill>
+              <a:srgbClr val="74A6FF"/>
+            </a:solidFill>
+          </a:ln>
+          <a:effectLst/>
+        </p:spPr>
+        <p:style>
+          <a:lnRef idx="2">
+            <a:schemeClr val="accent1"/>
+          </a:lnRef>
+          <a:fillRef idx="0">
+            <a:schemeClr val="accent1"/>
+          </a:fillRef>
+          <a:effectRef idx="1">
+            <a:schemeClr val="accent1"/>
+          </a:effectRef>
+          <a:fontRef idx="minor">
+            <a:schemeClr val="tx1"/>
+          </a:fontRef>
+        </p:style>
+      </p:cxnSp>
+      <p:sp>
+        <p:nvSpPr>
+          <p:cNvPr id="19" name="Rounded Rectangle 18"/>
           <p:cNvSpPr/>
           <p:nvPr/>
         </p:nvSpPr>
@@ -27294,7 +28760,7 @@
       </p:sp>
       <p:sp>
         <p:nvSpPr>
-          <p:cNvPr id="17" name="Rectangle 16"/>
+          <p:cNvPr id="20" name="Rectangle 19"/>
           <p:cNvSpPr/>
           <p:nvPr/>
         </p:nvSpPr>
@@ -27340,7 +28806,7 @@
       </p:sp>
       <p:sp>
         <p:nvSpPr>
-          <p:cNvPr id="18" name="TextBox 17"/>
+          <p:cNvPr id="21" name="TextBox 20"/>
           <p:cNvSpPr txBox="1"/>
           <p:nvPr/>
         </p:nvSpPr>
@@ -27409,7 +28875,7 @@
       </p:sp>
       <p:sp>
         <p:nvSpPr>
-          <p:cNvPr id="19" name="Rectangle 18"/>
+          <p:cNvPr id="22" name="Rectangle 21"/>
           <p:cNvSpPr/>
           <p:nvPr/>
         </p:nvSpPr>
@@ -27455,7 +28921,7 @@
       </p:sp>
       <p:sp>
         <p:nvSpPr>
-          <p:cNvPr id="20" name="TextBox 19"/>
+          <p:cNvPr id="23" name="TextBox 22"/>
           <p:cNvSpPr txBox="1"/>
           <p:nvPr/>
         </p:nvSpPr>
@@ -27524,7 +28990,7 @@
       </p:sp>
       <p:sp>
         <p:nvSpPr>
-          <p:cNvPr id="21" name="Rectangle 20"/>
+          <p:cNvPr id="24" name="Rectangle 23"/>
           <p:cNvSpPr/>
           <p:nvPr/>
         </p:nvSpPr>
@@ -27570,7 +29036,7 @@
       </p:sp>
       <p:sp>
         <p:nvSpPr>
-          <p:cNvPr id="22" name="TextBox 21"/>
+          <p:cNvPr id="25" name="TextBox 24"/>
           <p:cNvSpPr txBox="1"/>
           <p:nvPr/>
         </p:nvSpPr>
@@ -27639,7 +29105,7 @@
       </p:sp>
       <p:sp>
         <p:nvSpPr>
-          <p:cNvPr id="23" name="Rectangle 22"/>
+          <p:cNvPr id="26" name="Rectangle 25"/>
           <p:cNvSpPr/>
           <p:nvPr/>
         </p:nvSpPr>
@@ -27685,7 +29151,7 @@
       </p:sp>
       <p:sp>
         <p:nvSpPr>
-          <p:cNvPr id="24" name="TextBox 23"/>
+          <p:cNvPr id="27" name="TextBox 26"/>
           <p:cNvSpPr txBox="1"/>
           <p:nvPr/>
         </p:nvSpPr>
@@ -27731,7 +29197,7 @@
       </p:sp>
       <p:sp>
         <p:nvSpPr>
-          <p:cNvPr id="25" name="TextBox 24"/>
+          <p:cNvPr id="28" name="TextBox 27"/>
           <p:cNvSpPr txBox="1"/>
           <p:nvPr/>
         </p:nvSpPr>
@@ -27845,80 +29311,30 @@
           </a:p>
         </p:txBody>
       </p:sp>
-      <p:sp>
-        <p:nvSpPr>
-          <p:cNvPr id="3" name="Freeform 2"/>
-          <p:cNvSpPr/>
-          <p:nvPr/>
-        </p:nvSpPr>
-        <p:spPr>
-          <a:xfrm>
-            <a:off x="9479608" y="4208000"/>
-            <a:ext cx="2924783" cy="2851453"/>
-          </a:xfrm>
-          <a:custGeom>
-            <a:avLst/>
-            <a:gdLst/>
-            <a:ahLst/>
-            <a:cxnLst/>
-            <a:rect l="l" t="t" r="r" b="b"/>
-            <a:pathLst>
-              <a:path w="2924783" h="2851453">
-                <a:moveTo>
-                  <a:pt x="1462392" y="0"/>
-                </a:moveTo>
-                <a:lnTo>
-                  <a:pt x="2635139" y="564765"/>
-                </a:lnTo>
-                <a:lnTo>
-                  <a:pt x="2924783" y="1833781"/>
-                </a:lnTo>
-                <a:lnTo>
-                  <a:pt x="2113217" y="2851453"/>
-                </a:lnTo>
-                <a:lnTo>
-                  <a:pt x="811566" y="2851453"/>
-                </a:lnTo>
-                <a:lnTo>
-                  <a:pt x="0" y="1833781"/>
-                </a:lnTo>
-                <a:lnTo>
-                  <a:pt x="289644" y="564765"/>
-                </a:lnTo>
-                <a:close/>
-              </a:path>
-            </a:pathLst>
-          </a:custGeom>
-          <a:noFill/>
-          <a:ln w="31750">
-            <a:solidFill>
-              <a:srgbClr val="26354E"/>
-            </a:solidFill>
-          </a:ln>
-          <a:effectLst/>
-        </p:spPr>
-        <p:style>
-          <a:lnRef idx="1">
-            <a:schemeClr val="accent1"/>
-          </a:lnRef>
-          <a:fillRef idx="3">
-            <a:schemeClr val="accent1"/>
-          </a:fillRef>
-          <a:effectRef idx="2">
-            <a:schemeClr val="accent1"/>
-          </a:effectRef>
-          <a:fontRef idx="minor">
-            <a:schemeClr val="lt1"/>
-          </a:fontRef>
-        </p:style>
-        <p:txBody>
-          <a:bodyPr rtlCol="0" anchor="ctr"/>
-          <a:lstStyle/>
-          <a:p>
-            <a:pPr algn="ctr"/>
-          </a:p>
-        </p:txBody>
-      </p:sp>
+      <p:pic>
+        <p:nvPicPr>
+          <p:cNvPr id="3" name="Picture 2" descr="ing.png"/>
+          <p:cNvPicPr>
+            <a:picLocks noChangeAspect="1"/>
+          </p:cNvPicPr>
+          <p:nvPr/>
+        </p:nvPicPr>
+        <p:blipFill>
+          <a:blip r:embed="rId2"/>
+          <a:stretch>
+            <a:fillRect/>
+          </a:stretch>
+        </p:blipFill>
+        <p:spPr>
+          <a:xfrm>
+            <a:off x="8842000" y="2150000"/>
+            <a:ext cx="1800000" cy="1800000"/>
+          </a:xfrm>
+          <a:prstGeom prst="rect">
+            <a:avLst/>
+          </a:prstGeom>
+        </p:spPr>
+      </p:pic>
       <p:sp>
         <p:nvSpPr>
           <p:cNvPr id="4" name="TextBox 3"/>

--- a/CLASE-05/01-CLASE-05-CKA.pptx
+++ b/CLASE-05/01-CLASE-05-CKA.pptx
@@ -4454,8 +4454,8 @@
         </p:nvSpPr>
         <p:spPr>
           <a:xfrm>
-            <a:off x="620000" y="1830000"/>
-            <a:ext cx="2022400" cy="760000"/>
+            <a:off x="620000" y="1670000"/>
+            <a:ext cx="2022400" cy="700000"/>
           </a:xfrm>
           <a:prstGeom prst="roundRect">
             <a:avLst>
@@ -4504,8 +4504,8 @@
         </p:nvSpPr>
         <p:spPr>
           <a:xfrm>
-            <a:off x="690000" y="1830000"/>
-            <a:ext cx="1882400" cy="760000"/>
+            <a:off x="690000" y="1670000"/>
+            <a:ext cx="1882400" cy="700000"/>
           </a:xfrm>
           <a:prstGeom prst="rect">
             <a:avLst/>
@@ -4550,7 +4550,7 @@
         </p:nvCxnSpPr>
         <p:spPr>
           <a:xfrm>
-            <a:off x="2666400" y="2210000"/>
+            <a:off x="2666400" y="2020000"/>
             <a:ext cx="162000" cy="0"/>
           </a:xfrm>
           <a:prstGeom prst="line">
@@ -4587,8 +4587,8 @@
         </p:nvSpPr>
         <p:spPr>
           <a:xfrm>
-            <a:off x="2852400" y="1830000"/>
-            <a:ext cx="2022400" cy="760000"/>
+            <a:off x="2852400" y="1670000"/>
+            <a:ext cx="2022400" cy="700000"/>
           </a:xfrm>
           <a:prstGeom prst="roundRect">
             <a:avLst>
@@ -4637,8 +4637,8 @@
         </p:nvSpPr>
         <p:spPr>
           <a:xfrm>
-            <a:off x="2922400" y="1830000"/>
-            <a:ext cx="1882400" cy="760000"/>
+            <a:off x="2922400" y="1670000"/>
+            <a:ext cx="1882400" cy="700000"/>
           </a:xfrm>
           <a:prstGeom prst="rect">
             <a:avLst/>
@@ -4683,7 +4683,7 @@
         </p:nvCxnSpPr>
         <p:spPr>
           <a:xfrm>
-            <a:off x="4898800" y="2210000"/>
+            <a:off x="4898800" y="2020000"/>
             <a:ext cx="162000" cy="0"/>
           </a:xfrm>
           <a:prstGeom prst="line">
@@ -4720,8 +4720,8 @@
         </p:nvSpPr>
         <p:spPr>
           <a:xfrm>
-            <a:off x="5084800" y="1830000"/>
-            <a:ext cx="2022400" cy="760000"/>
+            <a:off x="5084800" y="1670000"/>
+            <a:ext cx="2022400" cy="700000"/>
           </a:xfrm>
           <a:prstGeom prst="roundRect">
             <a:avLst>
@@ -4770,8 +4770,8 @@
         </p:nvSpPr>
         <p:spPr>
           <a:xfrm>
-            <a:off x="5154800" y="1830000"/>
-            <a:ext cx="1882400" cy="760000"/>
+            <a:off x="5154800" y="1670000"/>
+            <a:ext cx="1882400" cy="700000"/>
           </a:xfrm>
           <a:prstGeom prst="rect">
             <a:avLst/>
@@ -4816,7 +4816,7 @@
         </p:nvCxnSpPr>
         <p:spPr>
           <a:xfrm>
-            <a:off x="7131200" y="2210000"/>
+            <a:off x="7131200" y="2020000"/>
             <a:ext cx="162000" cy="0"/>
           </a:xfrm>
           <a:prstGeom prst="line">
@@ -4853,8 +4853,8 @@
         </p:nvSpPr>
         <p:spPr>
           <a:xfrm>
-            <a:off x="7317200" y="1830000"/>
-            <a:ext cx="2022400" cy="760000"/>
+            <a:off x="7317200" y="1670000"/>
+            <a:ext cx="2022400" cy="700000"/>
           </a:xfrm>
           <a:prstGeom prst="roundRect">
             <a:avLst>
@@ -4903,8 +4903,8 @@
         </p:nvSpPr>
         <p:spPr>
           <a:xfrm>
-            <a:off x="7387200" y="1830000"/>
-            <a:ext cx="1882400" cy="760000"/>
+            <a:off x="7387200" y="1670000"/>
+            <a:ext cx="1882400" cy="700000"/>
           </a:xfrm>
           <a:prstGeom prst="rect">
             <a:avLst/>
@@ -4949,7 +4949,7 @@
         </p:nvCxnSpPr>
         <p:spPr>
           <a:xfrm>
-            <a:off x="9363600" y="2210000"/>
+            <a:off x="9363600" y="2020000"/>
             <a:ext cx="162000" cy="0"/>
           </a:xfrm>
           <a:prstGeom prst="line">
@@ -4986,8 +4986,8 @@
         </p:nvSpPr>
         <p:spPr>
           <a:xfrm>
-            <a:off x="9549600" y="1830000"/>
-            <a:ext cx="2022400" cy="760000"/>
+            <a:off x="9549600" y="1670000"/>
+            <a:ext cx="2022400" cy="700000"/>
           </a:xfrm>
           <a:prstGeom prst="roundRect">
             <a:avLst>
@@ -5036,8 +5036,8 @@
         </p:nvSpPr>
         <p:spPr>
           <a:xfrm>
-            <a:off x="9619600" y="1830000"/>
-            <a:ext cx="1882400" cy="760000"/>
+            <a:off x="9619600" y="1670000"/>
+            <a:ext cx="1882400" cy="700000"/>
           </a:xfrm>
           <a:prstGeom prst="rect">
             <a:avLst/>
@@ -5082,12 +5082,12 @@
         </p:nvSpPr>
         <p:spPr>
           <a:xfrm>
-            <a:off x="620000" y="2950000"/>
-            <a:ext cx="10952000" cy="2070000"/>
+            <a:off x="620000" y="2670000"/>
+            <a:ext cx="10952000" cy="3610000"/>
           </a:xfrm>
           <a:prstGeom prst="roundRect">
             <a:avLst>
-              <a:gd name="adj" fmla="val 6000"/>
+              <a:gd name="adj" fmla="val 4500"/>
             </a:avLst>
           </a:prstGeom>
           <a:solidFill>
@@ -5132,8 +5132,8 @@
         </p:nvSpPr>
         <p:spPr>
           <a:xfrm>
-            <a:off x="650000" y="2974000"/>
-            <a:ext cx="40000" cy="2022000"/>
+            <a:off x="646000" y="2692000"/>
+            <a:ext cx="40000" cy="3566000"/>
           </a:xfrm>
           <a:prstGeom prst="rect">
             <a:avLst/>
@@ -5178,8 +5178,8 @@
         </p:nvSpPr>
         <p:spPr>
           <a:xfrm>
-            <a:off x="880000" y="3190000"/>
-            <a:ext cx="10432000" cy="1670000"/>
+            <a:off x="860000" y="2800000"/>
+            <a:ext cx="10522000" cy="3350000"/>
           </a:xfrm>
           <a:prstGeom prst="rect">
             <a:avLst/>
@@ -5200,14 +5200,14 @@
                 <a:spcPts val="0"/>
               </a:spcBef>
               <a:spcAft>
-                <a:spcPts val="1200"/>
-              </a:spcAft>
-              <a:buNone/>
-            </a:pPr>
-            <a:r>
-              <a:rPr sz="1000" b="1" i="0" spc="180">
-                <a:solidFill>
-                  <a:srgbClr val="74A6FF"/>
+                <a:spcPts val="600"/>
+              </a:spcAft>
+              <a:buNone/>
+            </a:pPr>
+            <a:r>
+              <a:rPr sz="900" b="1" i="0" spc="200">
+                <a:solidFill>
+                  <a:srgbClr val="326CE5"/>
                 </a:solidFill>
                 <a:latin typeface="Segoe UI Semibold"/>
               </a:rPr>
@@ -5215,18 +5215,17 @@
             </a:r>
           </a:p>
           <a:p>
-            <a:pPr algn="l" marL="182880" indent="-182880">
-              <a:lnSpc>
-                <a:spcPct val="120000"/>
-              </a:lnSpc>
-              <a:spcBef>
-                <a:spcPts val="0"/>
-              </a:spcBef>
-              <a:spcAft>
-                <a:spcPts val="700"/>
-              </a:spcAft>
-              <a:buFont typeface="Arial"/>
-              <a:buChar char="•"/>
+            <a:pPr algn="l" marL="0" indent="0">
+              <a:lnSpc>
+                <a:spcPct val="128000"/>
+              </a:lnSpc>
+              <a:spcBef>
+                <a:spcPts val="0"/>
+              </a:spcBef>
+              <a:spcAft>
+                <a:spcPts val="400"/>
+              </a:spcAft>
+              <a:buNone/>
             </a:pPr>
             <a:r>
               <a:rPr sz="1100" b="0" i="0">
@@ -5235,22 +5234,21 @@
                 </a:solidFill>
                 <a:latin typeface="Segoe UI"/>
               </a:rPr>
-              <a:t>El objeto Ingress es solo una declaración. Sin un controlador que la lea, no hace absolutamente nada.</a:t>
-            </a:r>
-          </a:p>
-          <a:p>
-            <a:pPr algn="l" marL="182880" indent="-182880">
-              <a:lnSpc>
-                <a:spcPct val="120000"/>
-              </a:lnSpc>
-              <a:spcBef>
-                <a:spcPts val="0"/>
-              </a:spcBef>
-              <a:spcAft>
-                <a:spcPts val="700"/>
-              </a:spcAft>
-              <a:buFont typeface="Arial"/>
-              <a:buChar char="•"/>
+              <a:t>El objeto Ingress es SOLO una declaración de reglas de routing HTTP (por host y por path) y de qué Secret TLS usar. Por sí mismo no hace nada: necesita un Ingress Controller —un proxy de nivel 7 como Traefik, HAProxy o Contour— que lea esos objetos y configure el reenvío real. Si no hay controlador, el Ingress se queda sin ADDRESS y no pasa nada.</a:t>
+            </a:r>
+          </a:p>
+          <a:p>
+            <a:pPr algn="l" marL="0" indent="0">
+              <a:lnSpc>
+                <a:spcPct val="128000"/>
+              </a:lnSpc>
+              <a:spcBef>
+                <a:spcPts val="0"/>
+              </a:spcBef>
+              <a:spcAft>
+                <a:spcPts val="400"/>
+              </a:spcAft>
+              <a:buNone/>
             </a:pPr>
             <a:r>
               <a:rPr sz="1100" b="0" i="0">
@@ -5259,22 +5257,21 @@
                 </a:solidFill>
                 <a:latin typeface="Segoe UI"/>
               </a:rPr>
-              <a:t>El controlador termina el TLS en el borde: del controlador al Pod el tráfico va en claro.</a:t>
-            </a:r>
-          </a:p>
-          <a:p>
-            <a:pPr algn="l" marL="182880" indent="-182880">
-              <a:lnSpc>
-                <a:spcPct val="120000"/>
-              </a:lnSpc>
-              <a:spcBef>
-                <a:spcPts val="0"/>
-              </a:spcBef>
-              <a:spcAft>
-                <a:spcPts val="700"/>
-              </a:spcAft>
-              <a:buFont typeface="Arial"/>
-              <a:buChar char="•"/>
+              <a:t>El controlador termina el TLS en el borde: descifra la conexión del cliente y, del controlador al Pod, el tráfico va en claro dentro del cluster. El Secret de tipo kubernetes.io/tls debe estar en el MISMO namespace que el objeto Ingress.</a:t>
+            </a:r>
+          </a:p>
+          <a:p>
+            <a:pPr algn="l" marL="0" indent="0">
+              <a:lnSpc>
+                <a:spcPct val="128000"/>
+              </a:lnSpc>
+              <a:spcBef>
+                <a:spcPts val="0"/>
+              </a:spcBef>
+              <a:spcAft>
+                <a:spcPts val="400"/>
+              </a:spcAft>
+              <a:buNone/>
             </a:pPr>
             <a:r>
               <a:rPr sz="1100" b="0" i="0">
@@ -5283,55 +5280,7 @@
                 </a:solidFill>
                 <a:latin typeface="Segoe UI"/>
               </a:rPr>
-              <a:t>El Secret TLS debe estar en el MISMO namespace que el Ingress.</a:t>
-            </a:r>
-          </a:p>
-          <a:p>
-            <a:pPr algn="l" marL="182880" indent="-182880">
-              <a:lnSpc>
-                <a:spcPct val="120000"/>
-              </a:lnSpc>
-              <a:spcBef>
-                <a:spcPts val="0"/>
-              </a:spcBef>
-              <a:spcAft>
-                <a:spcPts val="700"/>
-              </a:spcAft>
-              <a:buFont typeface="Arial"/>
-              <a:buChar char="•"/>
-            </a:pPr>
-            <a:r>
-              <a:rPr sz="1100" b="0" i="0">
-                <a:solidFill>
-                  <a:srgbClr val="BDC9DB"/>
-                </a:solidFill>
-                <a:latin typeface="Segoe UI"/>
-              </a:rPr>
-              <a:t>Si ingressClassName no coincide con ninguna IngressClass registrada, nadie adopta el Ingress: ADDRESS queda vacío y no hay ningún error.</a:t>
-            </a:r>
-          </a:p>
-          <a:p>
-            <a:pPr algn="l" marL="182880" indent="-182880">
-              <a:lnSpc>
-                <a:spcPct val="120000"/>
-              </a:lnSpc>
-              <a:spcBef>
-                <a:spcPts val="0"/>
-              </a:spcBef>
-              <a:spcAft>
-                <a:spcPts val="700"/>
-              </a:spcAft>
-              <a:buFont typeface="Arial"/>
-              <a:buChar char="•"/>
-            </a:pPr>
-            <a:r>
-              <a:rPr sz="1100" b="0" i="0">
-                <a:solidFill>
-                  <a:srgbClr val="BDC9DB"/>
-                </a:solidFill>
-                <a:latin typeface="Segoe UI"/>
-              </a:rPr>
-              <a:t>Verifica los Services ANTES de crear el Ingress. Si no tienen endpoints, verás 503 y buscarás en el sitio equivocado.</a:t>
+              <a:t>Dos fallos silenciosos habituales. Si ingressClassName no coincide con ninguna IngressClass registrada, ningún controlador adopta el Ingress y no hay ningún error. Y si los Services de backend no tienen endpoints, verás errores 503 y buscarás el problema en el Ingress cuando está en los Pods: por eso se verifican los Services ANTES de crear el Ingress.</a:t>
             </a:r>
           </a:p>
         </p:txBody>
@@ -6423,8 +6372,8 @@
         </p:nvSpPr>
         <p:spPr>
           <a:xfrm>
-            <a:off x="620000" y="2061000"/>
-            <a:ext cx="5316000" cy="3058000"/>
+            <a:off x="620000" y="1470000"/>
+            <a:ext cx="5316000" cy="2670000"/>
           </a:xfrm>
           <a:prstGeom prst="roundRect">
             <a:avLst>
@@ -6473,7 +6422,7 @@
         </p:nvSpPr>
         <p:spPr>
           <a:xfrm>
-            <a:off x="644000" y="2061000"/>
+            <a:off x="644000" y="1470000"/>
             <a:ext cx="5268000" cy="46000"/>
           </a:xfrm>
           <a:prstGeom prst="rect">
@@ -6519,7 +6468,7 @@
         </p:nvSpPr>
         <p:spPr>
           <a:xfrm>
-            <a:off x="880000" y="2321000"/>
+            <a:off x="880000" y="1730000"/>
             <a:ext cx="4796000" cy="570000"/>
           </a:xfrm>
           <a:prstGeom prst="rect">
@@ -6588,8 +6537,8 @@
         </p:nvSpPr>
         <p:spPr>
           <a:xfrm>
-            <a:off x="880000" y="2891000"/>
-            <a:ext cx="4796000" cy="2048000"/>
+            <a:off x="880000" y="2300000"/>
+            <a:ext cx="4796000" cy="1660000"/>
           </a:xfrm>
           <a:prstGeom prst="rect">
             <a:avLst/>
@@ -6708,8 +6657,8 @@
         </p:nvSpPr>
         <p:spPr>
           <a:xfrm>
-            <a:off x="6256000" y="2061000"/>
-            <a:ext cx="5316000" cy="3058000"/>
+            <a:off x="6256000" y="1470000"/>
+            <a:ext cx="5316000" cy="2670000"/>
           </a:xfrm>
           <a:prstGeom prst="roundRect">
             <a:avLst>
@@ -6758,7 +6707,7 @@
         </p:nvSpPr>
         <p:spPr>
           <a:xfrm>
-            <a:off x="6280000" y="2061000"/>
+            <a:off x="6280000" y="1470000"/>
             <a:ext cx="5268000" cy="46000"/>
           </a:xfrm>
           <a:prstGeom prst="rect">
@@ -6804,7 +6753,7 @@
         </p:nvSpPr>
         <p:spPr>
           <a:xfrm>
-            <a:off x="6516000" y="2321000"/>
+            <a:off x="6516000" y="1730000"/>
             <a:ext cx="4796000" cy="570000"/>
           </a:xfrm>
           <a:prstGeom prst="rect">
@@ -6873,8 +6822,8 @@
         </p:nvSpPr>
         <p:spPr>
           <a:xfrm>
-            <a:off x="6516000" y="2891000"/>
-            <a:ext cx="4796000" cy="2048000"/>
+            <a:off x="6516000" y="2300000"/>
+            <a:ext cx="4796000" cy="1660000"/>
           </a:xfrm>
           <a:prstGeom prst="rect">
             <a:avLst/>
@@ -6993,12 +6942,12 @@
         </p:nvSpPr>
         <p:spPr>
           <a:xfrm>
-            <a:off x="620000" y="5860000"/>
-            <a:ext cx="10952000" cy="470000"/>
+            <a:off x="620000" y="4310000"/>
+            <a:ext cx="10952000" cy="2000000"/>
           </a:xfrm>
           <a:prstGeom prst="roundRect">
             <a:avLst>
-              <a:gd name="adj" fmla="val 10000"/>
+              <a:gd name="adj" fmla="val 4500"/>
             </a:avLst>
           </a:prstGeom>
           <a:solidFill>
@@ -7043,8 +6992,8 @@
         </p:nvSpPr>
         <p:spPr>
           <a:xfrm>
-            <a:off x="650000" y="5884000"/>
-            <a:ext cx="40000" cy="422000"/>
+            <a:off x="646000" y="4332000"/>
+            <a:ext cx="40000" cy="1956000"/>
           </a:xfrm>
           <a:prstGeom prst="rect">
             <a:avLst/>
@@ -7089,8 +7038,8 @@
         </p:nvSpPr>
         <p:spPr>
           <a:xfrm>
-            <a:off x="860000" y="5860000"/>
-            <a:ext cx="10482000" cy="470000"/>
+            <a:off x="860000" y="4440000"/>
+            <a:ext cx="10522000" cy="1740000"/>
           </a:xfrm>
           <a:prstGeom prst="rect">
             <a:avLst/>
@@ -7098,31 +7047,100 @@
           <a:noFill/>
         </p:spPr>
         <p:txBody>
-          <a:bodyPr wrap="square" anchor="ctr" lIns="0" rIns="0" tIns="0" bIns="0">
+          <a:bodyPr wrap="square" anchor="t" lIns="0" rIns="0" tIns="0" bIns="0">
             <a:noAutofit/>
           </a:bodyPr>
           <a:lstStyle/>
           <a:p>
             <a:pPr algn="l" marL="0" indent="0">
               <a:lnSpc>
-                <a:spcPct val="116000"/>
-              </a:lnSpc>
-              <a:spcBef>
-                <a:spcPts val="0"/>
-              </a:spcBef>
-              <a:spcAft>
-                <a:spcPts val="0"/>
-              </a:spcAft>
-              <a:buNone/>
-            </a:pPr>
-            <a:r>
-              <a:rPr sz="1100" b="0" i="1">
+                <a:spcPct val="100000"/>
+              </a:lnSpc>
+              <a:spcBef>
+                <a:spcPts val="0"/>
+              </a:spcBef>
+              <a:spcAft>
+                <a:spcPts val="600"/>
+              </a:spcAft>
+              <a:buNone/>
+            </a:pPr>
+            <a:r>
+              <a:rPr sz="900" b="1" i="0" spc="200">
+                <a:solidFill>
+                  <a:srgbClr val="326CE5"/>
+                </a:solidFill>
+                <a:latin typeface="Segoe UI Semibold"/>
+              </a:rPr>
+              <a:t>TEORÍA</a:t>
+            </a:r>
+          </a:p>
+          <a:p>
+            <a:pPr algn="l" marL="0" indent="0">
+              <a:lnSpc>
+                <a:spcPct val="128000"/>
+              </a:lnSpc>
+              <a:spcBef>
+                <a:spcPts val="0"/>
+              </a:spcBef>
+              <a:spcAft>
+                <a:spcPts val="400"/>
+              </a:spcAft>
+              <a:buNone/>
+            </a:pPr>
+            <a:r>
+              <a:rPr sz="1000" b="0" i="0">
                 <a:solidFill>
                   <a:srgbClr val="BDC9DB"/>
                 </a:solidFill>
                 <a:latin typeface="Segoe UI"/>
               </a:rPr>
-              <a:t>Manifiesto de referencia con el mismo routing expresado en Gateway API: CLASE-05/RECURSOS/YAML/04-gateway-api.yaml</a:t>
+              <a:t>Ingress resuelve todo con un único objeto: reglas, TLS y cualquier ajuste avanzado. El problema es que la API base es muy limitada, así que cada controlador añadió sus propias anotaciones propietarias para reescrituras, timeouts, autenticación, etc. Esas anotaciones NO son portables entre controladores, y esa fragmentación se volvió una carga de mantenimiento y un riesgo de seguridad. Aun así, Ingress sigue siendo estándar, está ampliamente desplegado y es lo que se pide hoy en el examen.</a:t>
+            </a:r>
+          </a:p>
+          <a:p>
+            <a:pPr algn="l" marL="0" indent="0">
+              <a:lnSpc>
+                <a:spcPct val="128000"/>
+              </a:lnSpc>
+              <a:spcBef>
+                <a:spcPts val="0"/>
+              </a:spcBef>
+              <a:spcAft>
+                <a:spcPts val="400"/>
+              </a:spcAft>
+              <a:buNone/>
+            </a:pPr>
+            <a:r>
+              <a:rPr sz="1000" b="0" i="0">
+                <a:solidFill>
+                  <a:srgbClr val="BDC9DB"/>
+                </a:solidFill>
+                <a:latin typeface="Segoe UI"/>
+              </a:rPr>
+              <a:t>Gateway API es el sucesor. Reparte la responsabilidad en tres objetos con dueños distintos: GatewayClass (lo define el proveedor de la infraestructura), Gateway (lo gestiona el equipo de plataforma: puertos, TLS) y HTTPRoute (lo gestiona cada equipo de aplicación: sus rutas). Sustituye las anotaciones por filtros tipados y estándar —URLRewrite, RequestHeaderModifier—, y controla las referencias entre namespaces con ReferenceGrant.</a:t>
+            </a:r>
+          </a:p>
+          <a:p>
+            <a:pPr algn="l" marL="0" indent="0">
+              <a:lnSpc>
+                <a:spcPct val="128000"/>
+              </a:lnSpc>
+              <a:spcBef>
+                <a:spcPts val="0"/>
+              </a:spcBef>
+              <a:spcAft>
+                <a:spcPts val="400"/>
+              </a:spcAft>
+              <a:buNone/>
+            </a:pPr>
+            <a:r>
+              <a:rPr sz="1000" b="0" i="0">
+                <a:solidFill>
+                  <a:srgbClr val="BDC9DB"/>
+                </a:solidFill>
+                <a:latin typeface="Segoe UI"/>
+              </a:rPr>
+              <a:t>Gateway API ya figura en el currículum CKA vigente y es la dirección recomendada por el proyecto, sobre todo tras la retirada de ingress-nginx. En este curso se practica Ingress y se presenta Gateway API con un manifiesto de referencia equivalente.</a:t>
             </a:r>
           </a:p>
         </p:txBody>
@@ -10382,7 +10400,7 @@
         </p:nvSpPr>
         <p:spPr>
           <a:xfrm>
-            <a:off x="636000" y="2428000"/>
+            <a:off x="636000" y="1751750"/>
             <a:ext cx="104000" cy="104000"/>
           </a:xfrm>
           <a:prstGeom prst="ellipse">
@@ -10426,8 +10444,8 @@
         </p:nvSpPr>
         <p:spPr>
           <a:xfrm>
-            <a:off x="880000" y="2010000"/>
-            <a:ext cx="5435040" cy="940000"/>
+            <a:off x="880000" y="1470000"/>
+            <a:ext cx="5435040" cy="667500"/>
           </a:xfrm>
           <a:prstGeom prst="rect">
             <a:avLst/>
@@ -10472,7 +10490,7 @@
         </p:nvSpPr>
         <p:spPr>
           <a:xfrm>
-            <a:off x="636000" y="3368000"/>
+            <a:off x="636000" y="2419250"/>
             <a:ext cx="104000" cy="104000"/>
           </a:xfrm>
           <a:prstGeom prst="ellipse">
@@ -10516,8 +10534,8 @@
         </p:nvSpPr>
         <p:spPr>
           <a:xfrm>
-            <a:off x="880000" y="2950000"/>
-            <a:ext cx="5435040" cy="940000"/>
+            <a:off x="880000" y="2137500"/>
+            <a:ext cx="5435040" cy="667500"/>
           </a:xfrm>
           <a:prstGeom prst="rect">
             <a:avLst/>
@@ -10562,7 +10580,7 @@
         </p:nvSpPr>
         <p:spPr>
           <a:xfrm>
-            <a:off x="636000" y="4308000"/>
+            <a:off x="636000" y="3086750"/>
             <a:ext cx="104000" cy="104000"/>
           </a:xfrm>
           <a:prstGeom prst="ellipse">
@@ -10606,8 +10624,8 @@
         </p:nvSpPr>
         <p:spPr>
           <a:xfrm>
-            <a:off x="880000" y="3890000"/>
-            <a:ext cx="5435040" cy="940000"/>
+            <a:off x="880000" y="2805000"/>
+            <a:ext cx="5435040" cy="667500"/>
           </a:xfrm>
           <a:prstGeom prst="rect">
             <a:avLst/>
@@ -10652,7 +10670,7 @@
         </p:nvSpPr>
         <p:spPr>
           <a:xfrm>
-            <a:off x="636000" y="5248000"/>
+            <a:off x="636000" y="3754250"/>
             <a:ext cx="104000" cy="104000"/>
           </a:xfrm>
           <a:prstGeom prst="ellipse">
@@ -10696,8 +10714,8 @@
         </p:nvSpPr>
         <p:spPr>
           <a:xfrm>
-            <a:off x="880000" y="4830000"/>
-            <a:ext cx="5435040" cy="940000"/>
+            <a:off x="880000" y="3472500"/>
+            <a:ext cx="5435040" cy="667500"/>
           </a:xfrm>
           <a:prstGeom prst="rect">
             <a:avLst/>
@@ -10742,8 +10760,8 @@
         </p:nvSpPr>
         <p:spPr>
           <a:xfrm>
-            <a:off x="6635040" y="2010000"/>
-            <a:ext cx="4936960" cy="3760000"/>
+            <a:off x="6635040" y="1470000"/>
+            <a:ext cx="4936960" cy="2670000"/>
           </a:xfrm>
           <a:prstGeom prst="roundRect">
             <a:avLst>
@@ -10792,8 +10810,8 @@
         </p:nvSpPr>
         <p:spPr>
           <a:xfrm>
-            <a:off x="6635040" y="2310000"/>
-            <a:ext cx="46000" cy="3460000"/>
+            <a:off x="6635040" y="1770000"/>
+            <a:ext cx="46000" cy="2370000"/>
           </a:xfrm>
           <a:prstGeom prst="rect">
             <a:avLst/>
@@ -10838,7 +10856,7 @@
         </p:nvSpPr>
         <p:spPr>
           <a:xfrm>
-            <a:off x="6825040" y="2070000"/>
+            <a:off x="6825040" y="1530000"/>
             <a:ext cx="4556960" cy="260000"/>
           </a:xfrm>
           <a:prstGeom prst="rect">
@@ -10884,7 +10902,7 @@
         </p:nvSpPr>
         <p:spPr>
           <a:xfrm>
-            <a:off x="6825040" y="2304000"/>
+            <a:off x="6825040" y="1764000"/>
             <a:ext cx="4556960" cy="10000"/>
           </a:xfrm>
           <a:prstGeom prst="rect">
@@ -10930,8 +10948,8 @@
         </p:nvSpPr>
         <p:spPr>
           <a:xfrm>
-            <a:off x="6865040" y="2500000"/>
-            <a:ext cx="4516960" cy="2380488"/>
+            <a:off x="6865040" y="1960000"/>
+            <a:ext cx="4516960" cy="1947672"/>
           </a:xfrm>
           <a:prstGeom prst="rect">
             <a:avLst/>
@@ -10954,7 +10972,7 @@
               <a:buNone/>
             </a:pPr>
             <a:r>
-              <a:rPr sz="1100" b="0" i="0">
+              <a:rPr sz="900" b="0" i="0">
                 <a:solidFill>
                   <a:srgbClr val="E6EDF3"/>
                 </a:solidFill>
@@ -10974,7 +10992,7 @@
               <a:buNone/>
             </a:pPr>
             <a:r>
-              <a:rPr sz="1100" b="0" i="0">
+              <a:rPr sz="900" b="0" i="0">
                 <a:solidFill>
                   <a:srgbClr val="E6EDF3"/>
                 </a:solidFill>
@@ -10983,7 +11001,7 @@
               <a:t>  podSelector: {} </a:t>
             </a:r>
             <a:r>
-              <a:rPr sz="1100" b="0" i="1">
+              <a:rPr sz="900" b="0" i="1">
                 <a:solidFill>
                   <a:srgbClr val="7C8AA5"/>
                 </a:solidFill>
@@ -11003,7 +11021,7 @@
               <a:buNone/>
             </a:pPr>
             <a:r>
-              <a:rPr sz="1100" b="0" i="0">
+              <a:rPr sz="900" b="0" i="0">
                 <a:solidFill>
                   <a:srgbClr val="E6EDF3"/>
                 </a:solidFill>
@@ -11023,7 +11041,7 @@
               <a:buNone/>
             </a:pPr>
             <a:r>
-              <a:rPr sz="1100" b="0" i="0">
+              <a:rPr sz="900" b="0" i="0">
                 <a:solidFill>
                   <a:srgbClr val="E6EDF3"/>
                 </a:solidFill>
@@ -11043,7 +11061,7 @@
               <a:buNone/>
             </a:pPr>
             <a:r>
-              <a:rPr sz="1100" b="0" i="0">
+              <a:rPr sz="900" b="0" i="0">
                 <a:solidFill>
                   <a:srgbClr val="E6EDF3"/>
                 </a:solidFill>
@@ -11063,7 +11081,7 @@
               <a:buNone/>
             </a:pPr>
             <a:r>
-              <a:rPr sz="1100" b="0" i="0">
+              <a:rPr sz="900" b="0" i="0">
                 <a:solidFill>
                   <a:srgbClr val="E6EDF3"/>
                 </a:solidFill>
@@ -11083,7 +11101,7 @@
               <a:buNone/>
             </a:pPr>
             <a:r>
-              <a:rPr sz="1100" b="0" i="1">
+              <a:rPr sz="900" b="0" i="1">
                 <a:solidFill>
                   <a:srgbClr val="7C8AA5"/>
                 </a:solidFill>
@@ -11103,7 +11121,7 @@
               <a:buNone/>
             </a:pPr>
             <a:r>
-              <a:rPr sz="1100" b="0" i="1">
+              <a:rPr sz="900" b="0" i="1">
                 <a:solidFill>
                   <a:srgbClr val="7C8AA5"/>
                 </a:solidFill>
@@ -11123,7 +11141,7 @@
               <a:buNone/>
             </a:pPr>
             <a:r>
-              <a:rPr sz="1100" b="0" i="0">
+              <a:rPr sz="900" b="0" i="0">
                 <a:solidFill>
                   <a:srgbClr val="E6EDF3"/>
                 </a:solidFill>
@@ -11143,7 +11161,7 @@
               <a:buNone/>
             </a:pPr>
             <a:r>
-              <a:rPr sz="1100" b="0" i="1">
+              <a:rPr sz="900" b="0" i="1">
                 <a:solidFill>
                   <a:srgbClr val="7C8AA5"/>
                 </a:solidFill>
@@ -11163,7 +11181,7 @@
               <a:buNone/>
             </a:pPr>
             <a:r>
-              <a:rPr sz="1100" b="0" i="1">
+              <a:rPr sz="900" b="0" i="1">
                 <a:solidFill>
                   <a:srgbClr val="7C8AA5"/>
                 </a:solidFill>
@@ -11183,13 +11201,224 @@
               <a:buNone/>
             </a:pPr>
             <a:r>
-              <a:rPr sz="1100" b="0" i="1">
+              <a:rPr sz="900" b="0" i="1">
                 <a:solidFill>
                   <a:srgbClr val="7C8AA5"/>
                 </a:solidFill>
                 <a:latin typeface="Consolas"/>
               </a:rPr>
               <a:t># NetworkPolicy</a:t>
+            </a:r>
+          </a:p>
+        </p:txBody>
+      </p:sp>
+      <p:sp>
+        <p:nvSpPr>
+          <p:cNvPr id="22" name="Rounded Rectangle 21"/>
+          <p:cNvSpPr/>
+          <p:nvPr/>
+        </p:nvSpPr>
+        <p:spPr>
+          <a:xfrm>
+            <a:off x="620000" y="4310000"/>
+            <a:ext cx="10952000" cy="2000000"/>
+          </a:xfrm>
+          <a:prstGeom prst="roundRect">
+            <a:avLst>
+              <a:gd name="adj" fmla="val 4500"/>
+            </a:avLst>
+          </a:prstGeom>
+          <a:solidFill>
+            <a:srgbClr val="111A2C"/>
+          </a:solidFill>
+          <a:ln w="12700">
+            <a:solidFill>
+              <a:srgbClr val="26354E"/>
+            </a:solidFill>
+          </a:ln>
+          <a:effectLst/>
+        </p:spPr>
+        <p:style>
+          <a:lnRef idx="1">
+            <a:schemeClr val="accent1"/>
+          </a:lnRef>
+          <a:fillRef idx="3">
+            <a:schemeClr val="accent1"/>
+          </a:fillRef>
+          <a:effectRef idx="2">
+            <a:schemeClr val="accent1"/>
+          </a:effectRef>
+          <a:fontRef idx="minor">
+            <a:schemeClr val="lt1"/>
+          </a:fontRef>
+        </p:style>
+        <p:txBody>
+          <a:bodyPr rtlCol="0" anchor="ctr" lIns="0" rIns="0" tIns="0" bIns="0">
+            <a:noAutofit/>
+          </a:bodyPr>
+          <a:lstStyle/>
+          <a:p>
+            <a:pPr algn="ctr"/>
+          </a:p>
+        </p:txBody>
+      </p:sp>
+      <p:sp>
+        <p:nvSpPr>
+          <p:cNvPr id="23" name="Rectangle 22"/>
+          <p:cNvSpPr/>
+          <p:nvPr/>
+        </p:nvSpPr>
+        <p:spPr>
+          <a:xfrm>
+            <a:off x="646000" y="4332000"/>
+            <a:ext cx="40000" cy="1956000"/>
+          </a:xfrm>
+          <a:prstGeom prst="rect">
+            <a:avLst/>
+          </a:prstGeom>
+          <a:solidFill>
+            <a:srgbClr val="326CE5"/>
+          </a:solidFill>
+          <a:ln>
+            <a:noFill/>
+          </a:ln>
+          <a:effectLst/>
+        </p:spPr>
+        <p:style>
+          <a:lnRef idx="1">
+            <a:schemeClr val="accent1"/>
+          </a:lnRef>
+          <a:fillRef idx="3">
+            <a:schemeClr val="accent1"/>
+          </a:fillRef>
+          <a:effectRef idx="2">
+            <a:schemeClr val="accent1"/>
+          </a:effectRef>
+          <a:fontRef idx="minor">
+            <a:schemeClr val="lt1"/>
+          </a:fontRef>
+        </p:style>
+        <p:txBody>
+          <a:bodyPr rtlCol="0" anchor="ctr" lIns="0" rIns="0" tIns="0" bIns="0">
+            <a:noAutofit/>
+          </a:bodyPr>
+          <a:lstStyle/>
+          <a:p>
+            <a:pPr algn="ctr"/>
+          </a:p>
+        </p:txBody>
+      </p:sp>
+      <p:sp>
+        <p:nvSpPr>
+          <p:cNvPr id="24" name="TextBox 23"/>
+          <p:cNvSpPr txBox="1"/>
+          <p:nvPr/>
+        </p:nvSpPr>
+        <p:spPr>
+          <a:xfrm>
+            <a:off x="860000" y="4440000"/>
+            <a:ext cx="10522000" cy="1740000"/>
+          </a:xfrm>
+          <a:prstGeom prst="rect">
+            <a:avLst/>
+          </a:prstGeom>
+          <a:noFill/>
+        </p:spPr>
+        <p:txBody>
+          <a:bodyPr wrap="square" anchor="t" lIns="0" rIns="0" tIns="0" bIns="0">
+            <a:noAutofit/>
+          </a:bodyPr>
+          <a:lstStyle/>
+          <a:p>
+            <a:pPr algn="l" marL="0" indent="0">
+              <a:lnSpc>
+                <a:spcPct val="100000"/>
+              </a:lnSpc>
+              <a:spcBef>
+                <a:spcPts val="0"/>
+              </a:spcBef>
+              <a:spcAft>
+                <a:spcPts val="600"/>
+              </a:spcAft>
+              <a:buNone/>
+            </a:pPr>
+            <a:r>
+              <a:rPr sz="900" b="1" i="0" spc="200">
+                <a:solidFill>
+                  <a:srgbClr val="326CE5"/>
+                </a:solidFill>
+                <a:latin typeface="Segoe UI Semibold"/>
+              </a:rPr>
+              <a:t>TEORÍA</a:t>
+            </a:r>
+          </a:p>
+          <a:p>
+            <a:pPr algn="l" marL="0" indent="0">
+              <a:lnSpc>
+                <a:spcPct val="128000"/>
+              </a:lnSpc>
+              <a:spcBef>
+                <a:spcPts val="0"/>
+              </a:spcBef>
+              <a:spcAft>
+                <a:spcPts val="400"/>
+              </a:spcAft>
+              <a:buNone/>
+            </a:pPr>
+            <a:r>
+              <a:rPr sz="1000" b="0" i="0">
+                <a:solidFill>
+                  <a:srgbClr val="BDC9DB"/>
+                </a:solidFill>
+                <a:latin typeface="Segoe UI"/>
+              </a:rPr>
+              <a:t>Una NetworkPolicy es un firewall a nivel de Pod, pero su lógica es contraintuitiva. Regla uno: un Pod al que NO selecciona ninguna política acepta todo el tráfico; el aislamiento no es el estado por defecto. Regla dos: en cuanto UNA política selecciona a un Pod para un policyType (Ingress o Egress), ese Pod queda aislado para ese tipo y solo pasa lo que las políticas autoricen explícitamente.</a:t>
+            </a:r>
+          </a:p>
+          <a:p>
+            <a:pPr algn="l" marL="0" indent="0">
+              <a:lnSpc>
+                <a:spcPct val="128000"/>
+              </a:lnSpc>
+              <a:spcBef>
+                <a:spcPts val="0"/>
+              </a:spcBef>
+              <a:spcAft>
+                <a:spcPts val="400"/>
+              </a:spcAft>
+              <a:buNone/>
+            </a:pPr>
+            <a:r>
+              <a:rPr sz="1000" b="0" i="0">
+                <a:solidFill>
+                  <a:srgbClr val="BDC9DB"/>
+                </a:solidFill>
+                <a:latin typeface="Segoe UI"/>
+              </a:rPr>
+              <a:t>Regla tres: las políticas son ADITIVAS. Si varias seleccionan al mismo Pod, se aplica la unión de todo lo que permiten; no existen reglas de denegación y el orden no importa. Regla cuatro: Ingress y Egress son independientes. Para que el Pod A hable con el Pod B hacen falta DOS permisos: salida (egress) en A hacia B, y entrada (ingress) en B desde A.</a:t>
+            </a:r>
+          </a:p>
+          <a:p>
+            <a:pPr algn="l" marL="0" indent="0">
+              <a:lnSpc>
+                <a:spcPct val="128000"/>
+              </a:lnSpc>
+              <a:spcBef>
+                <a:spcPts val="0"/>
+              </a:spcBef>
+              <a:spcAft>
+                <a:spcPts val="400"/>
+              </a:spcAft>
+              <a:buNone/>
+            </a:pPr>
+            <a:r>
+              <a:rPr sz="1000" b="0" i="0">
+                <a:solidFill>
+                  <a:srgbClr val="BDC9DB"/>
+                </a:solidFill>
+                <a:latin typeface="Segoe UI"/>
+              </a:rPr>
+              <a:t>Requisito previo que se olvida: el CNI instalado tiene que implementar NetworkPolicy (Calico, Cilium sí; Flannel a secas no). Si el CNI no las soporta, las políticas se crean sin error pero no filtran nada.</a:t>
             </a:r>
           </a:p>
         </p:txBody>
@@ -12421,8 +12650,8 @@
         </p:nvSpPr>
         <p:spPr>
           <a:xfrm>
-            <a:off x="620000" y="2205000"/>
-            <a:ext cx="5316000" cy="2770000"/>
+            <a:off x="620000" y="1470000"/>
+            <a:ext cx="5316000" cy="2670000"/>
           </a:xfrm>
           <a:prstGeom prst="roundRect">
             <a:avLst>
@@ -12471,7 +12700,7 @@
         </p:nvSpPr>
         <p:spPr>
           <a:xfrm>
-            <a:off x="644000" y="2205000"/>
+            <a:off x="644000" y="1470000"/>
             <a:ext cx="5268000" cy="46000"/>
           </a:xfrm>
           <a:prstGeom prst="rect">
@@ -12517,7 +12746,7 @@
         </p:nvSpPr>
         <p:spPr>
           <a:xfrm>
-            <a:off x="880000" y="2465000"/>
+            <a:off x="880000" y="1730000"/>
             <a:ext cx="4796000" cy="570000"/>
           </a:xfrm>
           <a:prstGeom prst="rect">
@@ -12586,8 +12815,8 @@
         </p:nvSpPr>
         <p:spPr>
           <a:xfrm>
-            <a:off x="880000" y="3035000"/>
-            <a:ext cx="4796000" cy="1760000"/>
+            <a:off x="880000" y="2300000"/>
+            <a:ext cx="4796000" cy="1660000"/>
           </a:xfrm>
           <a:prstGeom prst="rect">
             <a:avLst/>
@@ -12703,8 +12932,8 @@
         </p:nvSpPr>
         <p:spPr>
           <a:xfrm>
-            <a:off x="6256000" y="2205000"/>
-            <a:ext cx="5316000" cy="2770000"/>
+            <a:off x="6256000" y="1470000"/>
+            <a:ext cx="5316000" cy="2670000"/>
           </a:xfrm>
           <a:prstGeom prst="roundRect">
             <a:avLst>
@@ -12753,7 +12982,7 @@
         </p:nvSpPr>
         <p:spPr>
           <a:xfrm>
-            <a:off x="6280000" y="2205000"/>
+            <a:off x="6280000" y="1470000"/>
             <a:ext cx="5268000" cy="46000"/>
           </a:xfrm>
           <a:prstGeom prst="rect">
@@ -12799,7 +13028,7 @@
         </p:nvSpPr>
         <p:spPr>
           <a:xfrm>
-            <a:off x="6516000" y="2465000"/>
+            <a:off x="6516000" y="1730000"/>
             <a:ext cx="4796000" cy="570000"/>
           </a:xfrm>
           <a:prstGeom prst="rect">
@@ -12868,8 +13097,8 @@
         </p:nvSpPr>
         <p:spPr>
           <a:xfrm>
-            <a:off x="6516000" y="3035000"/>
-            <a:ext cx="4796000" cy="1760000"/>
+            <a:off x="6516000" y="2300000"/>
+            <a:ext cx="4796000" cy="1660000"/>
           </a:xfrm>
           <a:prstGeom prst="rect">
             <a:avLst/>
@@ -12985,12 +13214,12 @@
         </p:nvSpPr>
         <p:spPr>
           <a:xfrm>
-            <a:off x="620000" y="5860000"/>
-            <a:ext cx="10952000" cy="470000"/>
+            <a:off x="620000" y="4310000"/>
+            <a:ext cx="10952000" cy="2000000"/>
           </a:xfrm>
           <a:prstGeom prst="roundRect">
             <a:avLst>
-              <a:gd name="adj" fmla="val 10000"/>
+              <a:gd name="adj" fmla="val 4500"/>
             </a:avLst>
           </a:prstGeom>
           <a:solidFill>
@@ -13035,8 +13264,8 @@
         </p:nvSpPr>
         <p:spPr>
           <a:xfrm>
-            <a:off x="650000" y="5884000"/>
-            <a:ext cx="40000" cy="422000"/>
+            <a:off x="646000" y="4332000"/>
+            <a:ext cx="40000" cy="1956000"/>
           </a:xfrm>
           <a:prstGeom prst="rect">
             <a:avLst/>
@@ -13081,8 +13310,8 @@
         </p:nvSpPr>
         <p:spPr>
           <a:xfrm>
-            <a:off x="860000" y="5860000"/>
-            <a:ext cx="10482000" cy="470000"/>
+            <a:off x="860000" y="4440000"/>
+            <a:ext cx="10522000" cy="1740000"/>
           </a:xfrm>
           <a:prstGeom prst="rect">
             <a:avLst/>
@@ -13090,31 +13319,100 @@
           <a:noFill/>
         </p:spPr>
         <p:txBody>
-          <a:bodyPr wrap="square" anchor="ctr" lIns="0" rIns="0" tIns="0" bIns="0">
+          <a:bodyPr wrap="square" anchor="t" lIns="0" rIns="0" tIns="0" bIns="0">
             <a:noAutofit/>
           </a:bodyPr>
           <a:lstStyle/>
           <a:p>
             <a:pPr algn="l" marL="0" indent="0">
               <a:lnSpc>
-                <a:spcPct val="116000"/>
-              </a:lnSpc>
-              <a:spcBef>
-                <a:spcPts val="0"/>
-              </a:spcBef>
-              <a:spcAft>
-                <a:spcPts val="0"/>
-              </a:spcAft>
-              <a:buNone/>
-            </a:pPr>
-            <a:r>
-              <a:rPr sz="1100" b="0" i="1">
+                <a:spcPct val="100000"/>
+              </a:lnSpc>
+              <a:spcBef>
+                <a:spcPts val="0"/>
+              </a:spcBef>
+              <a:spcAft>
+                <a:spcPts val="600"/>
+              </a:spcAft>
+              <a:buNone/>
+            </a:pPr>
+            <a:r>
+              <a:rPr sz="900" b="1" i="0" spc="200">
+                <a:solidFill>
+                  <a:srgbClr val="326CE5"/>
+                </a:solidFill>
+                <a:latin typeface="Segoe UI Semibold"/>
+              </a:rPr>
+              <a:t>TEORÍA</a:t>
+            </a:r>
+          </a:p>
+          <a:p>
+            <a:pPr algn="l" marL="0" indent="0">
+              <a:lnSpc>
+                <a:spcPct val="128000"/>
+              </a:lnSpc>
+              <a:spcBef>
+                <a:spcPts val="0"/>
+              </a:spcBef>
+              <a:spcAft>
+                <a:spcPts val="400"/>
+              </a:spcAft>
+              <a:buNone/>
+            </a:pPr>
+            <a:r>
+              <a:rPr sz="1050" b="0" i="0">
                 <a:solidFill>
                   <a:srgbClr val="BDC9DB"/>
                 </a:solidFill>
                 <a:latin typeface="Segoe UI"/>
               </a:rPr>
-              <a:t>Es la diferencia entre una política correcta y un agujero de seguridad, y es un solo guion.</a:t>
+              <a:t>En una regla from o to de NetworkPolicy, la diferencia entre exigir dos condiciones a la vez o cualquiera de ellas es un solo guion de YAML, y es la diferencia entre una política correcta y un agujero de seguridad.</a:t>
+            </a:r>
+          </a:p>
+          <a:p>
+            <a:pPr algn="l" marL="0" indent="0">
+              <a:lnSpc>
+                <a:spcPct val="128000"/>
+              </a:lnSpc>
+              <a:spcBef>
+                <a:spcPts val="0"/>
+              </a:spcBef>
+              <a:spcAft>
+                <a:spcPts val="400"/>
+              </a:spcAft>
+              <a:buNone/>
+            </a:pPr>
+            <a:r>
+              <a:rPr sz="1050" b="0" i="0">
+                <a:solidFill>
+                  <a:srgbClr val="BDC9DB"/>
+                </a:solidFill>
+                <a:latin typeface="Segoe UI"/>
+              </a:rPr>
+              <a:t>Si namespaceSelector y podSelector van bajo el MISMO elemento de la lista (un solo guion), se combinan con AND: «Pods que cumplan ESE podSelector Y que estén en un namespace que cumpla ESE namespaceSelector». Es lo que casi siempre quieres: ese Pod, en ese namespace.</a:t>
+            </a:r>
+          </a:p>
+          <a:p>
+            <a:pPr algn="l" marL="0" indent="0">
+              <a:lnSpc>
+                <a:spcPct val="128000"/>
+              </a:lnSpc>
+              <a:spcBef>
+                <a:spcPts val="0"/>
+              </a:spcBef>
+              <a:spcAft>
+                <a:spcPts val="400"/>
+              </a:spcAft>
+              <a:buNone/>
+            </a:pPr>
+            <a:r>
+              <a:rPr sz="1050" b="0" i="0">
+                <a:solidFill>
+                  <a:srgbClr val="BDC9DB"/>
+                </a:solidFill>
+                <a:latin typeface="Segoe UI"/>
+              </a:rPr>
+              <a:t>Si van como DOS elementos de la lista (dos guiones), se combinan con OR: «cualquier Pod de ese namespace, O cualquier Pod con ese label en cualquier namespace». Concede muchísimo más de lo que parece. Revisa siempre la indentación de estas reglas.</a:t>
             </a:r>
           </a:p>
         </p:txBody>
@@ -23739,8 +24037,8 @@
         </p:nvSpPr>
         <p:spPr>
           <a:xfrm>
-            <a:off x="620000" y="1830000"/>
-            <a:ext cx="2022400" cy="760000"/>
+            <a:off x="620000" y="1670000"/>
+            <a:ext cx="2022400" cy="700000"/>
           </a:xfrm>
           <a:prstGeom prst="roundRect">
             <a:avLst>
@@ -23789,8 +24087,8 @@
         </p:nvSpPr>
         <p:spPr>
           <a:xfrm>
-            <a:off x="690000" y="1830000"/>
-            <a:ext cx="1882400" cy="760000"/>
+            <a:off x="690000" y="1670000"/>
+            <a:ext cx="1882400" cy="700000"/>
           </a:xfrm>
           <a:prstGeom prst="rect">
             <a:avLst/>
@@ -23835,7 +24133,7 @@
         </p:nvCxnSpPr>
         <p:spPr>
           <a:xfrm>
-            <a:off x="2666400" y="2210000"/>
+            <a:off x="2666400" y="2020000"/>
             <a:ext cx="162000" cy="0"/>
           </a:xfrm>
           <a:prstGeom prst="line">
@@ -23872,8 +24170,8 @@
         </p:nvSpPr>
         <p:spPr>
           <a:xfrm>
-            <a:off x="2852400" y="1830000"/>
-            <a:ext cx="2022400" cy="760000"/>
+            <a:off x="2852400" y="1670000"/>
+            <a:ext cx="2022400" cy="700000"/>
           </a:xfrm>
           <a:prstGeom prst="roundRect">
             <a:avLst>
@@ -23922,8 +24220,8 @@
         </p:nvSpPr>
         <p:spPr>
           <a:xfrm>
-            <a:off x="2922400" y="1830000"/>
-            <a:ext cx="1882400" cy="760000"/>
+            <a:off x="2922400" y="1670000"/>
+            <a:ext cx="1882400" cy="700000"/>
           </a:xfrm>
           <a:prstGeom prst="rect">
             <a:avLst/>
@@ -23968,7 +24266,7 @@
         </p:nvCxnSpPr>
         <p:spPr>
           <a:xfrm>
-            <a:off x="4898800" y="2210000"/>
+            <a:off x="4898800" y="2020000"/>
             <a:ext cx="162000" cy="0"/>
           </a:xfrm>
           <a:prstGeom prst="line">
@@ -24005,8 +24303,8 @@
         </p:nvSpPr>
         <p:spPr>
           <a:xfrm>
-            <a:off x="5084800" y="1830000"/>
-            <a:ext cx="2022400" cy="760000"/>
+            <a:off x="5084800" y="1670000"/>
+            <a:ext cx="2022400" cy="700000"/>
           </a:xfrm>
           <a:prstGeom prst="roundRect">
             <a:avLst>
@@ -24055,8 +24353,8 @@
         </p:nvSpPr>
         <p:spPr>
           <a:xfrm>
-            <a:off x="5154800" y="1830000"/>
-            <a:ext cx="1882400" cy="760000"/>
+            <a:off x="5154800" y="1670000"/>
+            <a:ext cx="1882400" cy="700000"/>
           </a:xfrm>
           <a:prstGeom prst="rect">
             <a:avLst/>
@@ -24101,7 +24399,7 @@
         </p:nvCxnSpPr>
         <p:spPr>
           <a:xfrm>
-            <a:off x="7131200" y="2210000"/>
+            <a:off x="7131200" y="2020000"/>
             <a:ext cx="162000" cy="0"/>
           </a:xfrm>
           <a:prstGeom prst="line">
@@ -24138,8 +24436,8 @@
         </p:nvSpPr>
         <p:spPr>
           <a:xfrm>
-            <a:off x="7317200" y="1830000"/>
-            <a:ext cx="2022400" cy="760000"/>
+            <a:off x="7317200" y="1670000"/>
+            <a:ext cx="2022400" cy="700000"/>
           </a:xfrm>
           <a:prstGeom prst="roundRect">
             <a:avLst>
@@ -24188,8 +24486,8 @@
         </p:nvSpPr>
         <p:spPr>
           <a:xfrm>
-            <a:off x="7387200" y="1830000"/>
-            <a:ext cx="1882400" cy="760000"/>
+            <a:off x="7387200" y="1670000"/>
+            <a:ext cx="1882400" cy="700000"/>
           </a:xfrm>
           <a:prstGeom prst="rect">
             <a:avLst/>
@@ -24234,7 +24532,7 @@
         </p:nvCxnSpPr>
         <p:spPr>
           <a:xfrm>
-            <a:off x="9363600" y="2210000"/>
+            <a:off x="9363600" y="2020000"/>
             <a:ext cx="162000" cy="0"/>
           </a:xfrm>
           <a:prstGeom prst="line">
@@ -24271,8 +24569,8 @@
         </p:nvSpPr>
         <p:spPr>
           <a:xfrm>
-            <a:off x="9549600" y="1830000"/>
-            <a:ext cx="2022400" cy="760000"/>
+            <a:off x="9549600" y="1670000"/>
+            <a:ext cx="2022400" cy="700000"/>
           </a:xfrm>
           <a:prstGeom prst="roundRect">
             <a:avLst>
@@ -24321,8 +24619,8 @@
         </p:nvSpPr>
         <p:spPr>
           <a:xfrm>
-            <a:off x="9619600" y="1830000"/>
-            <a:ext cx="1882400" cy="760000"/>
+            <a:off x="9619600" y="1670000"/>
+            <a:ext cx="1882400" cy="700000"/>
           </a:xfrm>
           <a:prstGeom prst="rect">
             <a:avLst/>
@@ -24367,12 +24665,12 @@
         </p:nvSpPr>
         <p:spPr>
           <a:xfrm>
-            <a:off x="620000" y="2950000"/>
-            <a:ext cx="10952000" cy="1820000"/>
+            <a:off x="620000" y="2670000"/>
+            <a:ext cx="10952000" cy="3610000"/>
           </a:xfrm>
           <a:prstGeom prst="roundRect">
             <a:avLst>
-              <a:gd name="adj" fmla="val 6000"/>
+              <a:gd name="adj" fmla="val 4500"/>
             </a:avLst>
           </a:prstGeom>
           <a:solidFill>
@@ -24417,8 +24715,8 @@
         </p:nvSpPr>
         <p:spPr>
           <a:xfrm>
-            <a:off x="650000" y="2974000"/>
-            <a:ext cx="40000" cy="1772000"/>
+            <a:off x="646000" y="2692000"/>
+            <a:ext cx="40000" cy="3566000"/>
           </a:xfrm>
           <a:prstGeom prst="rect">
             <a:avLst/>
@@ -24463,8 +24761,8 @@
         </p:nvSpPr>
         <p:spPr>
           <a:xfrm>
-            <a:off x="880000" y="3190000"/>
-            <a:ext cx="10432000" cy="1420000"/>
+            <a:off x="860000" y="2800000"/>
+            <a:ext cx="10522000" cy="3350000"/>
           </a:xfrm>
           <a:prstGeom prst="rect">
             <a:avLst/>
@@ -24485,14 +24783,14 @@
                 <a:spcPts val="0"/>
               </a:spcBef>
               <a:spcAft>
-                <a:spcPts val="1200"/>
-              </a:spcAft>
-              <a:buNone/>
-            </a:pPr>
-            <a:r>
-              <a:rPr sz="1000" b="1" i="0" spc="180">
-                <a:solidFill>
-                  <a:srgbClr val="74A6FF"/>
+                <a:spcPts val="600"/>
+              </a:spcAft>
+              <a:buNone/>
+            </a:pPr>
+            <a:r>
+              <a:rPr sz="900" b="1" i="0" spc="200">
+                <a:solidFill>
+                  <a:srgbClr val="326CE5"/>
                 </a:solidFill>
                 <a:latin typeface="Segoe UI Semibold"/>
               </a:rPr>
@@ -24500,18 +24798,17 @@
             </a:r>
           </a:p>
           <a:p>
-            <a:pPr algn="l" marL="182880" indent="-182880">
-              <a:lnSpc>
-                <a:spcPct val="120000"/>
-              </a:lnSpc>
-              <a:spcBef>
-                <a:spcPts val="0"/>
-              </a:spcBef>
-              <a:spcAft>
-                <a:spcPts val="700"/>
-              </a:spcAft>
-              <a:buFont typeface="Arial"/>
-              <a:buChar char="•"/>
+            <a:pPr algn="l" marL="0" indent="0">
+              <a:lnSpc>
+                <a:spcPct val="128000"/>
+              </a:lnSpc>
+              <a:spcBef>
+                <a:spcPts val="0"/>
+              </a:spcBef>
+              <a:spcAft>
+                <a:spcPts val="400"/>
+              </a:spcAft>
+              <a:buNone/>
             </a:pPr>
             <a:r>
               <a:rPr sz="1100" b="0" i="0">
@@ -24520,22 +24817,21 @@
                 </a:solidFill>
                 <a:latin typeface="Segoe UI"/>
               </a:rPr>
-              <a:t>La ClusterIP no existe en ninguna interfaz de red: es una regla, no una dirección real.</a:t>
-            </a:r>
-          </a:p>
-          <a:p>
-            <a:pPr algn="l" marL="182880" indent="-182880">
-              <a:lnSpc>
-                <a:spcPct val="120000"/>
-              </a:lnSpc>
-              <a:spcBef>
-                <a:spcPts val="0"/>
-              </a:spcBef>
-              <a:spcAft>
-                <a:spcPts val="700"/>
-              </a:spcAft>
-              <a:buFont typeface="Arial"/>
-              <a:buChar char="•"/>
+              <a:t>Cuando un cliente dentro del cluster contacta con un Service, no habla con ningún proceso: la ClusterIP es una IP virtual que no existe en ninguna interfaz de red. Es una regla que kube-proxy programa en todos los nodos (con iptables o IPVS) y que, en cuanto sale un paquete hacia esa IP, reescribe el destino hacia la IP real de uno de los Pods backend y su targetPort.</a:t>
+            </a:r>
+          </a:p>
+          <a:p>
+            <a:pPr algn="l" marL="0" indent="0">
+              <a:lnSpc>
+                <a:spcPct val="128000"/>
+              </a:lnSpc>
+              <a:spcBef>
+                <a:spcPts val="0"/>
+              </a:spcBef>
+              <a:spcAft>
+                <a:spcPts val="400"/>
+              </a:spcAft>
+              <a:buNone/>
             </a:pPr>
             <a:r>
               <a:rPr sz="1100" b="0" i="0">
@@ -24544,22 +24840,21 @@
                 </a:solidFill>
                 <a:latin typeface="Segoe UI"/>
               </a:rPr>
-              <a:t>El DNS NO balancea. Resuelve siempre a la misma ClusterIP; quien reparte es kube-proxy.</a:t>
-            </a:r>
-          </a:p>
-          <a:p>
-            <a:pPr algn="l" marL="182880" indent="-182880">
-              <a:lnSpc>
-                <a:spcPct val="120000"/>
-              </a:lnSpc>
-              <a:spcBef>
-                <a:spcPts val="0"/>
-              </a:spcBef>
-              <a:spcAft>
-                <a:spcPts val="700"/>
-              </a:spcAft>
-              <a:buFont typeface="Arial"/>
-              <a:buChar char="•"/>
+              <a:t>El DNS no interviene en el balanceo: resuelve el nombre del Service SIEMPRE a la misma ClusterIP. Quien reparte entre los Pods es kube-proxy, eligiendo un endpoint distinto por conexión. La lista de endpoints candidatos sale de los objetos EndpointSlice, que solo contienen Pods que están Ready.</a:t>
+            </a:r>
+          </a:p>
+          <a:p>
+            <a:pPr algn="l" marL="0" indent="0">
+              <a:lnSpc>
+                <a:spcPct val="128000"/>
+              </a:lnSpc>
+              <a:spcBef>
+                <a:spcPts val="0"/>
+              </a:spcBef>
+              <a:spcAft>
+                <a:spcPts val="400"/>
+              </a:spcAft>
+              <a:buNone/>
             </a:pPr>
             <a:r>
               <a:rPr sz="1100" b="0" i="0">
@@ -24568,31 +24863,7 @@
                 </a:solidFill>
                 <a:latin typeface="Segoe UI"/>
               </a:rPr>
-              <a:t>Un Pod que no está Ready desaparece del EndpointSlice y deja de recibir tráfico. Es lo que hace que un rollout roto no rompa el servicio.</a:t>
-            </a:r>
-          </a:p>
-          <a:p>
-            <a:pPr algn="l" marL="182880" indent="-182880">
-              <a:lnSpc>
-                <a:spcPct val="120000"/>
-              </a:lnSpc>
-              <a:spcBef>
-                <a:spcPts val="0"/>
-              </a:spcBef>
-              <a:spcAft>
-                <a:spcPts val="700"/>
-              </a:spcAft>
-              <a:buFont typeface="Arial"/>
-              <a:buChar char="•"/>
-            </a:pPr>
-            <a:r>
-              <a:rPr sz="1100" b="0" i="0">
-                <a:solidFill>
-                  <a:srgbClr val="BDC9DB"/>
-                </a:solidFill>
-                <a:latin typeface="Segoe UI"/>
-              </a:rPr>
-              <a:t>Por eso: nslookup OK + curl timeout = problema de endpoints, NO de DNS.</a:t>
+              <a:t>De aquí salen tres conclusiones para depurar: un Pod que deja de estar Ready desaparece del EndpointSlice y deja de recibir tráfico (esto es lo que hace que un rollout roto no rompa el servicio); si nslookup del nombre funciona pero curl a la ClusterIP da timeout, el problema es de endpoints o de NetworkPolicy, no de DNS; y si el EndpointSlice está vacío, hay que mirar el selector del Service frente a los labels de los Pods.</a:t>
             </a:r>
           </a:p>
         </p:txBody>
@@ -24907,8 +25178,8 @@
         </p:nvSpPr>
         <p:spPr>
           <a:xfrm>
-            <a:off x="620000" y="2202000"/>
-            <a:ext cx="3437333" cy="1568000"/>
+            <a:off x="620000" y="1470000"/>
+            <a:ext cx="3437333" cy="1215000"/>
           </a:xfrm>
           <a:prstGeom prst="roundRect">
             <a:avLst>
@@ -24957,7 +25228,7 @@
         </p:nvSpPr>
         <p:spPr>
           <a:xfrm>
-            <a:off x="644000" y="2202000"/>
+            <a:off x="644000" y="1470000"/>
             <a:ext cx="3389333" cy="46000"/>
           </a:xfrm>
           <a:prstGeom prst="rect">
@@ -25003,7 +25274,7 @@
         </p:nvSpPr>
         <p:spPr>
           <a:xfrm>
-            <a:off x="850000" y="2452000"/>
+            <a:off x="820000" y="1690000"/>
             <a:ext cx="300000" cy="300000"/>
           </a:xfrm>
           <a:prstGeom prst="ellipse">
@@ -25077,7 +25348,7 @@
         </p:blipFill>
         <p:spPr>
           <a:xfrm>
-            <a:off x="3497333" y="2438000"/>
+            <a:off x="3527333" y="1676000"/>
             <a:ext cx="330000" cy="330000"/>
           </a:xfrm>
           <a:prstGeom prst="rect">
@@ -25093,8 +25364,8 @@
         </p:nvSpPr>
         <p:spPr>
           <a:xfrm>
-            <a:off x="1260000" y="2432000"/>
-            <a:ext cx="2377333" cy="340000"/>
+            <a:off x="1230000" y="1670000"/>
+            <a:ext cx="2407333" cy="340000"/>
           </a:xfrm>
           <a:prstGeom prst="rect">
             <a:avLst/>
@@ -25139,8 +25410,8 @@
         </p:nvSpPr>
         <p:spPr>
           <a:xfrm>
-            <a:off x="850000" y="2852000"/>
-            <a:ext cx="2977333" cy="838000"/>
+            <a:off x="820000" y="2030000"/>
+            <a:ext cx="3037333" cy="595000"/>
           </a:xfrm>
           <a:prstGeom prst="rect">
             <a:avLst/>
@@ -25155,18 +25426,18 @@
           <a:p>
             <a:pPr algn="l" marL="0" indent="0">
               <a:lnSpc>
-                <a:spcPct val="118000"/>
-              </a:lnSpc>
-              <a:spcBef>
-                <a:spcPts val="0"/>
-              </a:spcBef>
-              <a:spcAft>
-                <a:spcPts val="0"/>
-              </a:spcAft>
-              <a:buNone/>
-            </a:pPr>
-            <a:r>
-              <a:rPr sz="1100" b="0" i="0">
+                <a:spcPct val="112000"/>
+              </a:lnSpc>
+              <a:spcBef>
+                <a:spcPts val="0"/>
+              </a:spcBef>
+              <a:spcAft>
+                <a:spcPts val="0"/>
+              </a:spcAft>
+              <a:buNone/>
+            </a:pPr>
+            <a:r>
+              <a:rPr sz="1000" b="0" i="0">
                 <a:solidFill>
                   <a:srgbClr val="BDC9DB"/>
                 </a:solidFill>
@@ -25185,8 +25456,8 @@
         </p:nvSpPr>
         <p:spPr>
           <a:xfrm>
-            <a:off x="4377333" y="2202000"/>
-            <a:ext cx="3437333" cy="1568000"/>
+            <a:off x="4377333" y="1470000"/>
+            <a:ext cx="3437333" cy="1215000"/>
           </a:xfrm>
           <a:prstGeom prst="roundRect">
             <a:avLst>
@@ -25235,7 +25506,7 @@
         </p:nvSpPr>
         <p:spPr>
           <a:xfrm>
-            <a:off x="4401333" y="2202000"/>
+            <a:off x="4401333" y="1470000"/>
             <a:ext cx="3389333" cy="46000"/>
           </a:xfrm>
           <a:prstGeom prst="rect">
@@ -25281,7 +25552,7 @@
         </p:nvSpPr>
         <p:spPr>
           <a:xfrm>
-            <a:off x="4607333" y="2452000"/>
+            <a:off x="4577333" y="1690000"/>
             <a:ext cx="300000" cy="300000"/>
           </a:xfrm>
           <a:prstGeom prst="ellipse">
@@ -25355,7 +25626,7 @@
         </p:blipFill>
         <p:spPr>
           <a:xfrm>
-            <a:off x="7254666" y="2438000"/>
+            <a:off x="7284666" y="1676000"/>
             <a:ext cx="330000" cy="330000"/>
           </a:xfrm>
           <a:prstGeom prst="rect">
@@ -25371,8 +25642,8 @@
         </p:nvSpPr>
         <p:spPr>
           <a:xfrm>
-            <a:off x="5017333" y="2432000"/>
-            <a:ext cx="2377333" cy="340000"/>
+            <a:off x="4987333" y="1670000"/>
+            <a:ext cx="2407333" cy="340000"/>
           </a:xfrm>
           <a:prstGeom prst="rect">
             <a:avLst/>
@@ -25417,8 +25688,8 @@
         </p:nvSpPr>
         <p:spPr>
           <a:xfrm>
-            <a:off x="4607333" y="2852000"/>
-            <a:ext cx="2977333" cy="838000"/>
+            <a:off x="4577333" y="2030000"/>
+            <a:ext cx="3037333" cy="595000"/>
           </a:xfrm>
           <a:prstGeom prst="rect">
             <a:avLst/>
@@ -25433,18 +25704,18 @@
           <a:p>
             <a:pPr algn="l" marL="0" indent="0">
               <a:lnSpc>
-                <a:spcPct val="118000"/>
-              </a:lnSpc>
-              <a:spcBef>
-                <a:spcPts val="0"/>
-              </a:spcBef>
-              <a:spcAft>
-                <a:spcPts val="0"/>
-              </a:spcAft>
-              <a:buNone/>
-            </a:pPr>
-            <a:r>
-              <a:rPr sz="1100" b="0" i="0">
+                <a:spcPct val="112000"/>
+              </a:lnSpc>
+              <a:spcBef>
+                <a:spcPts val="0"/>
+              </a:spcBef>
+              <a:spcAft>
+                <a:spcPts val="0"/>
+              </a:spcAft>
+              <a:buNone/>
+            </a:pPr>
+            <a:r>
+              <a:rPr sz="1000" b="0" i="0">
                 <a:solidFill>
                   <a:srgbClr val="BDC9DB"/>
                 </a:solidFill>
@@ -25463,8 +25734,8 @@
         </p:nvSpPr>
         <p:spPr>
           <a:xfrm>
-            <a:off x="8134666" y="2202000"/>
-            <a:ext cx="3437333" cy="1568000"/>
+            <a:off x="8134666" y="1470000"/>
+            <a:ext cx="3437333" cy="1215000"/>
           </a:xfrm>
           <a:prstGeom prst="roundRect">
             <a:avLst>
@@ -25513,7 +25784,7 @@
         </p:nvSpPr>
         <p:spPr>
           <a:xfrm>
-            <a:off x="8158666" y="2202000"/>
+            <a:off x="8158666" y="1470000"/>
             <a:ext cx="3389333" cy="46000"/>
           </a:xfrm>
           <a:prstGeom prst="rect">
@@ -25559,7 +25830,7 @@
         </p:nvSpPr>
         <p:spPr>
           <a:xfrm>
-            <a:off x="8364666" y="2452000"/>
+            <a:off x="8334666" y="1690000"/>
             <a:ext cx="300000" cy="300000"/>
           </a:xfrm>
           <a:prstGeom prst="ellipse">
@@ -25633,7 +25904,7 @@
         </p:blipFill>
         <p:spPr>
           <a:xfrm>
-            <a:off x="11012000" y="2438000"/>
+            <a:off x="11042000" y="1676000"/>
             <a:ext cx="330000" cy="330000"/>
           </a:xfrm>
           <a:prstGeom prst="rect">
@@ -25649,8 +25920,8 @@
         </p:nvSpPr>
         <p:spPr>
           <a:xfrm>
-            <a:off x="8774666" y="2432000"/>
-            <a:ext cx="2377333" cy="340000"/>
+            <a:off x="8744666" y="1670000"/>
+            <a:ext cx="2407333" cy="340000"/>
           </a:xfrm>
           <a:prstGeom prst="rect">
             <a:avLst/>
@@ -25695,8 +25966,8 @@
         </p:nvSpPr>
         <p:spPr>
           <a:xfrm>
-            <a:off x="8364666" y="2852000"/>
-            <a:ext cx="2977333" cy="838000"/>
+            <a:off x="8334666" y="2030000"/>
+            <a:ext cx="3037333" cy="595000"/>
           </a:xfrm>
           <a:prstGeom prst="rect">
             <a:avLst/>
@@ -25711,18 +25982,18 @@
           <a:p>
             <a:pPr algn="l" marL="0" indent="0">
               <a:lnSpc>
-                <a:spcPct val="118000"/>
-              </a:lnSpc>
-              <a:spcBef>
-                <a:spcPts val="0"/>
-              </a:spcBef>
-              <a:spcAft>
-                <a:spcPts val="0"/>
-              </a:spcAft>
-              <a:buNone/>
-            </a:pPr>
-            <a:r>
-              <a:rPr sz="1100" b="0" i="0">
+                <a:spcPct val="112000"/>
+              </a:lnSpc>
+              <a:spcBef>
+                <a:spcPts val="0"/>
+              </a:spcBef>
+              <a:spcAft>
+                <a:spcPts val="0"/>
+              </a:spcAft>
+              <a:buNone/>
+            </a:pPr>
+            <a:r>
+              <a:rPr sz="1000" b="0" i="0">
                 <a:solidFill>
                   <a:srgbClr val="BDC9DB"/>
                 </a:solidFill>
@@ -25741,8 +26012,8 @@
         </p:nvSpPr>
         <p:spPr>
           <a:xfrm>
-            <a:off x="620000" y="4010000"/>
-            <a:ext cx="3437333" cy="1568000"/>
+            <a:off x="620000" y="2925000"/>
+            <a:ext cx="3437333" cy="1215000"/>
           </a:xfrm>
           <a:prstGeom prst="roundRect">
             <a:avLst>
@@ -25791,7 +26062,7 @@
         </p:nvSpPr>
         <p:spPr>
           <a:xfrm>
-            <a:off x="644000" y="4010000"/>
+            <a:off x="644000" y="2925000"/>
             <a:ext cx="3389333" cy="46000"/>
           </a:xfrm>
           <a:prstGeom prst="rect">
@@ -25837,7 +26108,7 @@
         </p:nvSpPr>
         <p:spPr>
           <a:xfrm>
-            <a:off x="850000" y="4260000"/>
+            <a:off x="820000" y="3145000"/>
             <a:ext cx="300000" cy="300000"/>
           </a:xfrm>
           <a:prstGeom prst="ellipse">
@@ -25911,7 +26182,7 @@
         </p:blipFill>
         <p:spPr>
           <a:xfrm>
-            <a:off x="3497333" y="4246000"/>
+            <a:off x="3527333" y="3131000"/>
             <a:ext cx="330000" cy="330000"/>
           </a:xfrm>
           <a:prstGeom prst="rect">
@@ -25927,8 +26198,8 @@
         </p:nvSpPr>
         <p:spPr>
           <a:xfrm>
-            <a:off x="1260000" y="4240000"/>
-            <a:ext cx="2377333" cy="340000"/>
+            <a:off x="1230000" y="3125000"/>
+            <a:ext cx="2407333" cy="340000"/>
           </a:xfrm>
           <a:prstGeom prst="rect">
             <a:avLst/>
@@ -25973,8 +26244,8 @@
         </p:nvSpPr>
         <p:spPr>
           <a:xfrm>
-            <a:off x="850000" y="4660000"/>
-            <a:ext cx="2977333" cy="838000"/>
+            <a:off x="820000" y="3485000"/>
+            <a:ext cx="3037333" cy="595000"/>
           </a:xfrm>
           <a:prstGeom prst="rect">
             <a:avLst/>
@@ -25989,18 +26260,18 @@
           <a:p>
             <a:pPr algn="l" marL="0" indent="0">
               <a:lnSpc>
-                <a:spcPct val="118000"/>
-              </a:lnSpc>
-              <a:spcBef>
-                <a:spcPts val="0"/>
-              </a:spcBef>
-              <a:spcAft>
-                <a:spcPts val="0"/>
-              </a:spcAft>
-              <a:buNone/>
-            </a:pPr>
-            <a:r>
-              <a:rPr sz="1100" b="0" i="0">
+                <a:spcPct val="112000"/>
+              </a:lnSpc>
+              <a:spcBef>
+                <a:spcPts val="0"/>
+              </a:spcBef>
+              <a:spcAft>
+                <a:spcPts val="0"/>
+              </a:spcAft>
+              <a:buNone/>
+            </a:pPr>
+            <a:r>
+              <a:rPr sz="1000" b="0" i="0">
                 <a:solidFill>
                   <a:srgbClr val="BDC9DB"/>
                 </a:solidFill>
@@ -26019,8 +26290,8 @@
         </p:nvSpPr>
         <p:spPr>
           <a:xfrm>
-            <a:off x="4377333" y="4010000"/>
-            <a:ext cx="3437333" cy="1568000"/>
+            <a:off x="4377333" y="2925000"/>
+            <a:ext cx="3437333" cy="1215000"/>
           </a:xfrm>
           <a:prstGeom prst="roundRect">
             <a:avLst>
@@ -26069,7 +26340,7 @@
         </p:nvSpPr>
         <p:spPr>
           <a:xfrm>
-            <a:off x="4401333" y="4010000"/>
+            <a:off x="4401333" y="2925000"/>
             <a:ext cx="3389333" cy="46000"/>
           </a:xfrm>
           <a:prstGeom prst="rect">
@@ -26115,7 +26386,7 @@
         </p:nvSpPr>
         <p:spPr>
           <a:xfrm>
-            <a:off x="4607333" y="4260000"/>
+            <a:off x="4577333" y="3145000"/>
             <a:ext cx="300000" cy="300000"/>
           </a:xfrm>
           <a:prstGeom prst="ellipse">
@@ -26189,7 +26460,7 @@
         </p:blipFill>
         <p:spPr>
           <a:xfrm>
-            <a:off x="7254666" y="4246000"/>
+            <a:off x="7284666" y="3131000"/>
             <a:ext cx="330000" cy="330000"/>
           </a:xfrm>
           <a:prstGeom prst="rect">
@@ -26205,8 +26476,8 @@
         </p:nvSpPr>
         <p:spPr>
           <a:xfrm>
-            <a:off x="5017333" y="4240000"/>
-            <a:ext cx="2377333" cy="340000"/>
+            <a:off x="4987333" y="3125000"/>
+            <a:ext cx="2407333" cy="340000"/>
           </a:xfrm>
           <a:prstGeom prst="rect">
             <a:avLst/>
@@ -26251,8 +26522,8 @@
         </p:nvSpPr>
         <p:spPr>
           <a:xfrm>
-            <a:off x="4607333" y="4660000"/>
-            <a:ext cx="2977333" cy="838000"/>
+            <a:off x="4577333" y="3485000"/>
+            <a:ext cx="3037333" cy="595000"/>
           </a:xfrm>
           <a:prstGeom prst="rect">
             <a:avLst/>
@@ -26267,18 +26538,18 @@
           <a:p>
             <a:pPr algn="l" marL="0" indent="0">
               <a:lnSpc>
-                <a:spcPct val="118000"/>
-              </a:lnSpc>
-              <a:spcBef>
-                <a:spcPts val="0"/>
-              </a:spcBef>
-              <a:spcAft>
-                <a:spcPts val="0"/>
-              </a:spcAft>
-              <a:buNone/>
-            </a:pPr>
-            <a:r>
-              <a:rPr sz="1100" b="0" i="0">
+                <a:spcPct val="112000"/>
+              </a:lnSpc>
+              <a:spcBef>
+                <a:spcPts val="0"/>
+              </a:spcBef>
+              <a:spcAft>
+                <a:spcPts val="0"/>
+              </a:spcAft>
+              <a:buNone/>
+            </a:pPr>
+            <a:r>
+              <a:rPr sz="1000" b="0" i="0">
                 <a:solidFill>
                   <a:srgbClr val="BDC9DB"/>
                 </a:solidFill>
@@ -26297,8 +26568,8 @@
         </p:nvSpPr>
         <p:spPr>
           <a:xfrm>
-            <a:off x="8134666" y="4010000"/>
-            <a:ext cx="3437333" cy="1568000"/>
+            <a:off x="8134666" y="2925000"/>
+            <a:ext cx="3437333" cy="1215000"/>
           </a:xfrm>
           <a:prstGeom prst="roundRect">
             <a:avLst>
@@ -26347,7 +26618,7 @@
         </p:nvSpPr>
         <p:spPr>
           <a:xfrm>
-            <a:off x="8158666" y="4010000"/>
+            <a:off x="8158666" y="2925000"/>
             <a:ext cx="3389333" cy="46000"/>
           </a:xfrm>
           <a:prstGeom prst="rect">
@@ -26393,7 +26664,7 @@
         </p:nvSpPr>
         <p:spPr>
           <a:xfrm>
-            <a:off x="8364666" y="4260000"/>
+            <a:off x="8334666" y="3145000"/>
             <a:ext cx="300000" cy="300000"/>
           </a:xfrm>
           <a:prstGeom prst="ellipse">
@@ -26459,7 +26730,7 @@
         </p:nvSpPr>
         <p:spPr>
           <a:xfrm>
-            <a:off x="11078000" y="4279000"/>
+            <a:off x="11108000" y="3164000"/>
             <a:ext cx="198000" cy="198000"/>
           </a:xfrm>
           <a:prstGeom prst="ellipse">
@@ -26503,7 +26774,7 @@
         </p:nvCxnSpPr>
         <p:spPr>
           <a:xfrm>
-            <a:off x="11144000" y="4490200"/>
+            <a:off x="11174000" y="3375200"/>
             <a:ext cx="66000" cy="0"/>
           </a:xfrm>
           <a:prstGeom prst="line">
@@ -26539,7 +26810,7 @@
         </p:nvCxnSpPr>
         <p:spPr>
           <a:xfrm>
-            <a:off x="11150600" y="4529800"/>
+            <a:off x="11180600" y="3414800"/>
             <a:ext cx="52800" cy="0"/>
           </a:xfrm>
           <a:prstGeom prst="line">
@@ -26575,8 +26846,8 @@
         </p:nvSpPr>
         <p:spPr>
           <a:xfrm>
-            <a:off x="8774666" y="4240000"/>
-            <a:ext cx="2377333" cy="340000"/>
+            <a:off x="8744666" y="3125000"/>
+            <a:ext cx="2407333" cy="340000"/>
           </a:xfrm>
           <a:prstGeom prst="rect">
             <a:avLst/>
@@ -26621,8 +26892,8 @@
         </p:nvSpPr>
         <p:spPr>
           <a:xfrm>
-            <a:off x="8364666" y="4660000"/>
-            <a:ext cx="2977333" cy="838000"/>
+            <a:off x="8334666" y="3485000"/>
+            <a:ext cx="3037333" cy="595000"/>
           </a:xfrm>
           <a:prstGeom prst="rect">
             <a:avLst/>
@@ -26637,24 +26908,235 @@
           <a:p>
             <a:pPr algn="l" marL="0" indent="0">
               <a:lnSpc>
-                <a:spcPct val="118000"/>
-              </a:lnSpc>
-              <a:spcBef>
-                <a:spcPts val="0"/>
-              </a:spcBef>
-              <a:spcAft>
-                <a:spcPts val="0"/>
-              </a:spcAft>
-              <a:buNone/>
-            </a:pPr>
-            <a:r>
-              <a:rPr sz="1100" b="0" i="0">
+                <a:spcPct val="112000"/>
+              </a:lnSpc>
+              <a:spcBef>
+                <a:spcPts val="0"/>
+              </a:spcBef>
+              <a:spcAft>
+                <a:spcPts val="0"/>
+              </a:spcAft>
+              <a:buNone/>
+            </a:pPr>
+            <a:r>
+              <a:rPr sz="1000" b="0" i="0">
                 <a:solidFill>
                   <a:srgbClr val="BDC9DB"/>
                 </a:solidFill>
                 <a:latin typeface="Segoe UI"/>
               </a:rPr>
               <a:t>port es el puerto del Service; targetPort el del contenedor; nodePort el del nodo.</a:t>
+            </a:r>
+          </a:p>
+        </p:txBody>
+      </p:sp>
+      <p:sp>
+        <p:nvSpPr>
+          <p:cNvPr id="46" name="Rounded Rectangle 45"/>
+          <p:cNvSpPr/>
+          <p:nvPr/>
+        </p:nvSpPr>
+        <p:spPr>
+          <a:xfrm>
+            <a:off x="620000" y="4310000"/>
+            <a:ext cx="10952000" cy="2000000"/>
+          </a:xfrm>
+          <a:prstGeom prst="roundRect">
+            <a:avLst>
+              <a:gd name="adj" fmla="val 4500"/>
+            </a:avLst>
+          </a:prstGeom>
+          <a:solidFill>
+            <a:srgbClr val="111A2C"/>
+          </a:solidFill>
+          <a:ln w="12700">
+            <a:solidFill>
+              <a:srgbClr val="26354E"/>
+            </a:solidFill>
+          </a:ln>
+          <a:effectLst/>
+        </p:spPr>
+        <p:style>
+          <a:lnRef idx="1">
+            <a:schemeClr val="accent1"/>
+          </a:lnRef>
+          <a:fillRef idx="3">
+            <a:schemeClr val="accent1"/>
+          </a:fillRef>
+          <a:effectRef idx="2">
+            <a:schemeClr val="accent1"/>
+          </a:effectRef>
+          <a:fontRef idx="minor">
+            <a:schemeClr val="lt1"/>
+          </a:fontRef>
+        </p:style>
+        <p:txBody>
+          <a:bodyPr rtlCol="0" anchor="ctr" lIns="0" rIns="0" tIns="0" bIns="0">
+            <a:noAutofit/>
+          </a:bodyPr>
+          <a:lstStyle/>
+          <a:p>
+            <a:pPr algn="ctr"/>
+          </a:p>
+        </p:txBody>
+      </p:sp>
+      <p:sp>
+        <p:nvSpPr>
+          <p:cNvPr id="47" name="Rectangle 46"/>
+          <p:cNvSpPr/>
+          <p:nvPr/>
+        </p:nvSpPr>
+        <p:spPr>
+          <a:xfrm>
+            <a:off x="646000" y="4332000"/>
+            <a:ext cx="40000" cy="1956000"/>
+          </a:xfrm>
+          <a:prstGeom prst="rect">
+            <a:avLst/>
+          </a:prstGeom>
+          <a:solidFill>
+            <a:srgbClr val="326CE5"/>
+          </a:solidFill>
+          <a:ln>
+            <a:noFill/>
+          </a:ln>
+          <a:effectLst/>
+        </p:spPr>
+        <p:style>
+          <a:lnRef idx="1">
+            <a:schemeClr val="accent1"/>
+          </a:lnRef>
+          <a:fillRef idx="3">
+            <a:schemeClr val="accent1"/>
+          </a:fillRef>
+          <a:effectRef idx="2">
+            <a:schemeClr val="accent1"/>
+          </a:effectRef>
+          <a:fontRef idx="minor">
+            <a:schemeClr val="lt1"/>
+          </a:fontRef>
+        </p:style>
+        <p:txBody>
+          <a:bodyPr rtlCol="0" anchor="ctr" lIns="0" rIns="0" tIns="0" bIns="0">
+            <a:noAutofit/>
+          </a:bodyPr>
+          <a:lstStyle/>
+          <a:p>
+            <a:pPr algn="ctr"/>
+          </a:p>
+        </p:txBody>
+      </p:sp>
+      <p:sp>
+        <p:nvSpPr>
+          <p:cNvPr id="48" name="TextBox 47"/>
+          <p:cNvSpPr txBox="1"/>
+          <p:nvPr/>
+        </p:nvSpPr>
+        <p:spPr>
+          <a:xfrm>
+            <a:off x="860000" y="4440000"/>
+            <a:ext cx="10522000" cy="1740000"/>
+          </a:xfrm>
+          <a:prstGeom prst="rect">
+            <a:avLst/>
+          </a:prstGeom>
+          <a:noFill/>
+        </p:spPr>
+        <p:txBody>
+          <a:bodyPr wrap="square" anchor="t" lIns="0" rIns="0" tIns="0" bIns="0">
+            <a:noAutofit/>
+          </a:bodyPr>
+          <a:lstStyle/>
+          <a:p>
+            <a:pPr algn="l" marL="0" indent="0">
+              <a:lnSpc>
+                <a:spcPct val="100000"/>
+              </a:lnSpc>
+              <a:spcBef>
+                <a:spcPts val="0"/>
+              </a:spcBef>
+              <a:spcAft>
+                <a:spcPts val="600"/>
+              </a:spcAft>
+              <a:buNone/>
+            </a:pPr>
+            <a:r>
+              <a:rPr sz="900" b="1" i="0" spc="200">
+                <a:solidFill>
+                  <a:srgbClr val="326CE5"/>
+                </a:solidFill>
+                <a:latin typeface="Segoe UI Semibold"/>
+              </a:rPr>
+              <a:t>TEORÍA</a:t>
+            </a:r>
+          </a:p>
+          <a:p>
+            <a:pPr algn="l" marL="0" indent="0">
+              <a:lnSpc>
+                <a:spcPct val="128000"/>
+              </a:lnSpc>
+              <a:spcBef>
+                <a:spcPts val="0"/>
+              </a:spcBef>
+              <a:spcAft>
+                <a:spcPts val="400"/>
+              </a:spcAft>
+              <a:buNone/>
+            </a:pPr>
+            <a:r>
+              <a:rPr sz="1000" b="0" i="0">
+                <a:solidFill>
+                  <a:srgbClr val="BDC9DB"/>
+                </a:solidFill>
+                <a:latin typeface="Segoe UI"/>
+              </a:rPr>
+              <a:t>Los tipos de Service se apilan. ClusterIP es la base: una IP virtual accesible solo dentro del cluster, para que los componentes hablen entre sí. NodePort añade a un ClusterIP la apertura del mismo puerto (30000–32767) en todos los nodos; sirve en laboratorio y detrás de un balanceador propio. LoadBalancer añade a un NodePort una IP externa que aprovisiona el proveedor de nube, una por Service.</a:t>
+            </a:r>
+          </a:p>
+          <a:p>
+            <a:pPr algn="l" marL="0" indent="0">
+              <a:lnSpc>
+                <a:spcPct val="128000"/>
+              </a:lnSpc>
+              <a:spcBef>
+                <a:spcPts val="0"/>
+              </a:spcBef>
+              <a:spcAft>
+                <a:spcPts val="400"/>
+              </a:spcAft>
+              <a:buNone/>
+            </a:pPr>
+            <a:r>
+              <a:rPr sz="1000" b="0" i="0">
+                <a:solidFill>
+                  <a:srgbClr val="BDC9DB"/>
+                </a:solidFill>
+                <a:latin typeface="Segoe UI"/>
+              </a:rPr>
+              <a:t>ExternalName es la excepción: no crea ClusterIP, ni endpoints, ni proxy. CoreDNS simplemente devuelve un registro CNAME hacia un nombre DNS externo. Es un alias interno estable para un servicio de fuera del cluster.</a:t>
+            </a:r>
+          </a:p>
+          <a:p>
+            <a:pPr algn="l" marL="0" indent="0">
+              <a:lnSpc>
+                <a:spcPct val="128000"/>
+              </a:lnSpc>
+              <a:spcBef>
+                <a:spcPts val="0"/>
+              </a:spcBef>
+              <a:spcAft>
+                <a:spcPts val="400"/>
+              </a:spcAft>
+              <a:buNone/>
+            </a:pPr>
+            <a:r>
+              <a:rPr sz="1000" b="0" i="0">
+                <a:solidFill>
+                  <a:srgbClr val="BDC9DB"/>
+                </a:solidFill>
+                <a:latin typeface="Segoe UI"/>
+              </a:rPr>
+              <a:t>El caso especial es headless (clusterIP: None): en vez de una VIP, el DNS del Service devuelve directamente las IP de todos los Pods del selector. Es la base del StatefulSet, porque permite direccionar réplicas concretas por nombre. Y el error de siempre: port es el puerto del Service, targetPort el del contenedor, nodePort el del nodo.</a:t>
             </a:r>
           </a:p>
         </p:txBody>
@@ -26993,7 +27475,7 @@
         </p:nvSpPr>
         <p:spPr>
           <a:xfrm>
-            <a:off x="636000" y="2428000"/>
+            <a:off x="636000" y="1751750"/>
             <a:ext cx="104000" cy="104000"/>
           </a:xfrm>
           <a:prstGeom prst="ellipse">
@@ -27037,8 +27519,8 @@
         </p:nvSpPr>
         <p:spPr>
           <a:xfrm>
-            <a:off x="880000" y="2010000"/>
-            <a:ext cx="5435040" cy="940000"/>
+            <a:off x="880000" y="1470000"/>
+            <a:ext cx="5435040" cy="667500"/>
           </a:xfrm>
           <a:prstGeom prst="rect">
             <a:avLst/>
@@ -27083,7 +27565,7 @@
         </p:nvSpPr>
         <p:spPr>
           <a:xfrm>
-            <a:off x="636000" y="3368000"/>
+            <a:off x="636000" y="2419250"/>
             <a:ext cx="104000" cy="104000"/>
           </a:xfrm>
           <a:prstGeom prst="ellipse">
@@ -27127,8 +27609,8 @@
         </p:nvSpPr>
         <p:spPr>
           <a:xfrm>
-            <a:off x="880000" y="2950000"/>
-            <a:ext cx="5435040" cy="940000"/>
+            <a:off x="880000" y="2137500"/>
+            <a:ext cx="5435040" cy="667500"/>
           </a:xfrm>
           <a:prstGeom prst="rect">
             <a:avLst/>
@@ -27173,7 +27655,7 @@
         </p:nvSpPr>
         <p:spPr>
           <a:xfrm>
-            <a:off x="636000" y="4308000"/>
+            <a:off x="636000" y="3086750"/>
             <a:ext cx="104000" cy="104000"/>
           </a:xfrm>
           <a:prstGeom prst="ellipse">
@@ -27217,8 +27699,8 @@
         </p:nvSpPr>
         <p:spPr>
           <a:xfrm>
-            <a:off x="880000" y="3890000"/>
-            <a:ext cx="5435040" cy="940000"/>
+            <a:off x="880000" y="2805000"/>
+            <a:ext cx="5435040" cy="667500"/>
           </a:xfrm>
           <a:prstGeom prst="rect">
             <a:avLst/>
@@ -27263,7 +27745,7 @@
         </p:nvSpPr>
         <p:spPr>
           <a:xfrm>
-            <a:off x="636000" y="5248000"/>
+            <a:off x="636000" y="3754250"/>
             <a:ext cx="104000" cy="104000"/>
           </a:xfrm>
           <a:prstGeom prst="ellipse">
@@ -27307,8 +27789,8 @@
         </p:nvSpPr>
         <p:spPr>
           <a:xfrm>
-            <a:off x="880000" y="4830000"/>
-            <a:ext cx="5435040" cy="940000"/>
+            <a:off x="880000" y="3472500"/>
+            <a:ext cx="5435040" cy="667500"/>
           </a:xfrm>
           <a:prstGeom prst="rect">
             <a:avLst/>
@@ -27353,8 +27835,8 @@
         </p:nvSpPr>
         <p:spPr>
           <a:xfrm>
-            <a:off x="6635040" y="2010000"/>
-            <a:ext cx="4936960" cy="3760000"/>
+            <a:off x="6635040" y="1470000"/>
+            <a:ext cx="4936960" cy="2670000"/>
           </a:xfrm>
           <a:prstGeom prst="roundRect">
             <a:avLst>
@@ -27403,8 +27885,8 @@
         </p:nvSpPr>
         <p:spPr>
           <a:xfrm>
-            <a:off x="6635040" y="2310000"/>
-            <a:ext cx="46000" cy="3460000"/>
+            <a:off x="6635040" y="1770000"/>
+            <a:ext cx="46000" cy="2370000"/>
           </a:xfrm>
           <a:prstGeom prst="rect">
             <a:avLst/>
@@ -27449,7 +27931,7 @@
         </p:nvSpPr>
         <p:spPr>
           <a:xfrm>
-            <a:off x="6825040" y="2070000"/>
+            <a:off x="6825040" y="1530000"/>
             <a:ext cx="4556960" cy="260000"/>
           </a:xfrm>
           <a:prstGeom prst="rect">
@@ -27495,7 +27977,7 @@
         </p:nvSpPr>
         <p:spPr>
           <a:xfrm>
-            <a:off x="6825040" y="2304000"/>
+            <a:off x="6825040" y="1764000"/>
             <a:ext cx="4556960" cy="10000"/>
           </a:xfrm>
           <a:prstGeom prst="rect">
@@ -27541,8 +28023,8 @@
         </p:nvSpPr>
         <p:spPr>
           <a:xfrm>
-            <a:off x="6865040" y="2500000"/>
-            <a:ext cx="4516960" cy="2182114"/>
+            <a:off x="6865040" y="1960000"/>
+            <a:ext cx="4516960" cy="1983740"/>
           </a:xfrm>
           <a:prstGeom prst="rect">
             <a:avLst/>
@@ -27565,7 +28047,7 @@
               <a:buNone/>
             </a:pPr>
             <a:r>
-              <a:rPr sz="1100" b="0" i="0">
+              <a:rPr sz="1000" b="0" i="0">
                 <a:solidFill>
                   <a:srgbClr val="E6EDF3"/>
                 </a:solidFill>
@@ -27585,7 +28067,7 @@
               <a:buNone/>
             </a:pPr>
             <a:r>
-              <a:rPr sz="1100" b="0" i="0">
+              <a:rPr sz="1000" b="0" i="0">
                 <a:solidFill>
                   <a:srgbClr val="E6EDF3"/>
                 </a:solidFill>
@@ -27605,7 +28087,7 @@
               <a:buNone/>
             </a:pPr>
             <a:r>
-              <a:rPr sz="1100" b="0" i="0">
+              <a:rPr sz="1000" b="0" i="0">
                 <a:solidFill>
                   <a:srgbClr val="E6EDF3"/>
                 </a:solidFill>
@@ -27625,7 +28107,7 @@
               <a:buNone/>
             </a:pPr>
             <a:r>
-              <a:rPr sz="1100" b="0" i="0">
+              <a:rPr sz="1000" b="0" i="0">
                 <a:solidFill>
                   <a:srgbClr val="E6EDF3"/>
                 </a:solidFill>
@@ -27645,7 +28127,7 @@
               <a:buNone/>
             </a:pPr>
             <a:r>
-              <a:rPr sz="1100" b="0" i="0">
+              <a:rPr sz="1000" b="0" i="0">
                 <a:solidFill>
                   <a:srgbClr val="E6EDF3"/>
                 </a:solidFill>
@@ -27665,7 +28147,7 @@
               <a:buNone/>
             </a:pPr>
             <a:r>
-              <a:rPr sz="1100" b="0" i="0">
+              <a:rPr sz="1000" b="0" i="0">
                 <a:solidFill>
                   <a:srgbClr val="E6EDF3"/>
                 </a:solidFill>
@@ -27685,7 +28167,7 @@
               <a:buNone/>
             </a:pPr>
             <a:r>
-              <a:rPr sz="1100" b="0" i="1">
+              <a:rPr sz="1000" b="0" i="1">
                 <a:solidFill>
                   <a:srgbClr val="7C8AA5"/>
                 </a:solidFill>
@@ -27705,7 +28187,7 @@
               <a:buNone/>
             </a:pPr>
             <a:r>
-              <a:rPr sz="1100" b="0" i="0">
+              <a:rPr sz="1000" b="0" i="0">
                 <a:solidFill>
                   <a:srgbClr val="E6EDF3"/>
                 </a:solidFill>
@@ -27725,7 +28207,7 @@
               <a:buNone/>
             </a:pPr>
             <a:r>
-              <a:rPr sz="1100" b="0" i="0">
+              <a:rPr sz="1000" b="0" i="0">
                 <a:solidFill>
                   <a:srgbClr val="E6EDF3"/>
                 </a:solidFill>
@@ -27745,7 +28227,7 @@
               <a:buNone/>
             </a:pPr>
             <a:r>
-              <a:rPr sz="1100" b="0" i="0">
+              <a:rPr sz="1000" b="0" i="0">
                 <a:solidFill>
                   <a:srgbClr val="E6EDF3"/>
                 </a:solidFill>
@@ -27765,13 +28247,224 @@
               <a:buNone/>
             </a:pPr>
             <a:r>
-              <a:rPr sz="1100" b="0" i="0">
+              <a:rPr sz="1000" b="0" i="0">
                 <a:solidFill>
                   <a:srgbClr val="E6EDF3"/>
                 </a:solidFill>
                 <a:latin typeface="Consolas"/>
               </a:rPr>
               <a:t>  nslookup &lt;svc&gt;.&lt;ns&gt;</a:t>
+            </a:r>
+          </a:p>
+        </p:txBody>
+      </p:sp>
+      <p:sp>
+        <p:nvSpPr>
+          <p:cNvPr id="22" name="Rounded Rectangle 21"/>
+          <p:cNvSpPr/>
+          <p:nvPr/>
+        </p:nvSpPr>
+        <p:spPr>
+          <a:xfrm>
+            <a:off x="620000" y="4310000"/>
+            <a:ext cx="10952000" cy="2000000"/>
+          </a:xfrm>
+          <a:prstGeom prst="roundRect">
+            <a:avLst>
+              <a:gd name="adj" fmla="val 4500"/>
+            </a:avLst>
+          </a:prstGeom>
+          <a:solidFill>
+            <a:srgbClr val="111A2C"/>
+          </a:solidFill>
+          <a:ln w="12700">
+            <a:solidFill>
+              <a:srgbClr val="26354E"/>
+            </a:solidFill>
+          </a:ln>
+          <a:effectLst/>
+        </p:spPr>
+        <p:style>
+          <a:lnRef idx="1">
+            <a:schemeClr val="accent1"/>
+          </a:lnRef>
+          <a:fillRef idx="3">
+            <a:schemeClr val="accent1"/>
+          </a:fillRef>
+          <a:effectRef idx="2">
+            <a:schemeClr val="accent1"/>
+          </a:effectRef>
+          <a:fontRef idx="minor">
+            <a:schemeClr val="lt1"/>
+          </a:fontRef>
+        </p:style>
+        <p:txBody>
+          <a:bodyPr rtlCol="0" anchor="ctr" lIns="0" rIns="0" tIns="0" bIns="0">
+            <a:noAutofit/>
+          </a:bodyPr>
+          <a:lstStyle/>
+          <a:p>
+            <a:pPr algn="ctr"/>
+          </a:p>
+        </p:txBody>
+      </p:sp>
+      <p:sp>
+        <p:nvSpPr>
+          <p:cNvPr id="23" name="Rectangle 22"/>
+          <p:cNvSpPr/>
+          <p:nvPr/>
+        </p:nvSpPr>
+        <p:spPr>
+          <a:xfrm>
+            <a:off x="646000" y="4332000"/>
+            <a:ext cx="40000" cy="1956000"/>
+          </a:xfrm>
+          <a:prstGeom prst="rect">
+            <a:avLst/>
+          </a:prstGeom>
+          <a:solidFill>
+            <a:srgbClr val="326CE5"/>
+          </a:solidFill>
+          <a:ln>
+            <a:noFill/>
+          </a:ln>
+          <a:effectLst/>
+        </p:spPr>
+        <p:style>
+          <a:lnRef idx="1">
+            <a:schemeClr val="accent1"/>
+          </a:lnRef>
+          <a:fillRef idx="3">
+            <a:schemeClr val="accent1"/>
+          </a:fillRef>
+          <a:effectRef idx="2">
+            <a:schemeClr val="accent1"/>
+          </a:effectRef>
+          <a:fontRef idx="minor">
+            <a:schemeClr val="lt1"/>
+          </a:fontRef>
+        </p:style>
+        <p:txBody>
+          <a:bodyPr rtlCol="0" anchor="ctr" lIns="0" rIns="0" tIns="0" bIns="0">
+            <a:noAutofit/>
+          </a:bodyPr>
+          <a:lstStyle/>
+          <a:p>
+            <a:pPr algn="ctr"/>
+          </a:p>
+        </p:txBody>
+      </p:sp>
+      <p:sp>
+        <p:nvSpPr>
+          <p:cNvPr id="24" name="TextBox 23"/>
+          <p:cNvSpPr txBox="1"/>
+          <p:nvPr/>
+        </p:nvSpPr>
+        <p:spPr>
+          <a:xfrm>
+            <a:off x="860000" y="4440000"/>
+            <a:ext cx="10522000" cy="1740000"/>
+          </a:xfrm>
+          <a:prstGeom prst="rect">
+            <a:avLst/>
+          </a:prstGeom>
+          <a:noFill/>
+        </p:spPr>
+        <p:txBody>
+          <a:bodyPr wrap="square" anchor="t" lIns="0" rIns="0" tIns="0" bIns="0">
+            <a:noAutofit/>
+          </a:bodyPr>
+          <a:lstStyle/>
+          <a:p>
+            <a:pPr algn="l" marL="0" indent="0">
+              <a:lnSpc>
+                <a:spcPct val="100000"/>
+              </a:lnSpc>
+              <a:spcBef>
+                <a:spcPts val="0"/>
+              </a:spcBef>
+              <a:spcAft>
+                <a:spcPts val="600"/>
+              </a:spcAft>
+              <a:buNone/>
+            </a:pPr>
+            <a:r>
+              <a:rPr sz="900" b="1" i="0" spc="200">
+                <a:solidFill>
+                  <a:srgbClr val="326CE5"/>
+                </a:solidFill>
+                <a:latin typeface="Segoe UI Semibold"/>
+              </a:rPr>
+              <a:t>TEORÍA</a:t>
+            </a:r>
+          </a:p>
+          <a:p>
+            <a:pPr algn="l" marL="0" indent="0">
+              <a:lnSpc>
+                <a:spcPct val="128000"/>
+              </a:lnSpc>
+              <a:spcBef>
+                <a:spcPts val="0"/>
+              </a:spcBef>
+              <a:spcAft>
+                <a:spcPts val="400"/>
+              </a:spcAft>
+              <a:buNone/>
+            </a:pPr>
+            <a:r>
+              <a:rPr sz="1050" b="0" i="0">
+                <a:solidFill>
+                  <a:srgbClr val="BDC9DB"/>
+                </a:solidFill>
+                <a:latin typeface="Segoe UI"/>
+              </a:rPr>
+              <a:t>CoreDNS es el servidor DNS interno del cluster. Corre como Deployment en el namespace kube-system y se expone con un Service que, por motivos históricos, se sigue llamando kube-dns. El kubelet inyecta su ClusterIP en el /etc/resolv.conf de cada Pod.</a:t>
+            </a:r>
+          </a:p>
+          <a:p>
+            <a:pPr algn="l" marL="0" indent="0">
+              <a:lnSpc>
+                <a:spcPct val="128000"/>
+              </a:lnSpc>
+              <a:spcBef>
+                <a:spcPts val="0"/>
+              </a:spcBef>
+              <a:spcAft>
+                <a:spcPts val="400"/>
+              </a:spcAft>
+              <a:buNone/>
+            </a:pPr>
+            <a:r>
+              <a:rPr sz="1050" b="0" i="0">
+                <a:solidFill>
+                  <a:srgbClr val="BDC9DB"/>
+                </a:solidFill>
+                <a:latin typeface="Segoe UI"/>
+              </a:rPr>
+              <a:t>El FQDN de un Service es &lt;svc&gt;.&lt;ns&gt;.svc.cluster.local; el de un Pod de StatefulSet añade el nombre del Pod delante. Casi nunca hace falta escribirlo entero: la línea search del resolv.conf añade sufijos automáticamente, de modo que desde dentro de un namespace basta con el nombre corto del Service.</a:t>
+            </a:r>
+          </a:p>
+          <a:p>
+            <a:pPr algn="l" marL="0" indent="0">
+              <a:lnSpc>
+                <a:spcPct val="128000"/>
+              </a:lnSpc>
+              <a:spcBef>
+                <a:spcPts val="0"/>
+              </a:spcBef>
+              <a:spcAft>
+                <a:spcPts val="400"/>
+              </a:spcAft>
+              <a:buNone/>
+            </a:pPr>
+            <a:r>
+              <a:rPr sz="1050" b="0" i="0">
+                <a:solidFill>
+                  <a:srgbClr val="BDC9DB"/>
+                </a:solidFill>
+                <a:latin typeface="Segoe UI"/>
+              </a:rPr>
+              <a:t>La opción ndots:5 significa que un nombre con menos de cinco puntos se prueba primero concatenándole cada sufijo de search antes de intentarlo como nombre absoluto. Esto explica por qué a veces una resolución tarda o falla de forma rara. Para diagnosticar rápido: kubectl run tmp --rm -it --image=busybox:1.36 --restart=Never -- nslookup &lt;svc&gt;.&lt;ns&gt;.</a:t>
             </a:r>
           </a:p>
         </p:txBody>
